--- a/u09a_graphTheory/notes/5 Weighted Graphs/Dijkstra's Algorithm.pptx
+++ b/u09a_graphTheory/notes/5 Weighted Graphs/Dijkstra's Algorithm.pptx
@@ -5,14 +5,16 @@
     <p:sldMasterId id="2147483648" r:id="rId1"/>
   </p:sldMasterIdLst>
   <p:sldIdLst>
-    <p:sldId id="256" r:id="rId2"/>
-    <p:sldId id="257" r:id="rId3"/>
-    <p:sldId id="258" r:id="rId4"/>
-    <p:sldId id="259" r:id="rId5"/>
-    <p:sldId id="266" r:id="rId6"/>
-    <p:sldId id="267" r:id="rId7"/>
-    <p:sldId id="261" r:id="rId8"/>
-    <p:sldId id="262" r:id="rId9"/>
+    <p:sldId id="268" r:id="rId2"/>
+    <p:sldId id="256" r:id="rId3"/>
+    <p:sldId id="257" r:id="rId4"/>
+    <p:sldId id="258" r:id="rId5"/>
+    <p:sldId id="259" r:id="rId6"/>
+    <p:sldId id="266" r:id="rId7"/>
+    <p:sldId id="267" r:id="rId8"/>
+    <p:sldId id="261" r:id="rId9"/>
+    <p:sldId id="269" r:id="rId10"/>
+    <p:sldId id="262" r:id="rId11"/>
   </p:sldIdLst>
   <p:sldSz cx="10058400" cy="7772400"/>
   <p:notesSz cx="10058400" cy="7772400"/>
@@ -1921,6 +1923,4263 @@
       </p:grpSpPr>
       <p:sp>
         <p:nvSpPr>
+          <p:cNvPr id="2" name="Title 1">
+            <a:extLst>
+              <a:ext uri="{FF2B5EF4-FFF2-40B4-BE49-F238E27FC236}">
+                <a16:creationId xmlns:a16="http://schemas.microsoft.com/office/drawing/2014/main" id="{5C7C2FC4-509B-7FCD-AF35-EA01D8006972}"/>
+              </a:ext>
+            </a:extLst>
+          </p:cNvPr>
+          <p:cNvSpPr>
+            <a:spLocks noGrp="1"/>
+          </p:cNvSpPr>
+          <p:nvPr>
+            <p:ph type="title"/>
+          </p:nvPr>
+        </p:nvSpPr>
+        <p:spPr>
+          <a:xfrm>
+            <a:off x="839976" y="228600"/>
+            <a:ext cx="8608823" cy="677108"/>
+          </a:xfrm>
+        </p:spPr>
+        <p:txBody>
+          <a:bodyPr/>
+          <a:lstStyle/>
+          <a:p>
+            <a:pPr algn="ctr"/>
+            <a:r>
+              <a:rPr lang="en-US" sz="4400" b="1" i="0" dirty="0">
+                <a:solidFill>
+                  <a:srgbClr val="202122"/>
+                </a:solidFill>
+                <a:effectLst/>
+                <a:latin typeface="Arial" panose="020B0604020202020204" pitchFamily="34" charset="0"/>
+              </a:rPr>
+              <a:t>Dijkstra’s Algorithm</a:t>
+            </a:r>
+            <a:endParaRPr lang="en-US" sz="4400" dirty="0"/>
+          </a:p>
+        </p:txBody>
+      </p:sp>
+      <p:sp>
+        <p:nvSpPr>
+          <p:cNvPr id="3" name="Text Placeholder 2">
+            <a:extLst>
+              <a:ext uri="{FF2B5EF4-FFF2-40B4-BE49-F238E27FC236}">
+                <a16:creationId xmlns:a16="http://schemas.microsoft.com/office/drawing/2014/main" id="{E772C07F-6727-8894-1D6B-21F27E900FED}"/>
+              </a:ext>
+            </a:extLst>
+          </p:cNvPr>
+          <p:cNvSpPr>
+            <a:spLocks noGrp="1"/>
+          </p:cNvSpPr>
+          <p:nvPr>
+            <p:ph type="body" idx="1"/>
+          </p:nvPr>
+        </p:nvSpPr>
+        <p:spPr>
+          <a:xfrm>
+            <a:off x="993902" y="1800285"/>
+            <a:ext cx="8378444" cy="4524315"/>
+          </a:xfrm>
+        </p:spPr>
+        <p:txBody>
+          <a:bodyPr/>
+          <a:lstStyle/>
+          <a:p>
+            <a:pPr algn="ctr"/>
+            <a:r>
+              <a:rPr lang="en-US" sz="4400" b="1" i="0" dirty="0" err="1">
+                <a:solidFill>
+                  <a:srgbClr val="202122"/>
+                </a:solidFill>
+                <a:effectLst/>
+                <a:latin typeface="Arial" panose="020B0604020202020204" pitchFamily="34" charset="0"/>
+              </a:rPr>
+              <a:t>Edsger</a:t>
+            </a:r>
+            <a:r>
+              <a:rPr lang="en-US" sz="4400" b="1" i="0" dirty="0">
+                <a:solidFill>
+                  <a:srgbClr val="202122"/>
+                </a:solidFill>
+                <a:effectLst/>
+                <a:latin typeface="Arial" panose="020B0604020202020204" pitchFamily="34" charset="0"/>
+              </a:rPr>
+              <a:t> </a:t>
+            </a:r>
+            <a:r>
+              <a:rPr lang="en-US" sz="4400" b="1" i="0" dirty="0" err="1">
+                <a:solidFill>
+                  <a:srgbClr val="202122"/>
+                </a:solidFill>
+                <a:effectLst/>
+                <a:latin typeface="Arial" panose="020B0604020202020204" pitchFamily="34" charset="0"/>
+              </a:rPr>
+              <a:t>Wybe</a:t>
+            </a:r>
+            <a:r>
+              <a:rPr lang="en-US" sz="4400" b="1" i="0" dirty="0">
+                <a:solidFill>
+                  <a:srgbClr val="202122"/>
+                </a:solidFill>
+                <a:effectLst/>
+                <a:latin typeface="Arial" panose="020B0604020202020204" pitchFamily="34" charset="0"/>
+              </a:rPr>
+              <a:t> Dijkstra</a:t>
+            </a:r>
+            <a:endParaRPr lang="en-US" sz="4400" dirty="0">
+              <a:solidFill>
+                <a:srgbClr val="202122"/>
+              </a:solidFill>
+              <a:latin typeface="Arial" panose="020B0604020202020204" pitchFamily="34" charset="0"/>
+            </a:endParaRPr>
+          </a:p>
+          <a:p>
+            <a:pPr algn="ctr">
+              <a:spcBef>
+                <a:spcPts val="1800"/>
+              </a:spcBef>
+              <a:tabLst>
+                <a:tab pos="5029200" algn="l"/>
+              </a:tabLst>
+            </a:pPr>
+            <a:r>
+              <a:rPr lang="en-US" sz="4400" b="0" i="1" u="none" strike="noStrike" dirty="0">
+                <a:solidFill>
+                  <a:schemeClr val="tx1">
+                    <a:lumMod val="65000"/>
+                    <a:lumOff val="35000"/>
+                  </a:schemeClr>
+                </a:solidFill>
+                <a:effectLst/>
+                <a:latin typeface="Arial" panose="020B0604020202020204" pitchFamily="34" charset="0"/>
+              </a:rPr>
+              <a:t>(pronounced DYKE-</a:t>
+            </a:r>
+            <a:r>
+              <a:rPr lang="en-US" sz="4400" b="0" i="1" u="none" strike="noStrike" dirty="0" err="1">
+                <a:solidFill>
+                  <a:schemeClr val="tx1">
+                    <a:lumMod val="65000"/>
+                    <a:lumOff val="35000"/>
+                  </a:schemeClr>
+                </a:solidFill>
+                <a:effectLst/>
+                <a:latin typeface="Arial" panose="020B0604020202020204" pitchFamily="34" charset="0"/>
+              </a:rPr>
+              <a:t>strə</a:t>
+            </a:r>
+            <a:r>
+              <a:rPr lang="en-US" sz="4400" b="0" i="1" u="none" strike="noStrike" dirty="0">
+                <a:solidFill>
+                  <a:schemeClr val="tx1">
+                    <a:lumMod val="65000"/>
+                    <a:lumOff val="35000"/>
+                  </a:schemeClr>
+                </a:solidFill>
+                <a:effectLst/>
+                <a:latin typeface="Arial" panose="020B0604020202020204" pitchFamily="34" charset="0"/>
+              </a:rPr>
+              <a:t>) </a:t>
+            </a:r>
+          </a:p>
+          <a:p>
+            <a:pPr algn="ctr">
+              <a:spcBef>
+                <a:spcPts val="1800"/>
+              </a:spcBef>
+              <a:tabLst>
+                <a:tab pos="5029200" algn="l"/>
+              </a:tabLst>
+            </a:pPr>
+            <a:r>
+              <a:rPr lang="en-US" sz="4400" b="0" i="0" dirty="0">
+                <a:solidFill>
+                  <a:srgbClr val="202122"/>
+                </a:solidFill>
+                <a:effectLst/>
+                <a:latin typeface="Arial" panose="020B0604020202020204" pitchFamily="34" charset="0"/>
+              </a:rPr>
+              <a:t>was a Dutch computer scientist, programmer, software engineer, mathematician, and science essayist. </a:t>
+            </a:r>
+            <a:endParaRPr lang="en-US" sz="4400" dirty="0"/>
+          </a:p>
+        </p:txBody>
+      </p:sp>
+    </p:spTree>
+    <p:extLst>
+      <p:ext uri="{BB962C8B-B14F-4D97-AF65-F5344CB8AC3E}">
+        <p14:creationId xmlns:p14="http://schemas.microsoft.com/office/powerpoint/2010/main" val="3831194436"/>
+      </p:ext>
+    </p:extLst>
+  </p:cSld>
+  <p:clrMapOvr>
+    <a:masterClrMapping/>
+  </p:clrMapOvr>
+</p:sld>
+</file>
+
+<file path=ppt/slides/slide10.xml><?xml version="1.0" encoding="utf-8"?>
+<p:sld xmlns:a="http://schemas.openxmlformats.org/drawingml/2006/main" xmlns:r="http://schemas.openxmlformats.org/officeDocument/2006/relationships" xmlns:p="http://schemas.openxmlformats.org/presentationml/2006/main">
+  <p:cSld>
+    <p:spTree>
+      <p:nvGrpSpPr>
+        <p:cNvPr id="1" name=""/>
+        <p:cNvGrpSpPr/>
+        <p:nvPr/>
+      </p:nvGrpSpPr>
+      <p:grpSpPr>
+        <a:xfrm>
+          <a:off x="0" y="0"/>
+          <a:ext cx="0" cy="0"/>
+          <a:chOff x="0" y="0"/>
+          <a:chExt cx="0" cy="0"/>
+        </a:xfrm>
+      </p:grpSpPr>
+      <p:sp>
+        <p:nvSpPr>
+          <p:cNvPr id="2" name="object 2"/>
+          <p:cNvSpPr txBox="1"/>
+          <p:nvPr/>
+        </p:nvSpPr>
+        <p:spPr>
+          <a:xfrm>
+            <a:off x="7089902" y="663447"/>
+            <a:ext cx="2061210" cy="310515"/>
+          </a:xfrm>
+          <a:prstGeom prst="rect">
+            <a:avLst/>
+          </a:prstGeom>
+        </p:spPr>
+        <p:txBody>
+          <a:bodyPr vert="horz" wrap="square" lIns="0" tIns="0" rIns="0" bIns="0" rtlCol="0">
+            <a:spAutoFit/>
+          </a:bodyPr>
+          <a:lstStyle/>
+          <a:p>
+            <a:pPr marL="12700">
+              <a:lnSpc>
+                <a:spcPct val="100000"/>
+              </a:lnSpc>
+            </a:pPr>
+            <a:r>
+              <a:rPr sz="1800" spc="-5" dirty="0">
+                <a:latin typeface="Arial"/>
+                <a:cs typeface="Arial"/>
+              </a:rPr>
+              <a:t>Weighted </a:t>
+            </a:r>
+            <a:r>
+              <a:rPr sz="1800" dirty="0">
+                <a:latin typeface="Arial"/>
+                <a:cs typeface="Arial"/>
+              </a:rPr>
+              <a:t>Graphs</a:t>
+            </a:r>
+            <a:r>
+              <a:rPr sz="1800" spc="350" dirty="0">
+                <a:latin typeface="Arial"/>
+                <a:cs typeface="Arial"/>
+              </a:rPr>
+              <a:t> </a:t>
+            </a:r>
+            <a:r>
+              <a:rPr sz="3000" spc="-7" baseline="2777" dirty="0">
+                <a:latin typeface="Arial"/>
+                <a:cs typeface="Arial"/>
+              </a:rPr>
+              <a:t>7</a:t>
+            </a:r>
+            <a:endParaRPr sz="3000" baseline="2777">
+              <a:latin typeface="Arial"/>
+              <a:cs typeface="Arial"/>
+            </a:endParaRPr>
+          </a:p>
+        </p:txBody>
+      </p:sp>
+      <p:sp>
+        <p:nvSpPr>
+          <p:cNvPr id="5" name="object 5">
+            <a:extLst>
+              <a:ext uri="{C183D7F6-B498-43B3-948B-1728B52AA6E4}">
+                <adec:decorative xmlns:adec="http://schemas.microsoft.com/office/drawing/2017/decorative" val="1"/>
+              </a:ext>
+            </a:extLst>
+          </p:cNvPr>
+          <p:cNvSpPr txBox="1"/>
+          <p:nvPr/>
+        </p:nvSpPr>
+        <p:spPr>
+          <a:xfrm>
+            <a:off x="3583940" y="7023337"/>
+            <a:ext cx="2872740" cy="229235"/>
+          </a:xfrm>
+          <a:prstGeom prst="rect">
+            <a:avLst/>
+          </a:prstGeom>
+        </p:spPr>
+        <p:txBody>
+          <a:bodyPr vert="horz" wrap="square" lIns="0" tIns="0" rIns="0" bIns="0" rtlCol="0">
+            <a:spAutoFit/>
+          </a:bodyPr>
+          <a:lstStyle/>
+          <a:p>
+            <a:pPr marL="12700">
+              <a:lnSpc>
+                <a:spcPts val="1720"/>
+              </a:lnSpc>
+            </a:pPr>
+            <a:r>
+              <a:rPr sz="1600" b="1" spc="-5" dirty="0">
+                <a:solidFill>
+                  <a:srgbClr val="9A0033"/>
+                </a:solidFill>
+                <a:latin typeface="Arial"/>
+                <a:cs typeface="Arial"/>
+              </a:rPr>
+              <a:t>Data Structures </a:t>
+            </a:r>
+            <a:r>
+              <a:rPr sz="1600" b="1" dirty="0">
+                <a:solidFill>
+                  <a:srgbClr val="9A0033"/>
+                </a:solidFill>
+                <a:latin typeface="Arial"/>
+                <a:cs typeface="Arial"/>
+              </a:rPr>
+              <a:t>&amp;</a:t>
+            </a:r>
+            <a:r>
+              <a:rPr sz="1600" b="1" spc="-70" dirty="0">
+                <a:solidFill>
+                  <a:srgbClr val="9A0033"/>
+                </a:solidFill>
+                <a:latin typeface="Arial"/>
+                <a:cs typeface="Arial"/>
+              </a:rPr>
+              <a:t> </a:t>
+            </a:r>
+            <a:r>
+              <a:rPr sz="1600" b="1" spc="-5" dirty="0">
+                <a:solidFill>
+                  <a:srgbClr val="9A0033"/>
+                </a:solidFill>
+                <a:latin typeface="Arial"/>
+                <a:cs typeface="Arial"/>
+              </a:rPr>
+              <a:t>Algorithms</a:t>
+            </a:r>
+            <a:endParaRPr sz="1600">
+              <a:latin typeface="Arial"/>
+              <a:cs typeface="Arial"/>
+            </a:endParaRPr>
+          </a:p>
+        </p:txBody>
+      </p:sp>
+      <p:sp>
+        <p:nvSpPr>
+          <p:cNvPr id="6" name="object 6">
+            <a:extLst>
+              <a:ext uri="{C183D7F6-B498-43B3-948B-1728B52AA6E4}">
+                <adec:decorative xmlns:adec="http://schemas.microsoft.com/office/drawing/2017/decorative" val="1"/>
+              </a:ext>
+            </a:extLst>
+          </p:cNvPr>
+          <p:cNvSpPr txBox="1">
+            <a:spLocks noGrp="1"/>
+          </p:cNvSpPr>
+          <p:nvPr>
+            <p:ph type="dt" sz="half" idx="6"/>
+          </p:nvPr>
+        </p:nvSpPr>
+        <p:spPr>
+          <a:prstGeom prst="rect">
+            <a:avLst/>
+          </a:prstGeom>
+        </p:spPr>
+        <p:txBody>
+          <a:bodyPr vert="horz" wrap="square" lIns="0" tIns="0" rIns="0" bIns="0" rtlCol="0">
+            <a:spAutoFit/>
+          </a:bodyPr>
+          <a:lstStyle/>
+          <a:p>
+            <a:pPr marL="12700">
+              <a:lnSpc>
+                <a:spcPts val="1515"/>
+              </a:lnSpc>
+            </a:pPr>
+            <a:r>
+              <a:rPr spc="-5" dirty="0"/>
+              <a:t>CS@VT</a:t>
+            </a:r>
+          </a:p>
+        </p:txBody>
+      </p:sp>
+      <p:sp>
+        <p:nvSpPr>
+          <p:cNvPr id="7" name="object 7">
+            <a:extLst>
+              <a:ext uri="{C183D7F6-B498-43B3-948B-1728B52AA6E4}">
+                <adec:decorative xmlns:adec="http://schemas.microsoft.com/office/drawing/2017/decorative" val="1"/>
+              </a:ext>
+            </a:extLst>
+          </p:cNvPr>
+          <p:cNvSpPr txBox="1">
+            <a:spLocks noGrp="1"/>
+          </p:cNvSpPr>
+          <p:nvPr>
+            <p:ph type="ftr" sz="quarter" idx="5"/>
+          </p:nvPr>
+        </p:nvSpPr>
+        <p:spPr>
+          <a:prstGeom prst="rect">
+            <a:avLst/>
+          </a:prstGeom>
+        </p:spPr>
+        <p:txBody>
+          <a:bodyPr vert="horz" wrap="square" lIns="0" tIns="0" rIns="0" bIns="0" rtlCol="0">
+            <a:spAutoFit/>
+          </a:bodyPr>
+          <a:lstStyle/>
+          <a:p>
+            <a:pPr marL="12700">
+              <a:lnSpc>
+                <a:spcPts val="1310"/>
+              </a:lnSpc>
+            </a:pPr>
+            <a:r>
+              <a:rPr spc="-5" dirty="0"/>
+              <a:t>©2000-2009</a:t>
+            </a:r>
+            <a:r>
+              <a:rPr spc="-75" dirty="0"/>
+              <a:t> </a:t>
+            </a:r>
+            <a:r>
+              <a:rPr spc="-5" dirty="0"/>
+              <a:t>McQuain</a:t>
+            </a:r>
+          </a:p>
+        </p:txBody>
+      </p:sp>
+      <p:sp>
+        <p:nvSpPr>
+          <p:cNvPr id="3" name="object 3"/>
+          <p:cNvSpPr txBox="1">
+            <a:spLocks noGrp="1"/>
+          </p:cNvSpPr>
+          <p:nvPr>
+            <p:ph type="title"/>
+          </p:nvPr>
+        </p:nvSpPr>
+        <p:spPr>
+          <a:prstGeom prst="rect">
+            <a:avLst/>
+          </a:prstGeom>
+        </p:spPr>
+        <p:txBody>
+          <a:bodyPr vert="horz" wrap="square" lIns="0" tIns="0" rIns="0" bIns="0" rtlCol="0">
+            <a:spAutoFit/>
+          </a:bodyPr>
+          <a:lstStyle/>
+          <a:p>
+            <a:pPr marL="12700">
+              <a:lnSpc>
+                <a:spcPct val="100000"/>
+              </a:lnSpc>
+            </a:pPr>
+            <a:r>
+              <a:rPr spc="-5" dirty="0"/>
+              <a:t>Limitations</a:t>
+            </a:r>
+          </a:p>
+        </p:txBody>
+      </p:sp>
+      <p:sp>
+        <p:nvSpPr>
+          <p:cNvPr id="4" name="object 4"/>
+          <p:cNvSpPr txBox="1"/>
+          <p:nvPr/>
+        </p:nvSpPr>
+        <p:spPr>
+          <a:xfrm>
+            <a:off x="993902" y="1179321"/>
+            <a:ext cx="8147684" cy="1536065"/>
+          </a:xfrm>
+          <a:prstGeom prst="rect">
+            <a:avLst/>
+          </a:prstGeom>
+        </p:spPr>
+        <p:txBody>
+          <a:bodyPr vert="horz" wrap="square" lIns="0" tIns="0" rIns="0" bIns="0" rtlCol="0">
+            <a:spAutoFit/>
+          </a:bodyPr>
+          <a:lstStyle/>
+          <a:p>
+            <a:pPr marL="12700">
+              <a:lnSpc>
+                <a:spcPct val="100000"/>
+              </a:lnSpc>
+            </a:pPr>
+            <a:r>
+              <a:rPr sz="2000" spc="-10" dirty="0">
+                <a:latin typeface="Times New Roman"/>
+                <a:cs typeface="Times New Roman"/>
+              </a:rPr>
+              <a:t>Dijkstra's SSAD Algorithm </a:t>
+            </a:r>
+            <a:r>
+              <a:rPr sz="2000" spc="-5" dirty="0">
+                <a:latin typeface="Times New Roman"/>
+                <a:cs typeface="Times New Roman"/>
+              </a:rPr>
+              <a:t>only </a:t>
+            </a:r>
+            <a:r>
+              <a:rPr sz="2000" spc="-10" dirty="0">
+                <a:latin typeface="Times New Roman"/>
+                <a:cs typeface="Times New Roman"/>
+              </a:rPr>
+              <a:t>works </a:t>
+            </a:r>
+            <a:r>
+              <a:rPr sz="2000" spc="-5" dirty="0">
+                <a:latin typeface="Times New Roman"/>
+                <a:cs typeface="Times New Roman"/>
+              </a:rPr>
+              <a:t>for graphs with non-negative</a:t>
+            </a:r>
+            <a:r>
+              <a:rPr sz="2000" spc="180" dirty="0">
+                <a:latin typeface="Times New Roman"/>
+                <a:cs typeface="Times New Roman"/>
+              </a:rPr>
+              <a:t> </a:t>
+            </a:r>
+            <a:r>
+              <a:rPr sz="2000" spc="-5" dirty="0">
+                <a:latin typeface="Times New Roman"/>
+                <a:cs typeface="Times New Roman"/>
+              </a:rPr>
+              <a:t>weights.</a:t>
+            </a:r>
+            <a:endParaRPr sz="2000" dirty="0">
+              <a:latin typeface="Times New Roman"/>
+              <a:cs typeface="Times New Roman"/>
+            </a:endParaRPr>
+          </a:p>
+          <a:p>
+            <a:pPr>
+              <a:lnSpc>
+                <a:spcPct val="100000"/>
+              </a:lnSpc>
+            </a:pPr>
+            <a:endParaRPr sz="2000" dirty="0">
+              <a:latin typeface="Times New Roman"/>
+              <a:cs typeface="Times New Roman"/>
+            </a:endParaRPr>
+          </a:p>
+          <a:p>
+            <a:pPr>
+              <a:lnSpc>
+                <a:spcPct val="100000"/>
+              </a:lnSpc>
+              <a:spcBef>
+                <a:spcPts val="25"/>
+              </a:spcBef>
+            </a:pPr>
+            <a:endParaRPr sz="2150" dirty="0">
+              <a:latin typeface="Times New Roman"/>
+              <a:cs typeface="Times New Roman"/>
+            </a:endParaRPr>
+          </a:p>
+          <a:p>
+            <a:pPr marL="12700" marR="5080">
+              <a:lnSpc>
+                <a:spcPct val="100000"/>
+              </a:lnSpc>
+            </a:pPr>
+            <a:r>
+              <a:rPr sz="2000" spc="-5" dirty="0">
+                <a:latin typeface="Times New Roman"/>
+                <a:cs typeface="Times New Roman"/>
+              </a:rPr>
+              <a:t>See the </a:t>
+            </a:r>
+            <a:r>
+              <a:rPr sz="2000" spc="-10" dirty="0">
+                <a:latin typeface="Times New Roman"/>
+                <a:cs typeface="Times New Roman"/>
+              </a:rPr>
+              <a:t>Bellman-Ford Algorithm, </a:t>
+            </a:r>
+            <a:r>
+              <a:rPr sz="2000" spc="-5" dirty="0">
+                <a:latin typeface="Times New Roman"/>
+                <a:cs typeface="Times New Roman"/>
+              </a:rPr>
+              <a:t>which works even if the weights are negative,  provided there is no </a:t>
+            </a:r>
+            <a:r>
+              <a:rPr sz="2000" i="1" spc="-10" dirty="0">
+                <a:latin typeface="Times New Roman"/>
+                <a:cs typeface="Times New Roman"/>
+              </a:rPr>
+              <a:t>negative </a:t>
+            </a:r>
+            <a:r>
+              <a:rPr sz="2000" i="1" spc="-5" dirty="0">
+                <a:latin typeface="Times New Roman"/>
+                <a:cs typeface="Times New Roman"/>
+              </a:rPr>
+              <a:t>cycle </a:t>
+            </a:r>
+            <a:r>
+              <a:rPr sz="2000" spc="-5" dirty="0">
+                <a:latin typeface="Times New Roman"/>
+                <a:cs typeface="Times New Roman"/>
+              </a:rPr>
+              <a:t>(a cycle </a:t>
+            </a:r>
+            <a:r>
+              <a:rPr sz="2000" spc="-10" dirty="0">
+                <a:latin typeface="Times New Roman"/>
+                <a:cs typeface="Times New Roman"/>
+              </a:rPr>
+              <a:t>whose </a:t>
+            </a:r>
+            <a:r>
+              <a:rPr sz="2000" spc="-5" dirty="0">
+                <a:latin typeface="Times New Roman"/>
+                <a:cs typeface="Times New Roman"/>
+              </a:rPr>
+              <a:t>total </a:t>
+            </a:r>
+            <a:r>
+              <a:rPr sz="2000" spc="-10" dirty="0">
+                <a:latin typeface="Times New Roman"/>
+                <a:cs typeface="Times New Roman"/>
+              </a:rPr>
+              <a:t>weight </a:t>
+            </a:r>
+            <a:r>
+              <a:rPr sz="2000" spc="-5" dirty="0">
+                <a:latin typeface="Times New Roman"/>
+                <a:cs typeface="Times New Roman"/>
+              </a:rPr>
+              <a:t>is</a:t>
+            </a:r>
+            <a:r>
+              <a:rPr sz="2000" spc="160" dirty="0">
+                <a:latin typeface="Times New Roman"/>
+                <a:cs typeface="Times New Roman"/>
+              </a:rPr>
+              <a:t> </a:t>
+            </a:r>
+            <a:r>
+              <a:rPr sz="2000" spc="-10" dirty="0">
+                <a:latin typeface="Times New Roman"/>
+                <a:cs typeface="Times New Roman"/>
+              </a:rPr>
+              <a:t>negative).</a:t>
+            </a:r>
+            <a:endParaRPr sz="2000" dirty="0">
+              <a:latin typeface="Times New Roman"/>
+              <a:cs typeface="Times New Roman"/>
+            </a:endParaRPr>
+          </a:p>
+        </p:txBody>
+      </p:sp>
+      <p:grpSp>
+        <p:nvGrpSpPr>
+          <p:cNvPr id="8" name="Group 7" descr="An undirected graph with nine nodes:&#10;a connects to b weight 15 and c weight 25&#10;b connects to a weight 15, e weight 10, h weight 5, and i weight 25&#10;c connects to a weight 25, d weight 10, and e weight 20&#10;d connects to c weight 10&#10;&#10;Connections:&#10;{(a,b,15), (b,h,5), (h,i,15), (b,i,25), (b,e,10), (e,g,5), (e,f,10), (e,c,20), (c,d,10), (c,a,25)}&#10;&#10;Connections (one per line)&#10;a b 15&#10;a c 25&#10;b e 10&#10;b h 5&#10;b i 25&#10;c d 10&#10;c e 20&#10;e f 10&#10;e g 5&#10;h i 15&#10;">
+            <a:extLst>
+              <a:ext uri="{FF2B5EF4-FFF2-40B4-BE49-F238E27FC236}">
+                <a16:creationId xmlns:a16="http://schemas.microsoft.com/office/drawing/2014/main" id="{39C6E93E-B326-EE1C-F03F-AB931D19FF2D}"/>
+              </a:ext>
+            </a:extLst>
+          </p:cNvPr>
+          <p:cNvGrpSpPr/>
+          <p:nvPr/>
+        </p:nvGrpSpPr>
+        <p:grpSpPr>
+          <a:xfrm>
+            <a:off x="5243438" y="3245937"/>
+            <a:ext cx="3886200" cy="3200907"/>
+            <a:chOff x="1143000" y="3657600"/>
+            <a:chExt cx="3886200" cy="3200907"/>
+          </a:xfrm>
+        </p:grpSpPr>
+        <p:sp>
+          <p:nvSpPr>
+            <p:cNvPr id="9" name="object 9">
+              <a:extLst>
+                <a:ext uri="{FF2B5EF4-FFF2-40B4-BE49-F238E27FC236}">
+                  <a16:creationId xmlns:a16="http://schemas.microsoft.com/office/drawing/2014/main" id="{0B9225BF-E645-9121-3894-86D182809B9A}"/>
+                </a:ext>
+              </a:extLst>
+            </p:cNvPr>
+            <p:cNvSpPr/>
+            <p:nvPr/>
+          </p:nvSpPr>
+          <p:spPr>
+            <a:xfrm>
+              <a:off x="1719072" y="3657600"/>
+              <a:ext cx="354330" cy="321310"/>
+            </a:xfrm>
+            <a:custGeom>
+              <a:avLst/>
+              <a:gdLst/>
+              <a:ahLst/>
+              <a:cxnLst/>
+              <a:rect l="l" t="t" r="r" b="b"/>
+              <a:pathLst>
+                <a:path w="354330" h="321310">
+                  <a:moveTo>
+                    <a:pt x="354329" y="160020"/>
+                  </a:moveTo>
+                  <a:lnTo>
+                    <a:pt x="348008" y="117475"/>
+                  </a:lnTo>
+                  <a:lnTo>
+                    <a:pt x="330171" y="79247"/>
+                  </a:lnTo>
+                  <a:lnTo>
+                    <a:pt x="302513" y="46862"/>
+                  </a:lnTo>
+                  <a:lnTo>
+                    <a:pt x="266728" y="21843"/>
+                  </a:lnTo>
+                  <a:lnTo>
+                    <a:pt x="224507" y="5714"/>
+                  </a:lnTo>
+                  <a:lnTo>
+                    <a:pt x="177545" y="0"/>
+                  </a:lnTo>
+                  <a:lnTo>
+                    <a:pt x="130263" y="5715"/>
+                  </a:lnTo>
+                  <a:lnTo>
+                    <a:pt x="87827" y="21844"/>
+                  </a:lnTo>
+                  <a:lnTo>
+                    <a:pt x="51911" y="46863"/>
+                  </a:lnTo>
+                  <a:lnTo>
+                    <a:pt x="24186" y="79248"/>
+                  </a:lnTo>
+                  <a:lnTo>
+                    <a:pt x="6325" y="117475"/>
+                  </a:lnTo>
+                  <a:lnTo>
+                    <a:pt x="0" y="160020"/>
+                  </a:lnTo>
+                  <a:lnTo>
+                    <a:pt x="6325" y="202886"/>
+                  </a:lnTo>
+                  <a:lnTo>
+                    <a:pt x="24186" y="241328"/>
+                  </a:lnTo>
+                  <a:lnTo>
+                    <a:pt x="51911" y="273843"/>
+                  </a:lnTo>
+                  <a:lnTo>
+                    <a:pt x="87827" y="298929"/>
+                  </a:lnTo>
+                  <a:lnTo>
+                    <a:pt x="130263" y="315083"/>
+                  </a:lnTo>
+                  <a:lnTo>
+                    <a:pt x="177545" y="320802"/>
+                  </a:lnTo>
+                  <a:lnTo>
+                    <a:pt x="224507" y="315083"/>
+                  </a:lnTo>
+                  <a:lnTo>
+                    <a:pt x="266728" y="298929"/>
+                  </a:lnTo>
+                  <a:lnTo>
+                    <a:pt x="302513" y="273843"/>
+                  </a:lnTo>
+                  <a:lnTo>
+                    <a:pt x="330171" y="241328"/>
+                  </a:lnTo>
+                  <a:lnTo>
+                    <a:pt x="348008" y="202886"/>
+                  </a:lnTo>
+                  <a:lnTo>
+                    <a:pt x="354329" y="160020"/>
+                  </a:lnTo>
+                  <a:close/>
+                </a:path>
+              </a:pathLst>
+            </a:custGeom>
+            <a:solidFill>
+              <a:srgbClr val="EAEAEA"/>
+            </a:solidFill>
+          </p:spPr>
+          <p:txBody>
+            <a:bodyPr wrap="square" lIns="0" tIns="0" rIns="0" bIns="0" rtlCol="0"/>
+            <a:lstStyle/>
+            <a:p>
+              <a:endParaRPr/>
+            </a:p>
+          </p:txBody>
+        </p:sp>
+        <p:sp>
+          <p:nvSpPr>
+            <p:cNvPr id="10" name="object 10">
+              <a:extLst>
+                <a:ext uri="{FF2B5EF4-FFF2-40B4-BE49-F238E27FC236}">
+                  <a16:creationId xmlns:a16="http://schemas.microsoft.com/office/drawing/2014/main" id="{FD32D920-BF11-DC47-C59B-1D77A84B398A}"/>
+                </a:ext>
+              </a:extLst>
+            </p:cNvPr>
+            <p:cNvSpPr/>
+            <p:nvPr/>
+          </p:nvSpPr>
+          <p:spPr>
+            <a:xfrm>
+              <a:off x="1719072" y="3657600"/>
+              <a:ext cx="354330" cy="321310"/>
+            </a:xfrm>
+            <a:custGeom>
+              <a:avLst/>
+              <a:gdLst/>
+              <a:ahLst/>
+              <a:cxnLst/>
+              <a:rect l="l" t="t" r="r" b="b"/>
+              <a:pathLst>
+                <a:path w="354330" h="321310">
+                  <a:moveTo>
+                    <a:pt x="177545" y="0"/>
+                  </a:moveTo>
+                  <a:lnTo>
+                    <a:pt x="130263" y="5715"/>
+                  </a:lnTo>
+                  <a:lnTo>
+                    <a:pt x="87827" y="21844"/>
+                  </a:lnTo>
+                  <a:lnTo>
+                    <a:pt x="51911" y="46863"/>
+                  </a:lnTo>
+                  <a:lnTo>
+                    <a:pt x="24186" y="79248"/>
+                  </a:lnTo>
+                  <a:lnTo>
+                    <a:pt x="6325" y="117475"/>
+                  </a:lnTo>
+                  <a:lnTo>
+                    <a:pt x="0" y="160020"/>
+                  </a:lnTo>
+                  <a:lnTo>
+                    <a:pt x="6325" y="202886"/>
+                  </a:lnTo>
+                  <a:lnTo>
+                    <a:pt x="24186" y="241328"/>
+                  </a:lnTo>
+                  <a:lnTo>
+                    <a:pt x="51911" y="273843"/>
+                  </a:lnTo>
+                  <a:lnTo>
+                    <a:pt x="87827" y="298929"/>
+                  </a:lnTo>
+                  <a:lnTo>
+                    <a:pt x="130263" y="315083"/>
+                  </a:lnTo>
+                  <a:lnTo>
+                    <a:pt x="177545" y="320802"/>
+                  </a:lnTo>
+                  <a:lnTo>
+                    <a:pt x="224507" y="315083"/>
+                  </a:lnTo>
+                  <a:lnTo>
+                    <a:pt x="266728" y="298929"/>
+                  </a:lnTo>
+                  <a:lnTo>
+                    <a:pt x="302513" y="273843"/>
+                  </a:lnTo>
+                  <a:lnTo>
+                    <a:pt x="330171" y="241328"/>
+                  </a:lnTo>
+                  <a:lnTo>
+                    <a:pt x="348008" y="202886"/>
+                  </a:lnTo>
+                  <a:lnTo>
+                    <a:pt x="354329" y="160020"/>
+                  </a:lnTo>
+                  <a:lnTo>
+                    <a:pt x="348008" y="117475"/>
+                  </a:lnTo>
+                  <a:lnTo>
+                    <a:pt x="330171" y="79247"/>
+                  </a:lnTo>
+                  <a:lnTo>
+                    <a:pt x="302513" y="46862"/>
+                  </a:lnTo>
+                  <a:lnTo>
+                    <a:pt x="266728" y="21843"/>
+                  </a:lnTo>
+                  <a:lnTo>
+                    <a:pt x="224507" y="5714"/>
+                  </a:lnTo>
+                  <a:lnTo>
+                    <a:pt x="177545" y="0"/>
+                  </a:lnTo>
+                  <a:close/>
+                </a:path>
+              </a:pathLst>
+            </a:custGeom>
+            <a:ln w="9525">
+              <a:solidFill>
+                <a:srgbClr val="000000"/>
+              </a:solidFill>
+            </a:ln>
+          </p:spPr>
+          <p:txBody>
+            <a:bodyPr wrap="square" lIns="0" tIns="0" rIns="0" bIns="0" rtlCol="0"/>
+            <a:lstStyle/>
+            <a:p>
+              <a:endParaRPr/>
+            </a:p>
+          </p:txBody>
+        </p:sp>
+        <p:sp>
+          <p:nvSpPr>
+            <p:cNvPr id="11" name="object 11">
+              <a:extLst>
+                <a:ext uri="{FF2B5EF4-FFF2-40B4-BE49-F238E27FC236}">
+                  <a16:creationId xmlns:a16="http://schemas.microsoft.com/office/drawing/2014/main" id="{630F2DCD-57DE-4C6D-DA37-ADDB1DA1148B}"/>
+                </a:ext>
+              </a:extLst>
+            </p:cNvPr>
+            <p:cNvSpPr/>
+            <p:nvPr/>
+          </p:nvSpPr>
+          <p:spPr>
+            <a:xfrm>
+              <a:off x="3609594" y="3870197"/>
+              <a:ext cx="356235" cy="321310"/>
+            </a:xfrm>
+            <a:custGeom>
+              <a:avLst/>
+              <a:gdLst/>
+              <a:ahLst/>
+              <a:cxnLst/>
+              <a:rect l="l" t="t" r="r" b="b"/>
+              <a:pathLst>
+                <a:path w="356235" h="321310">
+                  <a:moveTo>
+                    <a:pt x="355854" y="160782"/>
+                  </a:moveTo>
+                  <a:lnTo>
+                    <a:pt x="349528" y="117915"/>
+                  </a:lnTo>
+                  <a:lnTo>
+                    <a:pt x="331667" y="79473"/>
+                  </a:lnTo>
+                  <a:lnTo>
+                    <a:pt x="303942" y="46958"/>
+                  </a:lnTo>
+                  <a:lnTo>
+                    <a:pt x="268026" y="21872"/>
+                  </a:lnTo>
+                  <a:lnTo>
+                    <a:pt x="225590" y="5718"/>
+                  </a:lnTo>
+                  <a:lnTo>
+                    <a:pt x="178308" y="0"/>
+                  </a:lnTo>
+                  <a:lnTo>
+                    <a:pt x="130968" y="5718"/>
+                  </a:lnTo>
+                  <a:lnTo>
+                    <a:pt x="88392" y="21872"/>
+                  </a:lnTo>
+                  <a:lnTo>
+                    <a:pt x="52292" y="46958"/>
+                  </a:lnTo>
+                  <a:lnTo>
+                    <a:pt x="24384" y="79473"/>
+                  </a:lnTo>
+                  <a:lnTo>
+                    <a:pt x="6381" y="117915"/>
+                  </a:lnTo>
+                  <a:lnTo>
+                    <a:pt x="0" y="160782"/>
+                  </a:lnTo>
+                  <a:lnTo>
+                    <a:pt x="6381" y="203327"/>
+                  </a:lnTo>
+                  <a:lnTo>
+                    <a:pt x="24384" y="241554"/>
+                  </a:lnTo>
+                  <a:lnTo>
+                    <a:pt x="52292" y="273939"/>
+                  </a:lnTo>
+                  <a:lnTo>
+                    <a:pt x="88392" y="298958"/>
+                  </a:lnTo>
+                  <a:lnTo>
+                    <a:pt x="130968" y="315087"/>
+                  </a:lnTo>
+                  <a:lnTo>
+                    <a:pt x="178308" y="320802"/>
+                  </a:lnTo>
+                  <a:lnTo>
+                    <a:pt x="225590" y="315087"/>
+                  </a:lnTo>
+                  <a:lnTo>
+                    <a:pt x="268026" y="298958"/>
+                  </a:lnTo>
+                  <a:lnTo>
+                    <a:pt x="303942" y="273939"/>
+                  </a:lnTo>
+                  <a:lnTo>
+                    <a:pt x="331667" y="241554"/>
+                  </a:lnTo>
+                  <a:lnTo>
+                    <a:pt x="349528" y="203327"/>
+                  </a:lnTo>
+                  <a:lnTo>
+                    <a:pt x="355854" y="160782"/>
+                  </a:lnTo>
+                  <a:close/>
+                </a:path>
+              </a:pathLst>
+            </a:custGeom>
+            <a:solidFill>
+              <a:srgbClr val="EAEAEA"/>
+            </a:solidFill>
+          </p:spPr>
+          <p:txBody>
+            <a:bodyPr wrap="square" lIns="0" tIns="0" rIns="0" bIns="0" rtlCol="0"/>
+            <a:lstStyle/>
+            <a:p>
+              <a:endParaRPr/>
+            </a:p>
+          </p:txBody>
+        </p:sp>
+        <p:sp>
+          <p:nvSpPr>
+            <p:cNvPr id="12" name="object 12">
+              <a:extLst>
+                <a:ext uri="{FF2B5EF4-FFF2-40B4-BE49-F238E27FC236}">
+                  <a16:creationId xmlns:a16="http://schemas.microsoft.com/office/drawing/2014/main" id="{BE84059A-CDFA-0A94-36D1-47301265F941}"/>
+                </a:ext>
+              </a:extLst>
+            </p:cNvPr>
+            <p:cNvSpPr/>
+            <p:nvPr/>
+          </p:nvSpPr>
+          <p:spPr>
+            <a:xfrm>
+              <a:off x="3609594" y="3870197"/>
+              <a:ext cx="356235" cy="321310"/>
+            </a:xfrm>
+            <a:custGeom>
+              <a:avLst/>
+              <a:gdLst/>
+              <a:ahLst/>
+              <a:cxnLst/>
+              <a:rect l="l" t="t" r="r" b="b"/>
+              <a:pathLst>
+                <a:path w="356235" h="321310">
+                  <a:moveTo>
+                    <a:pt x="178308" y="0"/>
+                  </a:moveTo>
+                  <a:lnTo>
+                    <a:pt x="130968" y="5718"/>
+                  </a:lnTo>
+                  <a:lnTo>
+                    <a:pt x="88392" y="21872"/>
+                  </a:lnTo>
+                  <a:lnTo>
+                    <a:pt x="52292" y="46958"/>
+                  </a:lnTo>
+                  <a:lnTo>
+                    <a:pt x="24384" y="79473"/>
+                  </a:lnTo>
+                  <a:lnTo>
+                    <a:pt x="6381" y="117915"/>
+                  </a:lnTo>
+                  <a:lnTo>
+                    <a:pt x="0" y="160782"/>
+                  </a:lnTo>
+                  <a:lnTo>
+                    <a:pt x="6381" y="203327"/>
+                  </a:lnTo>
+                  <a:lnTo>
+                    <a:pt x="24384" y="241554"/>
+                  </a:lnTo>
+                  <a:lnTo>
+                    <a:pt x="52292" y="273939"/>
+                  </a:lnTo>
+                  <a:lnTo>
+                    <a:pt x="88392" y="298958"/>
+                  </a:lnTo>
+                  <a:lnTo>
+                    <a:pt x="130968" y="315087"/>
+                  </a:lnTo>
+                  <a:lnTo>
+                    <a:pt x="178308" y="320802"/>
+                  </a:lnTo>
+                  <a:lnTo>
+                    <a:pt x="225590" y="315087"/>
+                  </a:lnTo>
+                  <a:lnTo>
+                    <a:pt x="268026" y="298958"/>
+                  </a:lnTo>
+                  <a:lnTo>
+                    <a:pt x="303942" y="273939"/>
+                  </a:lnTo>
+                  <a:lnTo>
+                    <a:pt x="331667" y="241554"/>
+                  </a:lnTo>
+                  <a:lnTo>
+                    <a:pt x="349528" y="203327"/>
+                  </a:lnTo>
+                  <a:lnTo>
+                    <a:pt x="355854" y="160782"/>
+                  </a:lnTo>
+                  <a:lnTo>
+                    <a:pt x="349528" y="117915"/>
+                  </a:lnTo>
+                  <a:lnTo>
+                    <a:pt x="331667" y="79473"/>
+                  </a:lnTo>
+                  <a:lnTo>
+                    <a:pt x="303942" y="46958"/>
+                  </a:lnTo>
+                  <a:lnTo>
+                    <a:pt x="268026" y="21872"/>
+                  </a:lnTo>
+                  <a:lnTo>
+                    <a:pt x="225590" y="5718"/>
+                  </a:lnTo>
+                  <a:lnTo>
+                    <a:pt x="178308" y="0"/>
+                  </a:lnTo>
+                  <a:close/>
+                </a:path>
+              </a:pathLst>
+            </a:custGeom>
+            <a:ln w="9525">
+              <a:solidFill>
+                <a:srgbClr val="000000"/>
+              </a:solidFill>
+            </a:ln>
+          </p:spPr>
+          <p:txBody>
+            <a:bodyPr wrap="square" lIns="0" tIns="0" rIns="0" bIns="0" rtlCol="0"/>
+            <a:lstStyle/>
+            <a:p>
+              <a:endParaRPr/>
+            </a:p>
+          </p:txBody>
+        </p:sp>
+        <p:sp>
+          <p:nvSpPr>
+            <p:cNvPr id="13" name="object 13">
+              <a:extLst>
+                <a:ext uri="{FF2B5EF4-FFF2-40B4-BE49-F238E27FC236}">
+                  <a16:creationId xmlns:a16="http://schemas.microsoft.com/office/drawing/2014/main" id="{2B71E5E8-BEE2-FBBA-D80D-9A3B566EA434}"/>
+                </a:ext>
+              </a:extLst>
+            </p:cNvPr>
+            <p:cNvSpPr/>
+            <p:nvPr/>
+          </p:nvSpPr>
+          <p:spPr>
+            <a:xfrm>
+              <a:off x="1143000" y="4831079"/>
+              <a:ext cx="354330" cy="320040"/>
+            </a:xfrm>
+            <a:custGeom>
+              <a:avLst/>
+              <a:gdLst/>
+              <a:ahLst/>
+              <a:cxnLst/>
+              <a:rect l="l" t="t" r="r" b="b"/>
+              <a:pathLst>
+                <a:path w="354330" h="320039">
+                  <a:moveTo>
+                    <a:pt x="354330" y="160020"/>
+                  </a:moveTo>
+                  <a:lnTo>
+                    <a:pt x="348004" y="117475"/>
+                  </a:lnTo>
+                  <a:lnTo>
+                    <a:pt x="330143" y="79247"/>
+                  </a:lnTo>
+                  <a:lnTo>
+                    <a:pt x="302418" y="46862"/>
+                  </a:lnTo>
+                  <a:lnTo>
+                    <a:pt x="266502" y="21843"/>
+                  </a:lnTo>
+                  <a:lnTo>
+                    <a:pt x="224066" y="5714"/>
+                  </a:lnTo>
+                  <a:lnTo>
+                    <a:pt x="176784" y="0"/>
+                  </a:lnTo>
+                  <a:lnTo>
+                    <a:pt x="129822" y="5715"/>
+                  </a:lnTo>
+                  <a:lnTo>
+                    <a:pt x="87601" y="21844"/>
+                  </a:lnTo>
+                  <a:lnTo>
+                    <a:pt x="51816" y="46863"/>
+                  </a:lnTo>
+                  <a:lnTo>
+                    <a:pt x="24158" y="79248"/>
+                  </a:lnTo>
+                  <a:lnTo>
+                    <a:pt x="6321" y="117475"/>
+                  </a:lnTo>
+                  <a:lnTo>
+                    <a:pt x="0" y="160020"/>
+                  </a:lnTo>
+                  <a:lnTo>
+                    <a:pt x="6321" y="202565"/>
+                  </a:lnTo>
+                  <a:lnTo>
+                    <a:pt x="24158" y="240792"/>
+                  </a:lnTo>
+                  <a:lnTo>
+                    <a:pt x="51816" y="273177"/>
+                  </a:lnTo>
+                  <a:lnTo>
+                    <a:pt x="87601" y="298196"/>
+                  </a:lnTo>
+                  <a:lnTo>
+                    <a:pt x="129822" y="314325"/>
+                  </a:lnTo>
+                  <a:lnTo>
+                    <a:pt x="176784" y="320040"/>
+                  </a:lnTo>
+                  <a:lnTo>
+                    <a:pt x="224066" y="314325"/>
+                  </a:lnTo>
+                  <a:lnTo>
+                    <a:pt x="266502" y="298196"/>
+                  </a:lnTo>
+                  <a:lnTo>
+                    <a:pt x="302418" y="273177"/>
+                  </a:lnTo>
+                  <a:lnTo>
+                    <a:pt x="330143" y="240792"/>
+                  </a:lnTo>
+                  <a:lnTo>
+                    <a:pt x="348004" y="202565"/>
+                  </a:lnTo>
+                  <a:lnTo>
+                    <a:pt x="354330" y="160020"/>
+                  </a:lnTo>
+                  <a:close/>
+                </a:path>
+              </a:pathLst>
+            </a:custGeom>
+            <a:solidFill>
+              <a:srgbClr val="EAEAEA"/>
+            </a:solidFill>
+          </p:spPr>
+          <p:txBody>
+            <a:bodyPr wrap="square" lIns="0" tIns="0" rIns="0" bIns="0" rtlCol="0"/>
+            <a:lstStyle/>
+            <a:p>
+              <a:endParaRPr/>
+            </a:p>
+          </p:txBody>
+        </p:sp>
+        <p:sp>
+          <p:nvSpPr>
+            <p:cNvPr id="14" name="object 14">
+              <a:extLst>
+                <a:ext uri="{FF2B5EF4-FFF2-40B4-BE49-F238E27FC236}">
+                  <a16:creationId xmlns:a16="http://schemas.microsoft.com/office/drawing/2014/main" id="{B58B6A83-05C6-F848-5A42-A3697805BCD6}"/>
+                </a:ext>
+              </a:extLst>
+            </p:cNvPr>
+            <p:cNvSpPr/>
+            <p:nvPr/>
+          </p:nvSpPr>
+          <p:spPr>
+            <a:xfrm>
+              <a:off x="1143000" y="4831079"/>
+              <a:ext cx="354330" cy="320040"/>
+            </a:xfrm>
+            <a:custGeom>
+              <a:avLst/>
+              <a:gdLst/>
+              <a:ahLst/>
+              <a:cxnLst/>
+              <a:rect l="l" t="t" r="r" b="b"/>
+              <a:pathLst>
+                <a:path w="354330" h="320039">
+                  <a:moveTo>
+                    <a:pt x="176784" y="0"/>
+                  </a:moveTo>
+                  <a:lnTo>
+                    <a:pt x="129822" y="5715"/>
+                  </a:lnTo>
+                  <a:lnTo>
+                    <a:pt x="87601" y="21844"/>
+                  </a:lnTo>
+                  <a:lnTo>
+                    <a:pt x="51816" y="46863"/>
+                  </a:lnTo>
+                  <a:lnTo>
+                    <a:pt x="24158" y="79248"/>
+                  </a:lnTo>
+                  <a:lnTo>
+                    <a:pt x="6321" y="117475"/>
+                  </a:lnTo>
+                  <a:lnTo>
+                    <a:pt x="0" y="160020"/>
+                  </a:lnTo>
+                  <a:lnTo>
+                    <a:pt x="6321" y="202565"/>
+                  </a:lnTo>
+                  <a:lnTo>
+                    <a:pt x="24158" y="240792"/>
+                  </a:lnTo>
+                  <a:lnTo>
+                    <a:pt x="51816" y="273177"/>
+                  </a:lnTo>
+                  <a:lnTo>
+                    <a:pt x="87601" y="298196"/>
+                  </a:lnTo>
+                  <a:lnTo>
+                    <a:pt x="129822" y="314325"/>
+                  </a:lnTo>
+                  <a:lnTo>
+                    <a:pt x="176784" y="320040"/>
+                  </a:lnTo>
+                  <a:lnTo>
+                    <a:pt x="224066" y="314325"/>
+                  </a:lnTo>
+                  <a:lnTo>
+                    <a:pt x="266502" y="298196"/>
+                  </a:lnTo>
+                  <a:lnTo>
+                    <a:pt x="302418" y="273177"/>
+                  </a:lnTo>
+                  <a:lnTo>
+                    <a:pt x="330143" y="240792"/>
+                  </a:lnTo>
+                  <a:lnTo>
+                    <a:pt x="348004" y="202565"/>
+                  </a:lnTo>
+                  <a:lnTo>
+                    <a:pt x="354330" y="160020"/>
+                  </a:lnTo>
+                  <a:lnTo>
+                    <a:pt x="348004" y="117475"/>
+                  </a:lnTo>
+                  <a:lnTo>
+                    <a:pt x="330143" y="79247"/>
+                  </a:lnTo>
+                  <a:lnTo>
+                    <a:pt x="302418" y="46862"/>
+                  </a:lnTo>
+                  <a:lnTo>
+                    <a:pt x="266502" y="21843"/>
+                  </a:lnTo>
+                  <a:lnTo>
+                    <a:pt x="224066" y="5714"/>
+                  </a:lnTo>
+                  <a:lnTo>
+                    <a:pt x="176784" y="0"/>
+                  </a:lnTo>
+                  <a:close/>
+                </a:path>
+              </a:pathLst>
+            </a:custGeom>
+            <a:ln w="9525">
+              <a:solidFill>
+                <a:srgbClr val="000000"/>
+              </a:solidFill>
+            </a:ln>
+          </p:spPr>
+          <p:txBody>
+            <a:bodyPr wrap="square" lIns="0" tIns="0" rIns="0" bIns="0" rtlCol="0"/>
+            <a:lstStyle/>
+            <a:p>
+              <a:endParaRPr/>
+            </a:p>
+          </p:txBody>
+        </p:sp>
+        <p:sp>
+          <p:nvSpPr>
+            <p:cNvPr id="15" name="object 15">
+              <a:extLst>
+                <a:ext uri="{FF2B5EF4-FFF2-40B4-BE49-F238E27FC236}">
+                  <a16:creationId xmlns:a16="http://schemas.microsoft.com/office/drawing/2014/main" id="{B91D573C-ED64-232D-07BE-DB6A5B163486}"/>
+                </a:ext>
+              </a:extLst>
+            </p:cNvPr>
+            <p:cNvSpPr/>
+            <p:nvPr/>
+          </p:nvSpPr>
+          <p:spPr>
+            <a:xfrm>
+              <a:off x="1365503" y="5897879"/>
+              <a:ext cx="353695" cy="320040"/>
+            </a:xfrm>
+            <a:custGeom>
+              <a:avLst/>
+              <a:gdLst/>
+              <a:ahLst/>
+              <a:cxnLst/>
+              <a:rect l="l" t="t" r="r" b="b"/>
+              <a:pathLst>
+                <a:path w="353694" h="320039">
+                  <a:moveTo>
+                    <a:pt x="353568" y="160020"/>
+                  </a:moveTo>
+                  <a:lnTo>
+                    <a:pt x="347246" y="117475"/>
+                  </a:lnTo>
+                  <a:lnTo>
+                    <a:pt x="329409" y="79247"/>
+                  </a:lnTo>
+                  <a:lnTo>
+                    <a:pt x="301752" y="46862"/>
+                  </a:lnTo>
+                  <a:lnTo>
+                    <a:pt x="265966" y="21843"/>
+                  </a:lnTo>
+                  <a:lnTo>
+                    <a:pt x="223745" y="5714"/>
+                  </a:lnTo>
+                  <a:lnTo>
+                    <a:pt x="176784" y="0"/>
+                  </a:lnTo>
+                  <a:lnTo>
+                    <a:pt x="129822" y="5715"/>
+                  </a:lnTo>
+                  <a:lnTo>
+                    <a:pt x="87601" y="21844"/>
+                  </a:lnTo>
+                  <a:lnTo>
+                    <a:pt x="51816" y="46863"/>
+                  </a:lnTo>
+                  <a:lnTo>
+                    <a:pt x="24158" y="79248"/>
+                  </a:lnTo>
+                  <a:lnTo>
+                    <a:pt x="6321" y="117475"/>
+                  </a:lnTo>
+                  <a:lnTo>
+                    <a:pt x="0" y="160020"/>
+                  </a:lnTo>
+                  <a:lnTo>
+                    <a:pt x="6321" y="202565"/>
+                  </a:lnTo>
+                  <a:lnTo>
+                    <a:pt x="24158" y="240792"/>
+                  </a:lnTo>
+                  <a:lnTo>
+                    <a:pt x="51816" y="273177"/>
+                  </a:lnTo>
+                  <a:lnTo>
+                    <a:pt x="87601" y="298196"/>
+                  </a:lnTo>
+                  <a:lnTo>
+                    <a:pt x="129822" y="314325"/>
+                  </a:lnTo>
+                  <a:lnTo>
+                    <a:pt x="176784" y="320040"/>
+                  </a:lnTo>
+                  <a:lnTo>
+                    <a:pt x="223745" y="314325"/>
+                  </a:lnTo>
+                  <a:lnTo>
+                    <a:pt x="265966" y="298196"/>
+                  </a:lnTo>
+                  <a:lnTo>
+                    <a:pt x="301752" y="273177"/>
+                  </a:lnTo>
+                  <a:lnTo>
+                    <a:pt x="329409" y="240792"/>
+                  </a:lnTo>
+                  <a:lnTo>
+                    <a:pt x="347246" y="202565"/>
+                  </a:lnTo>
+                  <a:lnTo>
+                    <a:pt x="353568" y="160020"/>
+                  </a:lnTo>
+                  <a:close/>
+                </a:path>
+              </a:pathLst>
+            </a:custGeom>
+            <a:solidFill>
+              <a:srgbClr val="EAEAEA"/>
+            </a:solidFill>
+          </p:spPr>
+          <p:txBody>
+            <a:bodyPr wrap="square" lIns="0" tIns="0" rIns="0" bIns="0" rtlCol="0"/>
+            <a:lstStyle/>
+            <a:p>
+              <a:endParaRPr/>
+            </a:p>
+          </p:txBody>
+        </p:sp>
+        <p:sp>
+          <p:nvSpPr>
+            <p:cNvPr id="16" name="object 16">
+              <a:extLst>
+                <a:ext uri="{FF2B5EF4-FFF2-40B4-BE49-F238E27FC236}">
+                  <a16:creationId xmlns:a16="http://schemas.microsoft.com/office/drawing/2014/main" id="{62A4EA8E-4EAB-0E12-024C-B5DAF724C79F}"/>
+                </a:ext>
+              </a:extLst>
+            </p:cNvPr>
+            <p:cNvSpPr/>
+            <p:nvPr/>
+          </p:nvSpPr>
+          <p:spPr>
+            <a:xfrm>
+              <a:off x="1365503" y="5897879"/>
+              <a:ext cx="353695" cy="320040"/>
+            </a:xfrm>
+            <a:custGeom>
+              <a:avLst/>
+              <a:gdLst/>
+              <a:ahLst/>
+              <a:cxnLst/>
+              <a:rect l="l" t="t" r="r" b="b"/>
+              <a:pathLst>
+                <a:path w="353694" h="320039">
+                  <a:moveTo>
+                    <a:pt x="176784" y="0"/>
+                  </a:moveTo>
+                  <a:lnTo>
+                    <a:pt x="129822" y="5715"/>
+                  </a:lnTo>
+                  <a:lnTo>
+                    <a:pt x="87601" y="21844"/>
+                  </a:lnTo>
+                  <a:lnTo>
+                    <a:pt x="51816" y="46863"/>
+                  </a:lnTo>
+                  <a:lnTo>
+                    <a:pt x="24158" y="79248"/>
+                  </a:lnTo>
+                  <a:lnTo>
+                    <a:pt x="6321" y="117475"/>
+                  </a:lnTo>
+                  <a:lnTo>
+                    <a:pt x="0" y="160020"/>
+                  </a:lnTo>
+                  <a:lnTo>
+                    <a:pt x="6321" y="202565"/>
+                  </a:lnTo>
+                  <a:lnTo>
+                    <a:pt x="24158" y="240792"/>
+                  </a:lnTo>
+                  <a:lnTo>
+                    <a:pt x="51816" y="273177"/>
+                  </a:lnTo>
+                  <a:lnTo>
+                    <a:pt x="87601" y="298196"/>
+                  </a:lnTo>
+                  <a:lnTo>
+                    <a:pt x="129822" y="314325"/>
+                  </a:lnTo>
+                  <a:lnTo>
+                    <a:pt x="176784" y="320040"/>
+                  </a:lnTo>
+                  <a:lnTo>
+                    <a:pt x="223745" y="314325"/>
+                  </a:lnTo>
+                  <a:lnTo>
+                    <a:pt x="265966" y="298196"/>
+                  </a:lnTo>
+                  <a:lnTo>
+                    <a:pt x="301752" y="273177"/>
+                  </a:lnTo>
+                  <a:lnTo>
+                    <a:pt x="329409" y="240792"/>
+                  </a:lnTo>
+                  <a:lnTo>
+                    <a:pt x="347246" y="202565"/>
+                  </a:lnTo>
+                  <a:lnTo>
+                    <a:pt x="353568" y="160020"/>
+                  </a:lnTo>
+                  <a:lnTo>
+                    <a:pt x="347246" y="117475"/>
+                  </a:lnTo>
+                  <a:lnTo>
+                    <a:pt x="329409" y="79247"/>
+                  </a:lnTo>
+                  <a:lnTo>
+                    <a:pt x="301752" y="46862"/>
+                  </a:lnTo>
+                  <a:lnTo>
+                    <a:pt x="265966" y="21843"/>
+                  </a:lnTo>
+                  <a:lnTo>
+                    <a:pt x="223745" y="5714"/>
+                  </a:lnTo>
+                  <a:lnTo>
+                    <a:pt x="176784" y="0"/>
+                  </a:lnTo>
+                  <a:close/>
+                </a:path>
+              </a:pathLst>
+            </a:custGeom>
+            <a:ln w="9525">
+              <a:solidFill>
+                <a:srgbClr val="000000"/>
+              </a:solidFill>
+            </a:ln>
+          </p:spPr>
+          <p:txBody>
+            <a:bodyPr wrap="square" lIns="0" tIns="0" rIns="0" bIns="0" rtlCol="0"/>
+            <a:lstStyle/>
+            <a:p>
+              <a:endParaRPr/>
+            </a:p>
+          </p:txBody>
+        </p:sp>
+        <p:sp>
+          <p:nvSpPr>
+            <p:cNvPr id="17" name="object 17">
+              <a:extLst>
+                <a:ext uri="{FF2B5EF4-FFF2-40B4-BE49-F238E27FC236}">
+                  <a16:creationId xmlns:a16="http://schemas.microsoft.com/office/drawing/2014/main" id="{57BFFB98-E346-E383-2EAA-63404AA30342}"/>
+                </a:ext>
+              </a:extLst>
+            </p:cNvPr>
+            <p:cNvSpPr/>
+            <p:nvPr/>
+          </p:nvSpPr>
+          <p:spPr>
+            <a:xfrm>
+              <a:off x="2665476" y="4511802"/>
+              <a:ext cx="353695" cy="319405"/>
+            </a:xfrm>
+            <a:custGeom>
+              <a:avLst/>
+              <a:gdLst/>
+              <a:ahLst/>
+              <a:cxnLst/>
+              <a:rect l="l" t="t" r="r" b="b"/>
+              <a:pathLst>
+                <a:path w="353694" h="319404">
+                  <a:moveTo>
+                    <a:pt x="353567" y="159258"/>
+                  </a:moveTo>
+                  <a:lnTo>
+                    <a:pt x="347246" y="117034"/>
+                  </a:lnTo>
+                  <a:lnTo>
+                    <a:pt x="329409" y="79022"/>
+                  </a:lnTo>
+                  <a:lnTo>
+                    <a:pt x="301751" y="46767"/>
+                  </a:lnTo>
+                  <a:lnTo>
+                    <a:pt x="265966" y="21815"/>
+                  </a:lnTo>
+                  <a:lnTo>
+                    <a:pt x="223745" y="5711"/>
+                  </a:lnTo>
+                  <a:lnTo>
+                    <a:pt x="176783" y="0"/>
+                  </a:lnTo>
+                  <a:lnTo>
+                    <a:pt x="129822" y="5711"/>
+                  </a:lnTo>
+                  <a:lnTo>
+                    <a:pt x="87601" y="21815"/>
+                  </a:lnTo>
+                  <a:lnTo>
+                    <a:pt x="51815" y="46767"/>
+                  </a:lnTo>
+                  <a:lnTo>
+                    <a:pt x="24158" y="79022"/>
+                  </a:lnTo>
+                  <a:lnTo>
+                    <a:pt x="6321" y="117034"/>
+                  </a:lnTo>
+                  <a:lnTo>
+                    <a:pt x="0" y="159258"/>
+                  </a:lnTo>
+                  <a:lnTo>
+                    <a:pt x="6321" y="201803"/>
+                  </a:lnTo>
+                  <a:lnTo>
+                    <a:pt x="24158" y="240030"/>
+                  </a:lnTo>
+                  <a:lnTo>
+                    <a:pt x="51815" y="272415"/>
+                  </a:lnTo>
+                  <a:lnTo>
+                    <a:pt x="87601" y="297434"/>
+                  </a:lnTo>
+                  <a:lnTo>
+                    <a:pt x="129822" y="313563"/>
+                  </a:lnTo>
+                  <a:lnTo>
+                    <a:pt x="176783" y="319278"/>
+                  </a:lnTo>
+                  <a:lnTo>
+                    <a:pt x="223745" y="313563"/>
+                  </a:lnTo>
+                  <a:lnTo>
+                    <a:pt x="265966" y="297434"/>
+                  </a:lnTo>
+                  <a:lnTo>
+                    <a:pt x="301751" y="272415"/>
+                  </a:lnTo>
+                  <a:lnTo>
+                    <a:pt x="329409" y="240030"/>
+                  </a:lnTo>
+                  <a:lnTo>
+                    <a:pt x="347246" y="201803"/>
+                  </a:lnTo>
+                  <a:lnTo>
+                    <a:pt x="353567" y="159258"/>
+                  </a:lnTo>
+                  <a:close/>
+                </a:path>
+              </a:pathLst>
+            </a:custGeom>
+            <a:solidFill>
+              <a:srgbClr val="EAEAEA"/>
+            </a:solidFill>
+          </p:spPr>
+          <p:txBody>
+            <a:bodyPr wrap="square" lIns="0" tIns="0" rIns="0" bIns="0" rtlCol="0"/>
+            <a:lstStyle/>
+            <a:p>
+              <a:endParaRPr/>
+            </a:p>
+          </p:txBody>
+        </p:sp>
+        <p:sp>
+          <p:nvSpPr>
+            <p:cNvPr id="18" name="object 18">
+              <a:extLst>
+                <a:ext uri="{FF2B5EF4-FFF2-40B4-BE49-F238E27FC236}">
+                  <a16:creationId xmlns:a16="http://schemas.microsoft.com/office/drawing/2014/main" id="{DE25DCC4-AFAA-135E-6ED3-8E9F99E80A4C}"/>
+                </a:ext>
+              </a:extLst>
+            </p:cNvPr>
+            <p:cNvSpPr/>
+            <p:nvPr/>
+          </p:nvSpPr>
+          <p:spPr>
+            <a:xfrm>
+              <a:off x="2665476" y="4511802"/>
+              <a:ext cx="353695" cy="319405"/>
+            </a:xfrm>
+            <a:custGeom>
+              <a:avLst/>
+              <a:gdLst/>
+              <a:ahLst/>
+              <a:cxnLst/>
+              <a:rect l="l" t="t" r="r" b="b"/>
+              <a:pathLst>
+                <a:path w="353694" h="319404">
+                  <a:moveTo>
+                    <a:pt x="176783" y="0"/>
+                  </a:moveTo>
+                  <a:lnTo>
+                    <a:pt x="129822" y="5711"/>
+                  </a:lnTo>
+                  <a:lnTo>
+                    <a:pt x="87601" y="21815"/>
+                  </a:lnTo>
+                  <a:lnTo>
+                    <a:pt x="51815" y="46767"/>
+                  </a:lnTo>
+                  <a:lnTo>
+                    <a:pt x="24158" y="79022"/>
+                  </a:lnTo>
+                  <a:lnTo>
+                    <a:pt x="6321" y="117034"/>
+                  </a:lnTo>
+                  <a:lnTo>
+                    <a:pt x="0" y="159258"/>
+                  </a:lnTo>
+                  <a:lnTo>
+                    <a:pt x="6321" y="201803"/>
+                  </a:lnTo>
+                  <a:lnTo>
+                    <a:pt x="24158" y="240030"/>
+                  </a:lnTo>
+                  <a:lnTo>
+                    <a:pt x="51815" y="272415"/>
+                  </a:lnTo>
+                  <a:lnTo>
+                    <a:pt x="87601" y="297434"/>
+                  </a:lnTo>
+                  <a:lnTo>
+                    <a:pt x="129822" y="313563"/>
+                  </a:lnTo>
+                  <a:lnTo>
+                    <a:pt x="176783" y="319278"/>
+                  </a:lnTo>
+                  <a:lnTo>
+                    <a:pt x="223745" y="313563"/>
+                  </a:lnTo>
+                  <a:lnTo>
+                    <a:pt x="265966" y="297434"/>
+                  </a:lnTo>
+                  <a:lnTo>
+                    <a:pt x="301751" y="272415"/>
+                  </a:lnTo>
+                  <a:lnTo>
+                    <a:pt x="329409" y="240030"/>
+                  </a:lnTo>
+                  <a:lnTo>
+                    <a:pt x="347246" y="201803"/>
+                  </a:lnTo>
+                  <a:lnTo>
+                    <a:pt x="353567" y="159258"/>
+                  </a:lnTo>
+                  <a:lnTo>
+                    <a:pt x="347246" y="117034"/>
+                  </a:lnTo>
+                  <a:lnTo>
+                    <a:pt x="329409" y="79022"/>
+                  </a:lnTo>
+                  <a:lnTo>
+                    <a:pt x="301751" y="46767"/>
+                  </a:lnTo>
+                  <a:lnTo>
+                    <a:pt x="265966" y="21815"/>
+                  </a:lnTo>
+                  <a:lnTo>
+                    <a:pt x="223745" y="5711"/>
+                  </a:lnTo>
+                  <a:lnTo>
+                    <a:pt x="176783" y="0"/>
+                  </a:lnTo>
+                  <a:close/>
+                </a:path>
+              </a:pathLst>
+            </a:custGeom>
+            <a:ln w="9525">
+              <a:solidFill>
+                <a:srgbClr val="000000"/>
+              </a:solidFill>
+            </a:ln>
+          </p:spPr>
+          <p:txBody>
+            <a:bodyPr wrap="square" lIns="0" tIns="0" rIns="0" bIns="0" rtlCol="0"/>
+            <a:lstStyle/>
+            <a:p>
+              <a:endParaRPr/>
+            </a:p>
+          </p:txBody>
+        </p:sp>
+        <p:sp>
+          <p:nvSpPr>
+            <p:cNvPr id="19" name="object 19">
+              <a:extLst>
+                <a:ext uri="{FF2B5EF4-FFF2-40B4-BE49-F238E27FC236}">
+                  <a16:creationId xmlns:a16="http://schemas.microsoft.com/office/drawing/2014/main" id="{A1DB270B-6C90-1BEC-3E32-3EC0BC5098CB}"/>
+                </a:ext>
+              </a:extLst>
+            </p:cNvPr>
+            <p:cNvSpPr/>
+            <p:nvPr/>
+          </p:nvSpPr>
+          <p:spPr>
+            <a:xfrm>
+              <a:off x="4674870" y="4936997"/>
+              <a:ext cx="354330" cy="321310"/>
+            </a:xfrm>
+            <a:custGeom>
+              <a:avLst/>
+              <a:gdLst/>
+              <a:ahLst/>
+              <a:cxnLst/>
+              <a:rect l="l" t="t" r="r" b="b"/>
+              <a:pathLst>
+                <a:path w="354329" h="321310">
+                  <a:moveTo>
+                    <a:pt x="354330" y="160782"/>
+                  </a:moveTo>
+                  <a:lnTo>
+                    <a:pt x="348008" y="117915"/>
+                  </a:lnTo>
+                  <a:lnTo>
+                    <a:pt x="330171" y="79473"/>
+                  </a:lnTo>
+                  <a:lnTo>
+                    <a:pt x="302514" y="46958"/>
+                  </a:lnTo>
+                  <a:lnTo>
+                    <a:pt x="266728" y="21872"/>
+                  </a:lnTo>
+                  <a:lnTo>
+                    <a:pt x="224507" y="5718"/>
+                  </a:lnTo>
+                  <a:lnTo>
+                    <a:pt x="177546" y="0"/>
+                  </a:lnTo>
+                  <a:lnTo>
+                    <a:pt x="130263" y="5718"/>
+                  </a:lnTo>
+                  <a:lnTo>
+                    <a:pt x="87827" y="21872"/>
+                  </a:lnTo>
+                  <a:lnTo>
+                    <a:pt x="51911" y="46958"/>
+                  </a:lnTo>
+                  <a:lnTo>
+                    <a:pt x="24186" y="79473"/>
+                  </a:lnTo>
+                  <a:lnTo>
+                    <a:pt x="6325" y="117915"/>
+                  </a:lnTo>
+                  <a:lnTo>
+                    <a:pt x="0" y="160782"/>
+                  </a:lnTo>
+                  <a:lnTo>
+                    <a:pt x="6325" y="203327"/>
+                  </a:lnTo>
+                  <a:lnTo>
+                    <a:pt x="24186" y="241554"/>
+                  </a:lnTo>
+                  <a:lnTo>
+                    <a:pt x="51911" y="273939"/>
+                  </a:lnTo>
+                  <a:lnTo>
+                    <a:pt x="87827" y="298958"/>
+                  </a:lnTo>
+                  <a:lnTo>
+                    <a:pt x="130263" y="315087"/>
+                  </a:lnTo>
+                  <a:lnTo>
+                    <a:pt x="177546" y="320802"/>
+                  </a:lnTo>
+                  <a:lnTo>
+                    <a:pt x="224507" y="315087"/>
+                  </a:lnTo>
+                  <a:lnTo>
+                    <a:pt x="266728" y="298958"/>
+                  </a:lnTo>
+                  <a:lnTo>
+                    <a:pt x="302514" y="273939"/>
+                  </a:lnTo>
+                  <a:lnTo>
+                    <a:pt x="330171" y="241554"/>
+                  </a:lnTo>
+                  <a:lnTo>
+                    <a:pt x="348008" y="203327"/>
+                  </a:lnTo>
+                  <a:lnTo>
+                    <a:pt x="354330" y="160782"/>
+                  </a:lnTo>
+                  <a:close/>
+                </a:path>
+              </a:pathLst>
+            </a:custGeom>
+            <a:solidFill>
+              <a:srgbClr val="EAEAEA"/>
+            </a:solidFill>
+          </p:spPr>
+          <p:txBody>
+            <a:bodyPr wrap="square" lIns="0" tIns="0" rIns="0" bIns="0" rtlCol="0"/>
+            <a:lstStyle/>
+            <a:p>
+              <a:endParaRPr/>
+            </a:p>
+          </p:txBody>
+        </p:sp>
+        <p:sp>
+          <p:nvSpPr>
+            <p:cNvPr id="20" name="object 20">
+              <a:extLst>
+                <a:ext uri="{FF2B5EF4-FFF2-40B4-BE49-F238E27FC236}">
+                  <a16:creationId xmlns:a16="http://schemas.microsoft.com/office/drawing/2014/main" id="{4C73C12E-052E-856D-1AB4-66D1D97BCADD}"/>
+                </a:ext>
+              </a:extLst>
+            </p:cNvPr>
+            <p:cNvSpPr/>
+            <p:nvPr/>
+          </p:nvSpPr>
+          <p:spPr>
+            <a:xfrm>
+              <a:off x="4674870" y="4936997"/>
+              <a:ext cx="354330" cy="321310"/>
+            </a:xfrm>
+            <a:custGeom>
+              <a:avLst/>
+              <a:gdLst/>
+              <a:ahLst/>
+              <a:cxnLst/>
+              <a:rect l="l" t="t" r="r" b="b"/>
+              <a:pathLst>
+                <a:path w="354329" h="321310">
+                  <a:moveTo>
+                    <a:pt x="177546" y="0"/>
+                  </a:moveTo>
+                  <a:lnTo>
+                    <a:pt x="130263" y="5718"/>
+                  </a:lnTo>
+                  <a:lnTo>
+                    <a:pt x="87827" y="21872"/>
+                  </a:lnTo>
+                  <a:lnTo>
+                    <a:pt x="51911" y="46958"/>
+                  </a:lnTo>
+                  <a:lnTo>
+                    <a:pt x="24186" y="79473"/>
+                  </a:lnTo>
+                  <a:lnTo>
+                    <a:pt x="6325" y="117915"/>
+                  </a:lnTo>
+                  <a:lnTo>
+                    <a:pt x="0" y="160782"/>
+                  </a:lnTo>
+                  <a:lnTo>
+                    <a:pt x="6325" y="203327"/>
+                  </a:lnTo>
+                  <a:lnTo>
+                    <a:pt x="24186" y="241554"/>
+                  </a:lnTo>
+                  <a:lnTo>
+                    <a:pt x="51911" y="273939"/>
+                  </a:lnTo>
+                  <a:lnTo>
+                    <a:pt x="87827" y="298958"/>
+                  </a:lnTo>
+                  <a:lnTo>
+                    <a:pt x="130263" y="315087"/>
+                  </a:lnTo>
+                  <a:lnTo>
+                    <a:pt x="177546" y="320802"/>
+                  </a:lnTo>
+                  <a:lnTo>
+                    <a:pt x="224507" y="315087"/>
+                  </a:lnTo>
+                  <a:lnTo>
+                    <a:pt x="266728" y="298958"/>
+                  </a:lnTo>
+                  <a:lnTo>
+                    <a:pt x="302514" y="273939"/>
+                  </a:lnTo>
+                  <a:lnTo>
+                    <a:pt x="330171" y="241554"/>
+                  </a:lnTo>
+                  <a:lnTo>
+                    <a:pt x="348008" y="203327"/>
+                  </a:lnTo>
+                  <a:lnTo>
+                    <a:pt x="354330" y="160782"/>
+                  </a:lnTo>
+                  <a:lnTo>
+                    <a:pt x="348008" y="117915"/>
+                  </a:lnTo>
+                  <a:lnTo>
+                    <a:pt x="330171" y="79473"/>
+                  </a:lnTo>
+                  <a:lnTo>
+                    <a:pt x="302514" y="46958"/>
+                  </a:lnTo>
+                  <a:lnTo>
+                    <a:pt x="266728" y="21872"/>
+                  </a:lnTo>
+                  <a:lnTo>
+                    <a:pt x="224507" y="5718"/>
+                  </a:lnTo>
+                  <a:lnTo>
+                    <a:pt x="177546" y="0"/>
+                  </a:lnTo>
+                  <a:close/>
+                </a:path>
+              </a:pathLst>
+            </a:custGeom>
+            <a:ln w="9525">
+              <a:solidFill>
+                <a:srgbClr val="000000"/>
+              </a:solidFill>
+            </a:ln>
+          </p:spPr>
+          <p:txBody>
+            <a:bodyPr wrap="square" lIns="0" tIns="0" rIns="0" bIns="0" rtlCol="0"/>
+            <a:lstStyle/>
+            <a:p>
+              <a:endParaRPr/>
+            </a:p>
+          </p:txBody>
+        </p:sp>
+        <p:sp>
+          <p:nvSpPr>
+            <p:cNvPr id="21" name="object 21">
+              <a:extLst>
+                <a:ext uri="{FF2B5EF4-FFF2-40B4-BE49-F238E27FC236}">
+                  <a16:creationId xmlns:a16="http://schemas.microsoft.com/office/drawing/2014/main" id="{2A0CE50F-CFE5-7901-46D0-FE7446B0A570}"/>
+                </a:ext>
+              </a:extLst>
+            </p:cNvPr>
+            <p:cNvSpPr/>
+            <p:nvPr/>
+          </p:nvSpPr>
+          <p:spPr>
+            <a:xfrm>
+              <a:off x="3256026" y="6537197"/>
+              <a:ext cx="353695" cy="321310"/>
+            </a:xfrm>
+            <a:custGeom>
+              <a:avLst/>
+              <a:gdLst/>
+              <a:ahLst/>
+              <a:cxnLst/>
+              <a:rect l="l" t="t" r="r" b="b"/>
+              <a:pathLst>
+                <a:path w="353695" h="321309">
+                  <a:moveTo>
+                    <a:pt x="353568" y="160782"/>
+                  </a:moveTo>
+                  <a:lnTo>
+                    <a:pt x="347246" y="117915"/>
+                  </a:lnTo>
+                  <a:lnTo>
+                    <a:pt x="329409" y="79473"/>
+                  </a:lnTo>
+                  <a:lnTo>
+                    <a:pt x="301752" y="46958"/>
+                  </a:lnTo>
+                  <a:lnTo>
+                    <a:pt x="265966" y="21872"/>
+                  </a:lnTo>
+                  <a:lnTo>
+                    <a:pt x="223745" y="5718"/>
+                  </a:lnTo>
+                  <a:lnTo>
+                    <a:pt x="176784" y="0"/>
+                  </a:lnTo>
+                  <a:lnTo>
+                    <a:pt x="129822" y="5718"/>
+                  </a:lnTo>
+                  <a:lnTo>
+                    <a:pt x="87601" y="21872"/>
+                  </a:lnTo>
+                  <a:lnTo>
+                    <a:pt x="51816" y="46958"/>
+                  </a:lnTo>
+                  <a:lnTo>
+                    <a:pt x="24158" y="79473"/>
+                  </a:lnTo>
+                  <a:lnTo>
+                    <a:pt x="6321" y="117915"/>
+                  </a:lnTo>
+                  <a:lnTo>
+                    <a:pt x="0" y="160782"/>
+                  </a:lnTo>
+                  <a:lnTo>
+                    <a:pt x="6321" y="203327"/>
+                  </a:lnTo>
+                  <a:lnTo>
+                    <a:pt x="24158" y="241554"/>
+                  </a:lnTo>
+                  <a:lnTo>
+                    <a:pt x="51816" y="273939"/>
+                  </a:lnTo>
+                  <a:lnTo>
+                    <a:pt x="87601" y="298958"/>
+                  </a:lnTo>
+                  <a:lnTo>
+                    <a:pt x="129822" y="315087"/>
+                  </a:lnTo>
+                  <a:lnTo>
+                    <a:pt x="176784" y="320802"/>
+                  </a:lnTo>
+                  <a:lnTo>
+                    <a:pt x="223745" y="315087"/>
+                  </a:lnTo>
+                  <a:lnTo>
+                    <a:pt x="265966" y="298958"/>
+                  </a:lnTo>
+                  <a:lnTo>
+                    <a:pt x="301752" y="273939"/>
+                  </a:lnTo>
+                  <a:lnTo>
+                    <a:pt x="329409" y="241554"/>
+                  </a:lnTo>
+                  <a:lnTo>
+                    <a:pt x="347246" y="203327"/>
+                  </a:lnTo>
+                  <a:lnTo>
+                    <a:pt x="353568" y="160782"/>
+                  </a:lnTo>
+                  <a:close/>
+                </a:path>
+              </a:pathLst>
+            </a:custGeom>
+            <a:solidFill>
+              <a:srgbClr val="EAEAEA"/>
+            </a:solidFill>
+          </p:spPr>
+          <p:txBody>
+            <a:bodyPr wrap="square" lIns="0" tIns="0" rIns="0" bIns="0" rtlCol="0"/>
+            <a:lstStyle/>
+            <a:p>
+              <a:endParaRPr/>
+            </a:p>
+          </p:txBody>
+        </p:sp>
+        <p:sp>
+          <p:nvSpPr>
+            <p:cNvPr id="22" name="object 22">
+              <a:extLst>
+                <a:ext uri="{FF2B5EF4-FFF2-40B4-BE49-F238E27FC236}">
+                  <a16:creationId xmlns:a16="http://schemas.microsoft.com/office/drawing/2014/main" id="{2E9AA499-BF3B-ADA8-D3E5-966CB86D0916}"/>
+                </a:ext>
+              </a:extLst>
+            </p:cNvPr>
+            <p:cNvSpPr/>
+            <p:nvPr/>
+          </p:nvSpPr>
+          <p:spPr>
+            <a:xfrm>
+              <a:off x="3256026" y="6537197"/>
+              <a:ext cx="353695" cy="321310"/>
+            </a:xfrm>
+            <a:custGeom>
+              <a:avLst/>
+              <a:gdLst/>
+              <a:ahLst/>
+              <a:cxnLst/>
+              <a:rect l="l" t="t" r="r" b="b"/>
+              <a:pathLst>
+                <a:path w="353695" h="321309">
+                  <a:moveTo>
+                    <a:pt x="176784" y="0"/>
+                  </a:moveTo>
+                  <a:lnTo>
+                    <a:pt x="129822" y="5718"/>
+                  </a:lnTo>
+                  <a:lnTo>
+                    <a:pt x="87601" y="21872"/>
+                  </a:lnTo>
+                  <a:lnTo>
+                    <a:pt x="51816" y="46958"/>
+                  </a:lnTo>
+                  <a:lnTo>
+                    <a:pt x="24158" y="79473"/>
+                  </a:lnTo>
+                  <a:lnTo>
+                    <a:pt x="6321" y="117915"/>
+                  </a:lnTo>
+                  <a:lnTo>
+                    <a:pt x="0" y="160782"/>
+                  </a:lnTo>
+                  <a:lnTo>
+                    <a:pt x="6321" y="203327"/>
+                  </a:lnTo>
+                  <a:lnTo>
+                    <a:pt x="24158" y="241554"/>
+                  </a:lnTo>
+                  <a:lnTo>
+                    <a:pt x="51816" y="273939"/>
+                  </a:lnTo>
+                  <a:lnTo>
+                    <a:pt x="87601" y="298958"/>
+                  </a:lnTo>
+                  <a:lnTo>
+                    <a:pt x="129822" y="315087"/>
+                  </a:lnTo>
+                  <a:lnTo>
+                    <a:pt x="176784" y="320802"/>
+                  </a:lnTo>
+                  <a:lnTo>
+                    <a:pt x="223745" y="315087"/>
+                  </a:lnTo>
+                  <a:lnTo>
+                    <a:pt x="265966" y="298958"/>
+                  </a:lnTo>
+                  <a:lnTo>
+                    <a:pt x="301752" y="273939"/>
+                  </a:lnTo>
+                  <a:lnTo>
+                    <a:pt x="329409" y="241554"/>
+                  </a:lnTo>
+                  <a:lnTo>
+                    <a:pt x="347246" y="203327"/>
+                  </a:lnTo>
+                  <a:lnTo>
+                    <a:pt x="353568" y="160782"/>
+                  </a:lnTo>
+                  <a:lnTo>
+                    <a:pt x="347246" y="117915"/>
+                  </a:lnTo>
+                  <a:lnTo>
+                    <a:pt x="329409" y="79473"/>
+                  </a:lnTo>
+                  <a:lnTo>
+                    <a:pt x="301752" y="46958"/>
+                  </a:lnTo>
+                  <a:lnTo>
+                    <a:pt x="265966" y="21872"/>
+                  </a:lnTo>
+                  <a:lnTo>
+                    <a:pt x="223745" y="5718"/>
+                  </a:lnTo>
+                  <a:lnTo>
+                    <a:pt x="176784" y="0"/>
+                  </a:lnTo>
+                  <a:close/>
+                </a:path>
+              </a:pathLst>
+            </a:custGeom>
+            <a:ln w="9525">
+              <a:solidFill>
+                <a:srgbClr val="000000"/>
+              </a:solidFill>
+            </a:ln>
+          </p:spPr>
+          <p:txBody>
+            <a:bodyPr wrap="square" lIns="0" tIns="0" rIns="0" bIns="0" rtlCol="0"/>
+            <a:lstStyle/>
+            <a:p>
+              <a:endParaRPr/>
+            </a:p>
+          </p:txBody>
+        </p:sp>
+        <p:sp>
+          <p:nvSpPr>
+            <p:cNvPr id="23" name="object 23">
+              <a:extLst>
+                <a:ext uri="{FF2B5EF4-FFF2-40B4-BE49-F238E27FC236}">
+                  <a16:creationId xmlns:a16="http://schemas.microsoft.com/office/drawing/2014/main" id="{70C96623-C3C4-970E-95A1-BBC5F97F04E3}"/>
+                </a:ext>
+              </a:extLst>
+            </p:cNvPr>
+            <p:cNvSpPr/>
+            <p:nvPr/>
+          </p:nvSpPr>
+          <p:spPr>
+            <a:xfrm>
+              <a:off x="2901695" y="5578602"/>
+              <a:ext cx="354330" cy="319405"/>
+            </a:xfrm>
+            <a:custGeom>
+              <a:avLst/>
+              <a:gdLst/>
+              <a:ahLst/>
+              <a:cxnLst/>
+              <a:rect l="l" t="t" r="r" b="b"/>
+              <a:pathLst>
+                <a:path w="354329" h="319404">
+                  <a:moveTo>
+                    <a:pt x="354329" y="159258"/>
+                  </a:moveTo>
+                  <a:lnTo>
+                    <a:pt x="348008" y="117034"/>
+                  </a:lnTo>
+                  <a:lnTo>
+                    <a:pt x="330171" y="79022"/>
+                  </a:lnTo>
+                  <a:lnTo>
+                    <a:pt x="302513" y="46767"/>
+                  </a:lnTo>
+                  <a:lnTo>
+                    <a:pt x="266728" y="21815"/>
+                  </a:lnTo>
+                  <a:lnTo>
+                    <a:pt x="224507" y="5711"/>
+                  </a:lnTo>
+                  <a:lnTo>
+                    <a:pt x="177545" y="0"/>
+                  </a:lnTo>
+                  <a:lnTo>
+                    <a:pt x="130263" y="5711"/>
+                  </a:lnTo>
+                  <a:lnTo>
+                    <a:pt x="87827" y="21815"/>
+                  </a:lnTo>
+                  <a:lnTo>
+                    <a:pt x="51911" y="46767"/>
+                  </a:lnTo>
+                  <a:lnTo>
+                    <a:pt x="24186" y="79022"/>
+                  </a:lnTo>
+                  <a:lnTo>
+                    <a:pt x="6325" y="117034"/>
+                  </a:lnTo>
+                  <a:lnTo>
+                    <a:pt x="0" y="159258"/>
+                  </a:lnTo>
+                  <a:lnTo>
+                    <a:pt x="6325" y="201803"/>
+                  </a:lnTo>
+                  <a:lnTo>
+                    <a:pt x="24186" y="240030"/>
+                  </a:lnTo>
+                  <a:lnTo>
+                    <a:pt x="51911" y="272415"/>
+                  </a:lnTo>
+                  <a:lnTo>
+                    <a:pt x="87827" y="297434"/>
+                  </a:lnTo>
+                  <a:lnTo>
+                    <a:pt x="130263" y="313563"/>
+                  </a:lnTo>
+                  <a:lnTo>
+                    <a:pt x="177545" y="319278"/>
+                  </a:lnTo>
+                  <a:lnTo>
+                    <a:pt x="224507" y="313563"/>
+                  </a:lnTo>
+                  <a:lnTo>
+                    <a:pt x="266728" y="297434"/>
+                  </a:lnTo>
+                  <a:lnTo>
+                    <a:pt x="302513" y="272415"/>
+                  </a:lnTo>
+                  <a:lnTo>
+                    <a:pt x="330171" y="240030"/>
+                  </a:lnTo>
+                  <a:lnTo>
+                    <a:pt x="348008" y="201803"/>
+                  </a:lnTo>
+                  <a:lnTo>
+                    <a:pt x="354329" y="159258"/>
+                  </a:lnTo>
+                  <a:close/>
+                </a:path>
+              </a:pathLst>
+            </a:custGeom>
+            <a:solidFill>
+              <a:srgbClr val="EAEAEA"/>
+            </a:solidFill>
+          </p:spPr>
+          <p:txBody>
+            <a:bodyPr wrap="square" lIns="0" tIns="0" rIns="0" bIns="0" rtlCol="0"/>
+            <a:lstStyle/>
+            <a:p>
+              <a:endParaRPr/>
+            </a:p>
+          </p:txBody>
+        </p:sp>
+        <p:sp>
+          <p:nvSpPr>
+            <p:cNvPr id="24" name="object 24">
+              <a:extLst>
+                <a:ext uri="{FF2B5EF4-FFF2-40B4-BE49-F238E27FC236}">
+                  <a16:creationId xmlns:a16="http://schemas.microsoft.com/office/drawing/2014/main" id="{66105944-9B85-013D-E253-2309E7249C0B}"/>
+                </a:ext>
+              </a:extLst>
+            </p:cNvPr>
+            <p:cNvSpPr/>
+            <p:nvPr/>
+          </p:nvSpPr>
+          <p:spPr>
+            <a:xfrm>
+              <a:off x="2901695" y="5578602"/>
+              <a:ext cx="354330" cy="319405"/>
+            </a:xfrm>
+            <a:custGeom>
+              <a:avLst/>
+              <a:gdLst/>
+              <a:ahLst/>
+              <a:cxnLst/>
+              <a:rect l="l" t="t" r="r" b="b"/>
+              <a:pathLst>
+                <a:path w="354329" h="319404">
+                  <a:moveTo>
+                    <a:pt x="177545" y="0"/>
+                  </a:moveTo>
+                  <a:lnTo>
+                    <a:pt x="130263" y="5711"/>
+                  </a:lnTo>
+                  <a:lnTo>
+                    <a:pt x="87827" y="21815"/>
+                  </a:lnTo>
+                  <a:lnTo>
+                    <a:pt x="51911" y="46767"/>
+                  </a:lnTo>
+                  <a:lnTo>
+                    <a:pt x="24186" y="79022"/>
+                  </a:lnTo>
+                  <a:lnTo>
+                    <a:pt x="6325" y="117034"/>
+                  </a:lnTo>
+                  <a:lnTo>
+                    <a:pt x="0" y="159258"/>
+                  </a:lnTo>
+                  <a:lnTo>
+                    <a:pt x="6325" y="201803"/>
+                  </a:lnTo>
+                  <a:lnTo>
+                    <a:pt x="24186" y="240030"/>
+                  </a:lnTo>
+                  <a:lnTo>
+                    <a:pt x="51911" y="272415"/>
+                  </a:lnTo>
+                  <a:lnTo>
+                    <a:pt x="87827" y="297434"/>
+                  </a:lnTo>
+                  <a:lnTo>
+                    <a:pt x="130263" y="313563"/>
+                  </a:lnTo>
+                  <a:lnTo>
+                    <a:pt x="177545" y="319278"/>
+                  </a:lnTo>
+                  <a:lnTo>
+                    <a:pt x="224507" y="313563"/>
+                  </a:lnTo>
+                  <a:lnTo>
+                    <a:pt x="266728" y="297434"/>
+                  </a:lnTo>
+                  <a:lnTo>
+                    <a:pt x="302513" y="272415"/>
+                  </a:lnTo>
+                  <a:lnTo>
+                    <a:pt x="330171" y="240030"/>
+                  </a:lnTo>
+                  <a:lnTo>
+                    <a:pt x="348008" y="201803"/>
+                  </a:lnTo>
+                  <a:lnTo>
+                    <a:pt x="354329" y="159258"/>
+                  </a:lnTo>
+                  <a:lnTo>
+                    <a:pt x="348008" y="117034"/>
+                  </a:lnTo>
+                  <a:lnTo>
+                    <a:pt x="330171" y="79022"/>
+                  </a:lnTo>
+                  <a:lnTo>
+                    <a:pt x="302513" y="46767"/>
+                  </a:lnTo>
+                  <a:lnTo>
+                    <a:pt x="266728" y="21815"/>
+                  </a:lnTo>
+                  <a:lnTo>
+                    <a:pt x="224507" y="5711"/>
+                  </a:lnTo>
+                  <a:lnTo>
+                    <a:pt x="177545" y="0"/>
+                  </a:lnTo>
+                  <a:close/>
+                </a:path>
+              </a:pathLst>
+            </a:custGeom>
+            <a:ln w="9525">
+              <a:solidFill>
+                <a:srgbClr val="000000"/>
+              </a:solidFill>
+            </a:ln>
+          </p:spPr>
+          <p:txBody>
+            <a:bodyPr wrap="square" lIns="0" tIns="0" rIns="0" bIns="0" rtlCol="0"/>
+            <a:lstStyle/>
+            <a:p>
+              <a:endParaRPr/>
+            </a:p>
+          </p:txBody>
+        </p:sp>
+        <p:sp>
+          <p:nvSpPr>
+            <p:cNvPr id="25" name="object 25">
+              <a:extLst>
+                <a:ext uri="{FF2B5EF4-FFF2-40B4-BE49-F238E27FC236}">
+                  <a16:creationId xmlns:a16="http://schemas.microsoft.com/office/drawing/2014/main" id="{ADC80B5C-8294-4B16-1801-22D4535A34DB}"/>
+                </a:ext>
+              </a:extLst>
+            </p:cNvPr>
+            <p:cNvSpPr/>
+            <p:nvPr/>
+          </p:nvSpPr>
+          <p:spPr>
+            <a:xfrm>
+              <a:off x="4319778" y="6003797"/>
+              <a:ext cx="355600" cy="321310"/>
+            </a:xfrm>
+            <a:custGeom>
+              <a:avLst/>
+              <a:gdLst/>
+              <a:ahLst/>
+              <a:cxnLst/>
+              <a:rect l="l" t="t" r="r" b="b"/>
+              <a:pathLst>
+                <a:path w="355600" h="321310">
+                  <a:moveTo>
+                    <a:pt x="355092" y="160782"/>
+                  </a:moveTo>
+                  <a:lnTo>
+                    <a:pt x="348766" y="117915"/>
+                  </a:lnTo>
+                  <a:lnTo>
+                    <a:pt x="330905" y="79473"/>
+                  </a:lnTo>
+                  <a:lnTo>
+                    <a:pt x="303180" y="46958"/>
+                  </a:lnTo>
+                  <a:lnTo>
+                    <a:pt x="267264" y="21872"/>
+                  </a:lnTo>
+                  <a:lnTo>
+                    <a:pt x="224828" y="5718"/>
+                  </a:lnTo>
+                  <a:lnTo>
+                    <a:pt x="177546" y="0"/>
+                  </a:lnTo>
+                  <a:lnTo>
+                    <a:pt x="130263" y="5718"/>
+                  </a:lnTo>
+                  <a:lnTo>
+                    <a:pt x="87827" y="21872"/>
+                  </a:lnTo>
+                  <a:lnTo>
+                    <a:pt x="51911" y="46958"/>
+                  </a:lnTo>
+                  <a:lnTo>
+                    <a:pt x="24186" y="79473"/>
+                  </a:lnTo>
+                  <a:lnTo>
+                    <a:pt x="6325" y="117915"/>
+                  </a:lnTo>
+                  <a:lnTo>
+                    <a:pt x="0" y="160782"/>
+                  </a:lnTo>
+                  <a:lnTo>
+                    <a:pt x="6325" y="203327"/>
+                  </a:lnTo>
+                  <a:lnTo>
+                    <a:pt x="24186" y="241554"/>
+                  </a:lnTo>
+                  <a:lnTo>
+                    <a:pt x="51911" y="273939"/>
+                  </a:lnTo>
+                  <a:lnTo>
+                    <a:pt x="87827" y="298958"/>
+                  </a:lnTo>
+                  <a:lnTo>
+                    <a:pt x="130263" y="315087"/>
+                  </a:lnTo>
+                  <a:lnTo>
+                    <a:pt x="177546" y="320802"/>
+                  </a:lnTo>
+                  <a:lnTo>
+                    <a:pt x="224828" y="315087"/>
+                  </a:lnTo>
+                  <a:lnTo>
+                    <a:pt x="267264" y="298958"/>
+                  </a:lnTo>
+                  <a:lnTo>
+                    <a:pt x="303180" y="273939"/>
+                  </a:lnTo>
+                  <a:lnTo>
+                    <a:pt x="330905" y="241554"/>
+                  </a:lnTo>
+                  <a:lnTo>
+                    <a:pt x="348766" y="203327"/>
+                  </a:lnTo>
+                  <a:lnTo>
+                    <a:pt x="355092" y="160782"/>
+                  </a:lnTo>
+                  <a:close/>
+                </a:path>
+              </a:pathLst>
+            </a:custGeom>
+            <a:solidFill>
+              <a:srgbClr val="EAEAEA"/>
+            </a:solidFill>
+          </p:spPr>
+          <p:txBody>
+            <a:bodyPr wrap="square" lIns="0" tIns="0" rIns="0" bIns="0" rtlCol="0"/>
+            <a:lstStyle/>
+            <a:p>
+              <a:endParaRPr/>
+            </a:p>
+          </p:txBody>
+        </p:sp>
+        <p:sp>
+          <p:nvSpPr>
+            <p:cNvPr id="26" name="object 26">
+              <a:extLst>
+                <a:ext uri="{FF2B5EF4-FFF2-40B4-BE49-F238E27FC236}">
+                  <a16:creationId xmlns:a16="http://schemas.microsoft.com/office/drawing/2014/main" id="{5922F57E-438A-89F1-9C9C-B141CF054BDB}"/>
+                </a:ext>
+              </a:extLst>
+            </p:cNvPr>
+            <p:cNvSpPr/>
+            <p:nvPr/>
+          </p:nvSpPr>
+          <p:spPr>
+            <a:xfrm>
+              <a:off x="4319778" y="6003797"/>
+              <a:ext cx="355600" cy="321310"/>
+            </a:xfrm>
+            <a:custGeom>
+              <a:avLst/>
+              <a:gdLst/>
+              <a:ahLst/>
+              <a:cxnLst/>
+              <a:rect l="l" t="t" r="r" b="b"/>
+              <a:pathLst>
+                <a:path w="355600" h="321310">
+                  <a:moveTo>
+                    <a:pt x="177546" y="0"/>
+                  </a:moveTo>
+                  <a:lnTo>
+                    <a:pt x="130263" y="5718"/>
+                  </a:lnTo>
+                  <a:lnTo>
+                    <a:pt x="87827" y="21872"/>
+                  </a:lnTo>
+                  <a:lnTo>
+                    <a:pt x="51911" y="46958"/>
+                  </a:lnTo>
+                  <a:lnTo>
+                    <a:pt x="24186" y="79473"/>
+                  </a:lnTo>
+                  <a:lnTo>
+                    <a:pt x="6325" y="117915"/>
+                  </a:lnTo>
+                  <a:lnTo>
+                    <a:pt x="0" y="160782"/>
+                  </a:lnTo>
+                  <a:lnTo>
+                    <a:pt x="6325" y="203327"/>
+                  </a:lnTo>
+                  <a:lnTo>
+                    <a:pt x="24186" y="241554"/>
+                  </a:lnTo>
+                  <a:lnTo>
+                    <a:pt x="51911" y="273939"/>
+                  </a:lnTo>
+                  <a:lnTo>
+                    <a:pt x="87827" y="298958"/>
+                  </a:lnTo>
+                  <a:lnTo>
+                    <a:pt x="130263" y="315087"/>
+                  </a:lnTo>
+                  <a:lnTo>
+                    <a:pt x="177546" y="320802"/>
+                  </a:lnTo>
+                  <a:lnTo>
+                    <a:pt x="224828" y="315087"/>
+                  </a:lnTo>
+                  <a:lnTo>
+                    <a:pt x="267264" y="298958"/>
+                  </a:lnTo>
+                  <a:lnTo>
+                    <a:pt x="303180" y="273939"/>
+                  </a:lnTo>
+                  <a:lnTo>
+                    <a:pt x="330905" y="241554"/>
+                  </a:lnTo>
+                  <a:lnTo>
+                    <a:pt x="348766" y="203327"/>
+                  </a:lnTo>
+                  <a:lnTo>
+                    <a:pt x="355092" y="160782"/>
+                  </a:lnTo>
+                  <a:lnTo>
+                    <a:pt x="348766" y="117915"/>
+                  </a:lnTo>
+                  <a:lnTo>
+                    <a:pt x="330905" y="79473"/>
+                  </a:lnTo>
+                  <a:lnTo>
+                    <a:pt x="303180" y="46958"/>
+                  </a:lnTo>
+                  <a:lnTo>
+                    <a:pt x="267264" y="21872"/>
+                  </a:lnTo>
+                  <a:lnTo>
+                    <a:pt x="224828" y="5718"/>
+                  </a:lnTo>
+                  <a:lnTo>
+                    <a:pt x="177546" y="0"/>
+                  </a:lnTo>
+                  <a:close/>
+                </a:path>
+              </a:pathLst>
+            </a:custGeom>
+            <a:ln w="9525">
+              <a:solidFill>
+                <a:srgbClr val="000000"/>
+              </a:solidFill>
+            </a:ln>
+          </p:spPr>
+          <p:txBody>
+            <a:bodyPr wrap="square" lIns="0" tIns="0" rIns="0" bIns="0" rtlCol="0"/>
+            <a:lstStyle/>
+            <a:p>
+              <a:endParaRPr/>
+            </a:p>
+          </p:txBody>
+        </p:sp>
+        <p:sp>
+          <p:nvSpPr>
+            <p:cNvPr id="27" name="object 27">
+              <a:extLst>
+                <a:ext uri="{FF2B5EF4-FFF2-40B4-BE49-F238E27FC236}">
+                  <a16:creationId xmlns:a16="http://schemas.microsoft.com/office/drawing/2014/main" id="{C0064F3B-D87F-0888-E54D-40E198CE951C}"/>
+                </a:ext>
+              </a:extLst>
+            </p:cNvPr>
+            <p:cNvSpPr/>
+            <p:nvPr/>
+          </p:nvSpPr>
+          <p:spPr>
+            <a:xfrm>
+              <a:off x="1365503" y="3978402"/>
+              <a:ext cx="471170" cy="852805"/>
+            </a:xfrm>
+            <a:custGeom>
+              <a:avLst/>
+              <a:gdLst/>
+              <a:ahLst/>
+              <a:cxnLst/>
+              <a:rect l="l" t="t" r="r" b="b"/>
+              <a:pathLst>
+                <a:path w="471169" h="852804">
+                  <a:moveTo>
+                    <a:pt x="470915" y="0"/>
+                  </a:moveTo>
+                  <a:lnTo>
+                    <a:pt x="0" y="852678"/>
+                  </a:lnTo>
+                </a:path>
+              </a:pathLst>
+            </a:custGeom>
+            <a:ln w="50800">
+              <a:solidFill>
+                <a:srgbClr val="FF0000"/>
+              </a:solidFill>
+            </a:ln>
+          </p:spPr>
+          <p:txBody>
+            <a:bodyPr wrap="square" lIns="0" tIns="0" rIns="0" bIns="0" rtlCol="0"/>
+            <a:lstStyle/>
+            <a:p>
+              <a:endParaRPr/>
+            </a:p>
+          </p:txBody>
+        </p:sp>
+        <p:sp>
+          <p:nvSpPr>
+            <p:cNvPr id="28" name="object 28">
+              <a:extLst>
+                <a:ext uri="{FF2B5EF4-FFF2-40B4-BE49-F238E27FC236}">
+                  <a16:creationId xmlns:a16="http://schemas.microsoft.com/office/drawing/2014/main" id="{B8BD78C7-AFFC-C7BD-923A-FAE5A07E33A4}"/>
+                </a:ext>
+              </a:extLst>
+            </p:cNvPr>
+            <p:cNvSpPr/>
+            <p:nvPr/>
+          </p:nvSpPr>
+          <p:spPr>
+            <a:xfrm>
+              <a:off x="2073401" y="3870197"/>
+              <a:ext cx="1536700" cy="108585"/>
+            </a:xfrm>
+            <a:custGeom>
+              <a:avLst/>
+              <a:gdLst/>
+              <a:ahLst/>
+              <a:cxnLst/>
+              <a:rect l="l" t="t" r="r" b="b"/>
+              <a:pathLst>
+                <a:path w="1536700" h="108585">
+                  <a:moveTo>
+                    <a:pt x="0" y="0"/>
+                  </a:moveTo>
+                  <a:lnTo>
+                    <a:pt x="1536192" y="108203"/>
+                  </a:lnTo>
+                </a:path>
+              </a:pathLst>
+            </a:custGeom>
+            <a:ln w="50800">
+              <a:solidFill>
+                <a:srgbClr val="FF0000"/>
+              </a:solidFill>
+            </a:ln>
+          </p:spPr>
+          <p:txBody>
+            <a:bodyPr wrap="square" lIns="0" tIns="0" rIns="0" bIns="0" rtlCol="0"/>
+            <a:lstStyle/>
+            <a:p>
+              <a:endParaRPr/>
+            </a:p>
+          </p:txBody>
+        </p:sp>
+        <p:sp>
+          <p:nvSpPr>
+            <p:cNvPr id="29" name="object 29">
+              <a:extLst>
+                <a:ext uri="{FF2B5EF4-FFF2-40B4-BE49-F238E27FC236}">
+                  <a16:creationId xmlns:a16="http://schemas.microsoft.com/office/drawing/2014/main" id="{E5028630-2003-6C39-CE1E-2E4EFDC93226}"/>
+                </a:ext>
+              </a:extLst>
+            </p:cNvPr>
+            <p:cNvSpPr/>
+            <p:nvPr/>
+          </p:nvSpPr>
+          <p:spPr>
+            <a:xfrm>
+              <a:off x="1482852" y="5045202"/>
+              <a:ext cx="1419225" cy="639445"/>
+            </a:xfrm>
+            <a:custGeom>
+              <a:avLst/>
+              <a:gdLst/>
+              <a:ahLst/>
+              <a:cxnLst/>
+              <a:rect l="l" t="t" r="r" b="b"/>
+              <a:pathLst>
+                <a:path w="1419225" h="639445">
+                  <a:moveTo>
+                    <a:pt x="0" y="0"/>
+                  </a:moveTo>
+                  <a:lnTo>
+                    <a:pt x="1418844" y="639318"/>
+                  </a:lnTo>
+                </a:path>
+              </a:pathLst>
+            </a:custGeom>
+            <a:ln w="9525">
+              <a:solidFill>
+                <a:srgbClr val="000000"/>
+              </a:solidFill>
+            </a:ln>
+          </p:spPr>
+          <p:txBody>
+            <a:bodyPr wrap="square" lIns="0" tIns="0" rIns="0" bIns="0" rtlCol="0"/>
+            <a:lstStyle/>
+            <a:p>
+              <a:endParaRPr/>
+            </a:p>
+          </p:txBody>
+        </p:sp>
+        <p:sp>
+          <p:nvSpPr>
+            <p:cNvPr id="30" name="object 30">
+              <a:extLst>
+                <a:ext uri="{FF2B5EF4-FFF2-40B4-BE49-F238E27FC236}">
+                  <a16:creationId xmlns:a16="http://schemas.microsoft.com/office/drawing/2014/main" id="{1CCCC95F-6303-E625-57A6-0ED67E7CB265}"/>
+                </a:ext>
+              </a:extLst>
+            </p:cNvPr>
+            <p:cNvSpPr/>
+            <p:nvPr/>
+          </p:nvSpPr>
+          <p:spPr>
+            <a:xfrm>
+              <a:off x="1482852" y="4724400"/>
+              <a:ext cx="1183005" cy="212725"/>
+            </a:xfrm>
+            <a:custGeom>
+              <a:avLst/>
+              <a:gdLst/>
+              <a:ahLst/>
+              <a:cxnLst/>
+              <a:rect l="l" t="t" r="r" b="b"/>
+              <a:pathLst>
+                <a:path w="1183005" h="212725">
+                  <a:moveTo>
+                    <a:pt x="0" y="212598"/>
+                  </a:moveTo>
+                  <a:lnTo>
+                    <a:pt x="1182624" y="0"/>
+                  </a:lnTo>
+                </a:path>
+              </a:pathLst>
+            </a:custGeom>
+            <a:ln w="50800">
+              <a:solidFill>
+                <a:srgbClr val="FF0000"/>
+              </a:solidFill>
+            </a:ln>
+          </p:spPr>
+          <p:txBody>
+            <a:bodyPr wrap="square" lIns="0" tIns="0" rIns="0" bIns="0" rtlCol="0"/>
+            <a:lstStyle/>
+            <a:p>
+              <a:endParaRPr/>
+            </a:p>
+          </p:txBody>
+        </p:sp>
+        <p:sp>
+          <p:nvSpPr>
+            <p:cNvPr id="31" name="object 31">
+              <a:extLst>
+                <a:ext uri="{FF2B5EF4-FFF2-40B4-BE49-F238E27FC236}">
+                  <a16:creationId xmlns:a16="http://schemas.microsoft.com/office/drawing/2014/main" id="{C31610EA-992C-3262-36EC-C8A2B3755999}"/>
+                </a:ext>
+              </a:extLst>
+            </p:cNvPr>
+            <p:cNvSpPr/>
+            <p:nvPr/>
+          </p:nvSpPr>
+          <p:spPr>
+            <a:xfrm>
+              <a:off x="3846576" y="4191000"/>
+              <a:ext cx="592455" cy="1812925"/>
+            </a:xfrm>
+            <a:custGeom>
+              <a:avLst/>
+              <a:gdLst/>
+              <a:ahLst/>
+              <a:cxnLst/>
+              <a:rect l="l" t="t" r="r" b="b"/>
+              <a:pathLst>
+                <a:path w="592454" h="1812925">
+                  <a:moveTo>
+                    <a:pt x="0" y="0"/>
+                  </a:moveTo>
+                  <a:lnTo>
+                    <a:pt x="592074" y="1812798"/>
+                  </a:lnTo>
+                </a:path>
+              </a:pathLst>
+            </a:custGeom>
+            <a:ln w="9525">
+              <a:solidFill>
+                <a:srgbClr val="000000"/>
+              </a:solidFill>
+            </a:ln>
+          </p:spPr>
+          <p:txBody>
+            <a:bodyPr wrap="square" lIns="0" tIns="0" rIns="0" bIns="0" rtlCol="0"/>
+            <a:lstStyle/>
+            <a:p>
+              <a:endParaRPr/>
+            </a:p>
+          </p:txBody>
+        </p:sp>
+        <p:sp>
+          <p:nvSpPr>
+            <p:cNvPr id="32" name="object 32">
+              <a:extLst>
+                <a:ext uri="{FF2B5EF4-FFF2-40B4-BE49-F238E27FC236}">
+                  <a16:creationId xmlns:a16="http://schemas.microsoft.com/office/drawing/2014/main" id="{EC90C340-77D2-8141-C5A2-51F0601339FA}"/>
+                </a:ext>
+              </a:extLst>
+            </p:cNvPr>
+            <p:cNvSpPr/>
+            <p:nvPr/>
+          </p:nvSpPr>
+          <p:spPr>
+            <a:xfrm>
+              <a:off x="3890771" y="4123944"/>
+              <a:ext cx="829310" cy="854710"/>
+            </a:xfrm>
+            <a:custGeom>
+              <a:avLst/>
+              <a:gdLst/>
+              <a:ahLst/>
+              <a:cxnLst/>
+              <a:rect l="l" t="t" r="r" b="b"/>
+              <a:pathLst>
+                <a:path w="829310" h="854710">
+                  <a:moveTo>
+                    <a:pt x="0" y="0"/>
+                  </a:moveTo>
+                  <a:lnTo>
+                    <a:pt x="829056" y="854202"/>
+                  </a:lnTo>
+                </a:path>
+              </a:pathLst>
+            </a:custGeom>
+            <a:ln w="50800">
+              <a:solidFill>
+                <a:srgbClr val="FF0000"/>
+              </a:solidFill>
+            </a:ln>
+          </p:spPr>
+          <p:txBody>
+            <a:bodyPr wrap="square" lIns="0" tIns="0" rIns="0" bIns="0" rtlCol="0"/>
+            <a:lstStyle/>
+            <a:p>
+              <a:endParaRPr/>
+            </a:p>
+          </p:txBody>
+        </p:sp>
+        <p:sp>
+          <p:nvSpPr>
+            <p:cNvPr id="33" name="object 33">
+              <a:extLst>
+                <a:ext uri="{FF2B5EF4-FFF2-40B4-BE49-F238E27FC236}">
+                  <a16:creationId xmlns:a16="http://schemas.microsoft.com/office/drawing/2014/main" id="{5CC8F698-994D-F274-0ABB-B72785555B14}"/>
+                </a:ext>
+              </a:extLst>
+            </p:cNvPr>
+            <p:cNvSpPr/>
+            <p:nvPr/>
+          </p:nvSpPr>
+          <p:spPr>
+            <a:xfrm>
+              <a:off x="4555997" y="5257800"/>
+              <a:ext cx="237490" cy="746125"/>
+            </a:xfrm>
+            <a:custGeom>
+              <a:avLst/>
+              <a:gdLst/>
+              <a:ahLst/>
+              <a:cxnLst/>
+              <a:rect l="l" t="t" r="r" b="b"/>
+              <a:pathLst>
+                <a:path w="237489" h="746125">
+                  <a:moveTo>
+                    <a:pt x="236982" y="0"/>
+                  </a:moveTo>
+                  <a:lnTo>
+                    <a:pt x="0" y="745998"/>
+                  </a:lnTo>
+                </a:path>
+              </a:pathLst>
+            </a:custGeom>
+            <a:ln w="50800">
+              <a:solidFill>
+                <a:srgbClr val="FF0000"/>
+              </a:solidFill>
+            </a:ln>
+          </p:spPr>
+          <p:txBody>
+            <a:bodyPr wrap="square" lIns="0" tIns="0" rIns="0" bIns="0" rtlCol="0"/>
+            <a:lstStyle/>
+            <a:p>
+              <a:endParaRPr/>
+            </a:p>
+          </p:txBody>
+        </p:sp>
+        <p:sp>
+          <p:nvSpPr>
+            <p:cNvPr id="34" name="object 34">
+              <a:extLst>
+                <a:ext uri="{FF2B5EF4-FFF2-40B4-BE49-F238E27FC236}">
+                  <a16:creationId xmlns:a16="http://schemas.microsoft.com/office/drawing/2014/main" id="{C387EA1B-0C7A-71EE-C9BD-82E9EC7DA060}"/>
+                </a:ext>
+              </a:extLst>
+            </p:cNvPr>
+            <p:cNvSpPr/>
+            <p:nvPr/>
+          </p:nvSpPr>
+          <p:spPr>
+            <a:xfrm>
+              <a:off x="3138677" y="4191000"/>
+              <a:ext cx="590550" cy="1388110"/>
+            </a:xfrm>
+            <a:custGeom>
+              <a:avLst/>
+              <a:gdLst/>
+              <a:ahLst/>
+              <a:cxnLst/>
+              <a:rect l="l" t="t" r="r" b="b"/>
+              <a:pathLst>
+                <a:path w="590550" h="1388110">
+                  <a:moveTo>
+                    <a:pt x="590550" y="0"/>
+                  </a:moveTo>
+                  <a:lnTo>
+                    <a:pt x="0" y="1387602"/>
+                  </a:lnTo>
+                </a:path>
+              </a:pathLst>
+            </a:custGeom>
+            <a:ln w="50799">
+              <a:solidFill>
+                <a:srgbClr val="FF0000"/>
+              </a:solidFill>
+            </a:ln>
+          </p:spPr>
+          <p:txBody>
+            <a:bodyPr wrap="square" lIns="0" tIns="0" rIns="0" bIns="0" rtlCol="0"/>
+            <a:lstStyle/>
+            <a:p>
+              <a:endParaRPr/>
+            </a:p>
+          </p:txBody>
+        </p:sp>
+        <p:sp>
+          <p:nvSpPr>
+            <p:cNvPr id="35" name="object 35">
+              <a:extLst>
+                <a:ext uri="{FF2B5EF4-FFF2-40B4-BE49-F238E27FC236}">
+                  <a16:creationId xmlns:a16="http://schemas.microsoft.com/office/drawing/2014/main" id="{F420B6B0-1CF7-8172-96E6-0BDCC6ECB46C}"/>
+                </a:ext>
+              </a:extLst>
+            </p:cNvPr>
+            <p:cNvSpPr/>
+            <p:nvPr/>
+          </p:nvSpPr>
+          <p:spPr>
+            <a:xfrm>
+              <a:off x="3138677" y="5897879"/>
+              <a:ext cx="236220" cy="639445"/>
+            </a:xfrm>
+            <a:custGeom>
+              <a:avLst/>
+              <a:gdLst/>
+              <a:ahLst/>
+              <a:cxnLst/>
+              <a:rect l="l" t="t" r="r" b="b"/>
+              <a:pathLst>
+                <a:path w="236220" h="639445">
+                  <a:moveTo>
+                    <a:pt x="0" y="0"/>
+                  </a:moveTo>
+                  <a:lnTo>
+                    <a:pt x="236220" y="639318"/>
+                  </a:lnTo>
+                </a:path>
+              </a:pathLst>
+            </a:custGeom>
+            <a:ln w="50800">
+              <a:solidFill>
+                <a:srgbClr val="FF0000"/>
+              </a:solidFill>
+            </a:ln>
+          </p:spPr>
+          <p:txBody>
+            <a:bodyPr wrap="square" lIns="0" tIns="0" rIns="0" bIns="0" rtlCol="0"/>
+            <a:lstStyle/>
+            <a:p>
+              <a:endParaRPr/>
+            </a:p>
+          </p:txBody>
+        </p:sp>
+        <p:sp>
+          <p:nvSpPr>
+            <p:cNvPr id="36" name="object 36">
+              <a:extLst>
+                <a:ext uri="{FF2B5EF4-FFF2-40B4-BE49-F238E27FC236}">
+                  <a16:creationId xmlns:a16="http://schemas.microsoft.com/office/drawing/2014/main" id="{02D14200-C356-4704-97A3-0F2A051C1424}"/>
+                </a:ext>
+              </a:extLst>
+            </p:cNvPr>
+            <p:cNvSpPr/>
+            <p:nvPr/>
+          </p:nvSpPr>
+          <p:spPr>
+            <a:xfrm>
+              <a:off x="1719072" y="5791200"/>
+              <a:ext cx="1183005" cy="212725"/>
+            </a:xfrm>
+            <a:custGeom>
+              <a:avLst/>
+              <a:gdLst/>
+              <a:ahLst/>
+              <a:cxnLst/>
+              <a:rect l="l" t="t" r="r" b="b"/>
+              <a:pathLst>
+                <a:path w="1183005" h="212725">
+                  <a:moveTo>
+                    <a:pt x="0" y="212598"/>
+                  </a:moveTo>
+                  <a:lnTo>
+                    <a:pt x="1182624" y="0"/>
+                  </a:lnTo>
+                </a:path>
+              </a:pathLst>
+            </a:custGeom>
+            <a:ln w="50800">
+              <a:solidFill>
+                <a:srgbClr val="FF0000"/>
+              </a:solidFill>
+            </a:ln>
+          </p:spPr>
+          <p:txBody>
+            <a:bodyPr wrap="square" lIns="0" tIns="0" rIns="0" bIns="0" rtlCol="0"/>
+            <a:lstStyle/>
+            <a:p>
+              <a:endParaRPr/>
+            </a:p>
+          </p:txBody>
+        </p:sp>
+        <p:sp>
+          <p:nvSpPr>
+            <p:cNvPr id="37" name="object 37">
+              <a:extLst>
+                <a:ext uri="{FF2B5EF4-FFF2-40B4-BE49-F238E27FC236}">
+                  <a16:creationId xmlns:a16="http://schemas.microsoft.com/office/drawing/2014/main" id="{341E5C6B-E95C-AF94-DC28-1AE456D90206}"/>
+                </a:ext>
+              </a:extLst>
+            </p:cNvPr>
+            <p:cNvSpPr txBox="1"/>
+            <p:nvPr/>
+          </p:nvSpPr>
+          <p:spPr>
+            <a:xfrm>
+              <a:off x="1828292" y="3683253"/>
+              <a:ext cx="124460" cy="224790"/>
+            </a:xfrm>
+            <a:prstGeom prst="rect">
+              <a:avLst/>
+            </a:prstGeom>
+          </p:spPr>
+          <p:txBody>
+            <a:bodyPr vert="horz" wrap="square" lIns="0" tIns="0" rIns="0" bIns="0" rtlCol="0">
+              <a:spAutoFit/>
+            </a:bodyPr>
+            <a:lstStyle/>
+            <a:p>
+              <a:pPr marL="12700">
+                <a:lnSpc>
+                  <a:spcPct val="100000"/>
+                </a:lnSpc>
+              </a:pPr>
+              <a:r>
+                <a:rPr sz="1400" b="1" spc="-5" dirty="0">
+                  <a:latin typeface="Arial"/>
+                  <a:cs typeface="Arial"/>
+                </a:rPr>
+                <a:t>a</a:t>
+              </a:r>
+              <a:endParaRPr sz="1400">
+                <a:latin typeface="Arial"/>
+                <a:cs typeface="Arial"/>
+              </a:endParaRPr>
+            </a:p>
+          </p:txBody>
+        </p:sp>
+        <p:sp>
+          <p:nvSpPr>
+            <p:cNvPr id="38" name="object 38">
+              <a:extLst>
+                <a:ext uri="{FF2B5EF4-FFF2-40B4-BE49-F238E27FC236}">
+                  <a16:creationId xmlns:a16="http://schemas.microsoft.com/office/drawing/2014/main" id="{440DCD66-99D0-CF4A-E45E-914329C5A0D7}"/>
+                </a:ext>
+              </a:extLst>
+            </p:cNvPr>
+            <p:cNvSpPr txBox="1"/>
+            <p:nvPr/>
+          </p:nvSpPr>
+          <p:spPr>
+            <a:xfrm>
+              <a:off x="4462524" y="6045450"/>
+              <a:ext cx="74930" cy="224790"/>
+            </a:xfrm>
+            <a:prstGeom prst="rect">
+              <a:avLst/>
+            </a:prstGeom>
+          </p:spPr>
+          <p:txBody>
+            <a:bodyPr vert="horz" wrap="square" lIns="0" tIns="0" rIns="0" bIns="0" rtlCol="0">
+              <a:spAutoFit/>
+            </a:bodyPr>
+            <a:lstStyle/>
+            <a:p>
+              <a:pPr marL="12700">
+                <a:lnSpc>
+                  <a:spcPct val="100000"/>
+                </a:lnSpc>
+              </a:pPr>
+              <a:r>
+                <a:rPr sz="1400" b="1" spc="-5" dirty="0">
+                  <a:latin typeface="Arial"/>
+                  <a:cs typeface="Arial"/>
+                </a:rPr>
+                <a:t>i</a:t>
+              </a:r>
+              <a:endParaRPr sz="1400">
+                <a:latin typeface="Arial"/>
+                <a:cs typeface="Arial"/>
+              </a:endParaRPr>
+            </a:p>
+          </p:txBody>
+        </p:sp>
+        <p:sp>
+          <p:nvSpPr>
+            <p:cNvPr id="39" name="object 39">
+              <a:extLst>
+                <a:ext uri="{FF2B5EF4-FFF2-40B4-BE49-F238E27FC236}">
+                  <a16:creationId xmlns:a16="http://schemas.microsoft.com/office/drawing/2014/main" id="{B851F72C-ED19-FC8B-1C74-B163EDEC31C4}"/>
+                </a:ext>
+              </a:extLst>
+            </p:cNvPr>
+            <p:cNvSpPr txBox="1"/>
+            <p:nvPr/>
+          </p:nvSpPr>
+          <p:spPr>
+            <a:xfrm>
+              <a:off x="3362200" y="6559801"/>
+              <a:ext cx="133985" cy="224790"/>
+            </a:xfrm>
+            <a:prstGeom prst="rect">
+              <a:avLst/>
+            </a:prstGeom>
+          </p:spPr>
+          <p:txBody>
+            <a:bodyPr vert="horz" wrap="square" lIns="0" tIns="0" rIns="0" bIns="0" rtlCol="0">
+              <a:spAutoFit/>
+            </a:bodyPr>
+            <a:lstStyle/>
+            <a:p>
+              <a:pPr marL="12700">
+                <a:lnSpc>
+                  <a:spcPct val="100000"/>
+                </a:lnSpc>
+              </a:pPr>
+              <a:r>
+                <a:rPr sz="1400" b="1" spc="-5" dirty="0">
+                  <a:latin typeface="Arial"/>
+                  <a:cs typeface="Arial"/>
+                </a:rPr>
+                <a:t>g</a:t>
+              </a:r>
+              <a:endParaRPr sz="1400">
+                <a:latin typeface="Arial"/>
+                <a:cs typeface="Arial"/>
+              </a:endParaRPr>
+            </a:p>
+          </p:txBody>
+        </p:sp>
+        <p:sp>
+          <p:nvSpPr>
+            <p:cNvPr id="40" name="object 40">
+              <a:extLst>
+                <a:ext uri="{FF2B5EF4-FFF2-40B4-BE49-F238E27FC236}">
+                  <a16:creationId xmlns:a16="http://schemas.microsoft.com/office/drawing/2014/main" id="{18DB5500-544F-3752-313F-32AF7B2FDCBC}"/>
+                </a:ext>
+              </a:extLst>
+            </p:cNvPr>
+            <p:cNvSpPr txBox="1"/>
+            <p:nvPr/>
+          </p:nvSpPr>
+          <p:spPr>
+            <a:xfrm>
+              <a:off x="1481580" y="5954777"/>
+              <a:ext cx="85090" cy="224790"/>
+            </a:xfrm>
+            <a:prstGeom prst="rect">
+              <a:avLst/>
+            </a:prstGeom>
+          </p:spPr>
+          <p:txBody>
+            <a:bodyPr vert="horz" wrap="square" lIns="0" tIns="0" rIns="0" bIns="0" rtlCol="0">
+              <a:spAutoFit/>
+            </a:bodyPr>
+            <a:lstStyle/>
+            <a:p>
+              <a:pPr marL="12700">
+                <a:lnSpc>
+                  <a:spcPct val="100000"/>
+                </a:lnSpc>
+              </a:pPr>
+              <a:r>
+                <a:rPr sz="1400" b="1" spc="-5" dirty="0">
+                  <a:latin typeface="Arial"/>
+                  <a:cs typeface="Arial"/>
+                </a:rPr>
+                <a:t>f</a:t>
+              </a:r>
+              <a:endParaRPr sz="1400">
+                <a:latin typeface="Arial"/>
+                <a:cs typeface="Arial"/>
+              </a:endParaRPr>
+            </a:p>
+          </p:txBody>
+        </p:sp>
+        <p:sp>
+          <p:nvSpPr>
+            <p:cNvPr id="41" name="object 41">
+              <a:extLst>
+                <a:ext uri="{FF2B5EF4-FFF2-40B4-BE49-F238E27FC236}">
+                  <a16:creationId xmlns:a16="http://schemas.microsoft.com/office/drawing/2014/main" id="{940139D4-29FC-540C-DB25-106D2D84788A}"/>
+                </a:ext>
+              </a:extLst>
+            </p:cNvPr>
+            <p:cNvSpPr txBox="1"/>
+            <p:nvPr/>
+          </p:nvSpPr>
+          <p:spPr>
+            <a:xfrm>
+              <a:off x="3028432" y="5616445"/>
+              <a:ext cx="124460" cy="224790"/>
+            </a:xfrm>
+            <a:prstGeom prst="rect">
+              <a:avLst/>
+            </a:prstGeom>
+          </p:spPr>
+          <p:txBody>
+            <a:bodyPr vert="horz" wrap="square" lIns="0" tIns="0" rIns="0" bIns="0" rtlCol="0">
+              <a:spAutoFit/>
+            </a:bodyPr>
+            <a:lstStyle/>
+            <a:p>
+              <a:pPr marL="12700">
+                <a:lnSpc>
+                  <a:spcPct val="100000"/>
+                </a:lnSpc>
+              </a:pPr>
+              <a:r>
+                <a:rPr sz="1400" b="1" spc="-5" dirty="0">
+                  <a:latin typeface="Arial"/>
+                  <a:cs typeface="Arial"/>
+                </a:rPr>
+                <a:t>e</a:t>
+              </a:r>
+              <a:endParaRPr sz="1400">
+                <a:latin typeface="Arial"/>
+                <a:cs typeface="Arial"/>
+              </a:endParaRPr>
+            </a:p>
+          </p:txBody>
+        </p:sp>
+        <p:sp>
+          <p:nvSpPr>
+            <p:cNvPr id="42" name="object 42">
+              <a:extLst>
+                <a:ext uri="{FF2B5EF4-FFF2-40B4-BE49-F238E27FC236}">
+                  <a16:creationId xmlns:a16="http://schemas.microsoft.com/office/drawing/2014/main" id="{4CFFAFDE-F26E-1D8C-6AFA-918CA8D1DB36}"/>
+                </a:ext>
+              </a:extLst>
+            </p:cNvPr>
+            <p:cNvSpPr txBox="1"/>
+            <p:nvPr/>
+          </p:nvSpPr>
+          <p:spPr>
+            <a:xfrm>
+              <a:off x="2771629" y="4564130"/>
+              <a:ext cx="133985" cy="224790"/>
+            </a:xfrm>
+            <a:prstGeom prst="rect">
+              <a:avLst/>
+            </a:prstGeom>
+          </p:spPr>
+          <p:txBody>
+            <a:bodyPr vert="horz" wrap="square" lIns="0" tIns="0" rIns="0" bIns="0" rtlCol="0">
+              <a:spAutoFit/>
+            </a:bodyPr>
+            <a:lstStyle/>
+            <a:p>
+              <a:pPr marL="12700">
+                <a:lnSpc>
+                  <a:spcPct val="100000"/>
+                </a:lnSpc>
+              </a:pPr>
+              <a:r>
+                <a:rPr sz="1400" b="1" spc="-5" dirty="0">
+                  <a:latin typeface="Arial"/>
+                  <a:cs typeface="Arial"/>
+                </a:rPr>
+                <a:t>d</a:t>
+              </a:r>
+              <a:endParaRPr sz="1400">
+                <a:latin typeface="Arial"/>
+                <a:cs typeface="Arial"/>
+              </a:endParaRPr>
+            </a:p>
+          </p:txBody>
+        </p:sp>
+        <p:sp>
+          <p:nvSpPr>
+            <p:cNvPr id="43" name="object 43">
+              <a:extLst>
+                <a:ext uri="{FF2B5EF4-FFF2-40B4-BE49-F238E27FC236}">
+                  <a16:creationId xmlns:a16="http://schemas.microsoft.com/office/drawing/2014/main" id="{2955A8C3-9140-C0A9-0ED9-25C106631116}"/>
+                </a:ext>
+              </a:extLst>
+            </p:cNvPr>
+            <p:cNvSpPr txBox="1"/>
+            <p:nvPr/>
+          </p:nvSpPr>
+          <p:spPr>
+            <a:xfrm>
+              <a:off x="1247627" y="4854454"/>
+              <a:ext cx="124460" cy="224790"/>
+            </a:xfrm>
+            <a:prstGeom prst="rect">
+              <a:avLst/>
+            </a:prstGeom>
+          </p:spPr>
+          <p:txBody>
+            <a:bodyPr vert="horz" wrap="square" lIns="0" tIns="0" rIns="0" bIns="0" rtlCol="0">
+              <a:spAutoFit/>
+            </a:bodyPr>
+            <a:lstStyle/>
+            <a:p>
+              <a:pPr marL="12700">
+                <a:lnSpc>
+                  <a:spcPct val="100000"/>
+                </a:lnSpc>
+              </a:pPr>
+              <a:r>
+                <a:rPr sz="1400" b="1" spc="-5" dirty="0">
+                  <a:latin typeface="Arial"/>
+                  <a:cs typeface="Arial"/>
+                </a:rPr>
+                <a:t>c</a:t>
+              </a:r>
+              <a:endParaRPr sz="1400">
+                <a:latin typeface="Arial"/>
+                <a:cs typeface="Arial"/>
+              </a:endParaRPr>
+            </a:p>
+          </p:txBody>
+        </p:sp>
+        <p:sp>
+          <p:nvSpPr>
+            <p:cNvPr id="44" name="object 44">
+              <a:extLst>
+                <a:ext uri="{FF2B5EF4-FFF2-40B4-BE49-F238E27FC236}">
+                  <a16:creationId xmlns:a16="http://schemas.microsoft.com/office/drawing/2014/main" id="{8CB54AB6-A582-D7DB-BD8D-EF5E033E462A}"/>
+                </a:ext>
+              </a:extLst>
+            </p:cNvPr>
+            <p:cNvSpPr txBox="1"/>
+            <p:nvPr/>
+          </p:nvSpPr>
+          <p:spPr>
+            <a:xfrm>
+              <a:off x="3728691" y="3911862"/>
+              <a:ext cx="133985" cy="224790"/>
+            </a:xfrm>
+            <a:prstGeom prst="rect">
+              <a:avLst/>
+            </a:prstGeom>
+          </p:spPr>
+          <p:txBody>
+            <a:bodyPr vert="horz" wrap="square" lIns="0" tIns="0" rIns="0" bIns="0" rtlCol="0">
+              <a:spAutoFit/>
+            </a:bodyPr>
+            <a:lstStyle/>
+            <a:p>
+              <a:pPr marL="12700">
+                <a:lnSpc>
+                  <a:spcPct val="100000"/>
+                </a:lnSpc>
+              </a:pPr>
+              <a:r>
+                <a:rPr sz="1400" b="1" spc="-5" dirty="0">
+                  <a:latin typeface="Arial"/>
+                  <a:cs typeface="Arial"/>
+                </a:rPr>
+                <a:t>b</a:t>
+              </a:r>
+              <a:endParaRPr sz="1400">
+                <a:latin typeface="Arial"/>
+                <a:cs typeface="Arial"/>
+              </a:endParaRPr>
+            </a:p>
+          </p:txBody>
+        </p:sp>
+        <p:sp>
+          <p:nvSpPr>
+            <p:cNvPr id="45" name="object 45">
+              <a:extLst>
+                <a:ext uri="{FF2B5EF4-FFF2-40B4-BE49-F238E27FC236}">
+                  <a16:creationId xmlns:a16="http://schemas.microsoft.com/office/drawing/2014/main" id="{CEC9B9AA-6217-6D1E-E128-926406D531EF}"/>
+                </a:ext>
+              </a:extLst>
+            </p:cNvPr>
+            <p:cNvSpPr txBox="1"/>
+            <p:nvPr/>
+          </p:nvSpPr>
+          <p:spPr>
+            <a:xfrm>
+              <a:off x="4786350" y="4993135"/>
+              <a:ext cx="133985" cy="224790"/>
+            </a:xfrm>
+            <a:prstGeom prst="rect">
+              <a:avLst/>
+            </a:prstGeom>
+          </p:spPr>
+          <p:txBody>
+            <a:bodyPr vert="horz" wrap="square" lIns="0" tIns="0" rIns="0" bIns="0" rtlCol="0">
+              <a:spAutoFit/>
+            </a:bodyPr>
+            <a:lstStyle/>
+            <a:p>
+              <a:pPr marL="12700">
+                <a:lnSpc>
+                  <a:spcPct val="100000"/>
+                </a:lnSpc>
+              </a:pPr>
+              <a:r>
+                <a:rPr sz="1400" b="1" spc="-5" dirty="0">
+                  <a:latin typeface="Arial"/>
+                  <a:cs typeface="Arial"/>
+                </a:rPr>
+                <a:t>h</a:t>
+              </a:r>
+              <a:endParaRPr sz="1400">
+                <a:latin typeface="Arial"/>
+                <a:cs typeface="Arial"/>
+              </a:endParaRPr>
+            </a:p>
+          </p:txBody>
+        </p:sp>
+        <p:sp>
+          <p:nvSpPr>
+            <p:cNvPr id="46" name="object 46">
+              <a:extLst>
+                <a:ext uri="{FF2B5EF4-FFF2-40B4-BE49-F238E27FC236}">
+                  <a16:creationId xmlns:a16="http://schemas.microsoft.com/office/drawing/2014/main" id="{26A67BFD-7384-DA4B-7345-42E8B1249E11}"/>
+                </a:ext>
+              </a:extLst>
+            </p:cNvPr>
+            <p:cNvSpPr txBox="1"/>
+            <p:nvPr/>
+          </p:nvSpPr>
+          <p:spPr>
+            <a:xfrm>
+              <a:off x="1388617" y="4233671"/>
+              <a:ext cx="194945" cy="194310"/>
+            </a:xfrm>
+            <a:prstGeom prst="rect">
+              <a:avLst/>
+            </a:prstGeom>
+          </p:spPr>
+          <p:txBody>
+            <a:bodyPr vert="horz" wrap="square" lIns="0" tIns="0" rIns="0" bIns="0" rtlCol="0">
+              <a:spAutoFit/>
+            </a:bodyPr>
+            <a:lstStyle/>
+            <a:p>
+              <a:pPr marL="12700">
+                <a:lnSpc>
+                  <a:spcPct val="100000"/>
+                </a:lnSpc>
+              </a:pPr>
+              <a:r>
+                <a:rPr sz="1200" b="1" spc="-10" dirty="0">
+                  <a:latin typeface="Arial"/>
+                  <a:cs typeface="Arial"/>
+                </a:rPr>
+                <a:t>25</a:t>
+              </a:r>
+              <a:endParaRPr sz="1200">
+                <a:latin typeface="Arial"/>
+                <a:cs typeface="Arial"/>
+              </a:endParaRPr>
+            </a:p>
+          </p:txBody>
+        </p:sp>
+        <p:sp>
+          <p:nvSpPr>
+            <p:cNvPr id="47" name="object 47">
+              <a:extLst>
+                <a:ext uri="{FF2B5EF4-FFF2-40B4-BE49-F238E27FC236}">
+                  <a16:creationId xmlns:a16="http://schemas.microsoft.com/office/drawing/2014/main" id="{F9273E4E-3AB4-789A-8CD8-1DDC399F3637}"/>
+                </a:ext>
+              </a:extLst>
+            </p:cNvPr>
+            <p:cNvSpPr txBox="1"/>
+            <p:nvPr/>
+          </p:nvSpPr>
+          <p:spPr>
+            <a:xfrm>
+              <a:off x="2607817" y="3700271"/>
+              <a:ext cx="194945" cy="194310"/>
+            </a:xfrm>
+            <a:prstGeom prst="rect">
+              <a:avLst/>
+            </a:prstGeom>
+          </p:spPr>
+          <p:txBody>
+            <a:bodyPr vert="horz" wrap="square" lIns="0" tIns="0" rIns="0" bIns="0" rtlCol="0">
+              <a:spAutoFit/>
+            </a:bodyPr>
+            <a:lstStyle/>
+            <a:p>
+              <a:pPr marL="12700">
+                <a:lnSpc>
+                  <a:spcPct val="100000"/>
+                </a:lnSpc>
+              </a:pPr>
+              <a:r>
+                <a:rPr sz="1200" b="1" spc="-10" dirty="0">
+                  <a:latin typeface="Arial"/>
+                  <a:cs typeface="Arial"/>
+                </a:rPr>
+                <a:t>15</a:t>
+              </a:r>
+              <a:endParaRPr sz="1200">
+                <a:latin typeface="Arial"/>
+                <a:cs typeface="Arial"/>
+              </a:endParaRPr>
+            </a:p>
+          </p:txBody>
+        </p:sp>
+        <p:sp>
+          <p:nvSpPr>
+            <p:cNvPr id="48" name="object 48">
+              <a:extLst>
+                <a:ext uri="{FF2B5EF4-FFF2-40B4-BE49-F238E27FC236}">
+                  <a16:creationId xmlns:a16="http://schemas.microsoft.com/office/drawing/2014/main" id="{EBDA2B22-AD92-8EDC-6391-0D48FE8E953E}"/>
+                </a:ext>
+              </a:extLst>
+            </p:cNvPr>
+            <p:cNvSpPr txBox="1"/>
+            <p:nvPr/>
+          </p:nvSpPr>
+          <p:spPr>
+            <a:xfrm>
+              <a:off x="1998217" y="5757671"/>
+              <a:ext cx="194945" cy="194310"/>
+            </a:xfrm>
+            <a:prstGeom prst="rect">
+              <a:avLst/>
+            </a:prstGeom>
+          </p:spPr>
+          <p:txBody>
+            <a:bodyPr vert="horz" wrap="square" lIns="0" tIns="0" rIns="0" bIns="0" rtlCol="0">
+              <a:spAutoFit/>
+            </a:bodyPr>
+            <a:lstStyle/>
+            <a:p>
+              <a:pPr marL="12700">
+                <a:lnSpc>
+                  <a:spcPct val="100000"/>
+                </a:lnSpc>
+              </a:pPr>
+              <a:r>
+                <a:rPr sz="1200" b="1" spc="-10" dirty="0">
+                  <a:latin typeface="Arial"/>
+                  <a:cs typeface="Arial"/>
+                </a:rPr>
+                <a:t>10</a:t>
+              </a:r>
+              <a:endParaRPr sz="1200">
+                <a:latin typeface="Arial"/>
+                <a:cs typeface="Arial"/>
+              </a:endParaRPr>
+            </a:p>
+          </p:txBody>
+        </p:sp>
+        <p:sp>
+          <p:nvSpPr>
+            <p:cNvPr id="49" name="object 49">
+              <a:extLst>
+                <a:ext uri="{FF2B5EF4-FFF2-40B4-BE49-F238E27FC236}">
+                  <a16:creationId xmlns:a16="http://schemas.microsoft.com/office/drawing/2014/main" id="{5BC82091-CCD3-5645-85BC-EE4B8AF77292}"/>
+                </a:ext>
+              </a:extLst>
+            </p:cNvPr>
+            <p:cNvSpPr txBox="1"/>
+            <p:nvPr/>
+          </p:nvSpPr>
+          <p:spPr>
+            <a:xfrm>
+              <a:off x="3335528" y="6062471"/>
+              <a:ext cx="110489" cy="194310"/>
+            </a:xfrm>
+            <a:prstGeom prst="rect">
+              <a:avLst/>
+            </a:prstGeom>
+          </p:spPr>
+          <p:txBody>
+            <a:bodyPr vert="horz" wrap="square" lIns="0" tIns="0" rIns="0" bIns="0" rtlCol="0">
+              <a:spAutoFit/>
+            </a:bodyPr>
+            <a:lstStyle/>
+            <a:p>
+              <a:pPr marL="12700">
+                <a:lnSpc>
+                  <a:spcPct val="100000"/>
+                </a:lnSpc>
+              </a:pPr>
+              <a:r>
+                <a:rPr sz="1200" b="1" spc="-5" dirty="0">
+                  <a:latin typeface="Arial"/>
+                  <a:cs typeface="Arial"/>
+                </a:rPr>
+                <a:t>5</a:t>
+              </a:r>
+              <a:endParaRPr sz="1200">
+                <a:latin typeface="Arial"/>
+                <a:cs typeface="Arial"/>
+              </a:endParaRPr>
+            </a:p>
+          </p:txBody>
+        </p:sp>
+        <p:sp>
+          <p:nvSpPr>
+            <p:cNvPr id="50" name="object 50">
+              <a:extLst>
+                <a:ext uri="{FF2B5EF4-FFF2-40B4-BE49-F238E27FC236}">
+                  <a16:creationId xmlns:a16="http://schemas.microsoft.com/office/drawing/2014/main" id="{5567D43E-A920-5FCC-D20E-B266E6349424}"/>
+                </a:ext>
+              </a:extLst>
+            </p:cNvPr>
+            <p:cNvSpPr txBox="1"/>
+            <p:nvPr/>
+          </p:nvSpPr>
+          <p:spPr>
+            <a:xfrm>
+              <a:off x="3217417" y="4843271"/>
+              <a:ext cx="194945" cy="194310"/>
+            </a:xfrm>
+            <a:prstGeom prst="rect">
+              <a:avLst/>
+            </a:prstGeom>
+          </p:spPr>
+          <p:txBody>
+            <a:bodyPr vert="horz" wrap="square" lIns="0" tIns="0" rIns="0" bIns="0" rtlCol="0">
+              <a:spAutoFit/>
+            </a:bodyPr>
+            <a:lstStyle/>
+            <a:p>
+              <a:pPr marL="12700">
+                <a:lnSpc>
+                  <a:spcPct val="100000"/>
+                </a:lnSpc>
+              </a:pPr>
+              <a:r>
+                <a:rPr sz="1200" b="1" spc="-10" dirty="0">
+                  <a:latin typeface="Arial"/>
+                  <a:cs typeface="Arial"/>
+                </a:rPr>
+                <a:t>10</a:t>
+              </a:r>
+              <a:endParaRPr sz="1200">
+                <a:latin typeface="Arial"/>
+                <a:cs typeface="Arial"/>
+              </a:endParaRPr>
+            </a:p>
+          </p:txBody>
+        </p:sp>
+        <p:sp>
+          <p:nvSpPr>
+            <p:cNvPr id="51" name="object 51">
+              <a:extLst>
+                <a:ext uri="{FF2B5EF4-FFF2-40B4-BE49-F238E27FC236}">
+                  <a16:creationId xmlns:a16="http://schemas.microsoft.com/office/drawing/2014/main" id="{261ADCAB-C509-BFBB-4841-E1364BB5F212}"/>
+                </a:ext>
+              </a:extLst>
+            </p:cNvPr>
+            <p:cNvSpPr txBox="1"/>
+            <p:nvPr/>
+          </p:nvSpPr>
+          <p:spPr>
+            <a:xfrm>
+              <a:off x="1922017" y="5300471"/>
+              <a:ext cx="194945" cy="194310"/>
+            </a:xfrm>
+            <a:prstGeom prst="rect">
+              <a:avLst/>
+            </a:prstGeom>
+          </p:spPr>
+          <p:txBody>
+            <a:bodyPr vert="horz" wrap="square" lIns="0" tIns="0" rIns="0" bIns="0" rtlCol="0">
+              <a:spAutoFit/>
+            </a:bodyPr>
+            <a:lstStyle/>
+            <a:p>
+              <a:pPr marL="12700">
+                <a:lnSpc>
+                  <a:spcPct val="100000"/>
+                </a:lnSpc>
+              </a:pPr>
+              <a:r>
+                <a:rPr sz="1200" b="1" spc="-10" dirty="0">
+                  <a:latin typeface="Arial"/>
+                  <a:cs typeface="Arial"/>
+                </a:rPr>
+                <a:t>20</a:t>
+              </a:r>
+              <a:endParaRPr sz="1200">
+                <a:latin typeface="Arial"/>
+                <a:cs typeface="Arial"/>
+              </a:endParaRPr>
+            </a:p>
+          </p:txBody>
+        </p:sp>
+        <p:sp>
+          <p:nvSpPr>
+            <p:cNvPr id="52" name="object 52">
+              <a:extLst>
+                <a:ext uri="{FF2B5EF4-FFF2-40B4-BE49-F238E27FC236}">
+                  <a16:creationId xmlns:a16="http://schemas.microsoft.com/office/drawing/2014/main" id="{D4C50699-69BB-F7B1-4882-8DCE8C150772}"/>
+                </a:ext>
+              </a:extLst>
+            </p:cNvPr>
+            <p:cNvSpPr txBox="1"/>
+            <p:nvPr/>
+          </p:nvSpPr>
+          <p:spPr>
+            <a:xfrm>
+              <a:off x="4741417" y="5605271"/>
+              <a:ext cx="194945" cy="194310"/>
+            </a:xfrm>
+            <a:prstGeom prst="rect">
+              <a:avLst/>
+            </a:prstGeom>
+          </p:spPr>
+          <p:txBody>
+            <a:bodyPr vert="horz" wrap="square" lIns="0" tIns="0" rIns="0" bIns="0" rtlCol="0">
+              <a:spAutoFit/>
+            </a:bodyPr>
+            <a:lstStyle/>
+            <a:p>
+              <a:pPr marL="12700">
+                <a:lnSpc>
+                  <a:spcPct val="100000"/>
+                </a:lnSpc>
+              </a:pPr>
+              <a:r>
+                <a:rPr sz="1200" b="1" spc="-10" dirty="0">
+                  <a:latin typeface="Arial"/>
+                  <a:cs typeface="Arial"/>
+                </a:rPr>
+                <a:t>15</a:t>
+              </a:r>
+              <a:endParaRPr sz="1200">
+                <a:latin typeface="Arial"/>
+                <a:cs typeface="Arial"/>
+              </a:endParaRPr>
+            </a:p>
+          </p:txBody>
+        </p:sp>
+        <p:sp>
+          <p:nvSpPr>
+            <p:cNvPr id="53" name="object 53">
+              <a:extLst>
+                <a:ext uri="{FF2B5EF4-FFF2-40B4-BE49-F238E27FC236}">
+                  <a16:creationId xmlns:a16="http://schemas.microsoft.com/office/drawing/2014/main" id="{7ED6DFFD-0294-31FE-B0C0-E58FB44E9A8F}"/>
+                </a:ext>
+              </a:extLst>
+            </p:cNvPr>
+            <p:cNvSpPr txBox="1"/>
+            <p:nvPr/>
+          </p:nvSpPr>
+          <p:spPr>
+            <a:xfrm>
+              <a:off x="4326128" y="4386071"/>
+              <a:ext cx="110489" cy="194310"/>
+            </a:xfrm>
+            <a:prstGeom prst="rect">
+              <a:avLst/>
+            </a:prstGeom>
+          </p:spPr>
+          <p:txBody>
+            <a:bodyPr vert="horz" wrap="square" lIns="0" tIns="0" rIns="0" bIns="0" rtlCol="0">
+              <a:spAutoFit/>
+            </a:bodyPr>
+            <a:lstStyle/>
+            <a:p>
+              <a:pPr marL="12700">
+                <a:lnSpc>
+                  <a:spcPct val="100000"/>
+                </a:lnSpc>
+              </a:pPr>
+              <a:r>
+                <a:rPr sz="1200" b="1" spc="-5" dirty="0">
+                  <a:latin typeface="Arial"/>
+                  <a:cs typeface="Arial"/>
+                </a:rPr>
+                <a:t>5</a:t>
+              </a:r>
+              <a:endParaRPr sz="1200">
+                <a:latin typeface="Arial"/>
+                <a:cs typeface="Arial"/>
+              </a:endParaRPr>
+            </a:p>
+          </p:txBody>
+        </p:sp>
+        <p:sp>
+          <p:nvSpPr>
+            <p:cNvPr id="54" name="object 54">
+              <a:extLst>
+                <a:ext uri="{FF2B5EF4-FFF2-40B4-BE49-F238E27FC236}">
+                  <a16:creationId xmlns:a16="http://schemas.microsoft.com/office/drawing/2014/main" id="{B7EAF7EB-34DB-C1B6-BF22-7A6C5D2FAD48}"/>
+                </a:ext>
+              </a:extLst>
+            </p:cNvPr>
+            <p:cNvSpPr txBox="1"/>
+            <p:nvPr/>
+          </p:nvSpPr>
+          <p:spPr>
+            <a:xfrm>
+              <a:off x="3903217" y="5071871"/>
+              <a:ext cx="194945" cy="194310"/>
+            </a:xfrm>
+            <a:prstGeom prst="rect">
+              <a:avLst/>
+            </a:prstGeom>
+          </p:spPr>
+          <p:txBody>
+            <a:bodyPr vert="horz" wrap="square" lIns="0" tIns="0" rIns="0" bIns="0" rtlCol="0">
+              <a:spAutoFit/>
+            </a:bodyPr>
+            <a:lstStyle/>
+            <a:p>
+              <a:pPr marL="12700">
+                <a:lnSpc>
+                  <a:spcPct val="100000"/>
+                </a:lnSpc>
+              </a:pPr>
+              <a:r>
+                <a:rPr sz="1200" b="1" spc="-10" dirty="0">
+                  <a:latin typeface="Arial"/>
+                  <a:cs typeface="Arial"/>
+                </a:rPr>
+                <a:t>25</a:t>
+              </a:r>
+              <a:endParaRPr sz="1200">
+                <a:latin typeface="Arial"/>
+                <a:cs typeface="Arial"/>
+              </a:endParaRPr>
+            </a:p>
+          </p:txBody>
+        </p:sp>
+        <p:sp>
+          <p:nvSpPr>
+            <p:cNvPr id="55" name="object 55">
+              <a:extLst>
+                <a:ext uri="{FF2B5EF4-FFF2-40B4-BE49-F238E27FC236}">
+                  <a16:creationId xmlns:a16="http://schemas.microsoft.com/office/drawing/2014/main" id="{05D2B95A-E0B5-4B71-E1CE-39150CA8B4E3}"/>
+                </a:ext>
+              </a:extLst>
+            </p:cNvPr>
+            <p:cNvSpPr txBox="1"/>
+            <p:nvPr/>
+          </p:nvSpPr>
+          <p:spPr>
+            <a:xfrm>
+              <a:off x="1922017" y="4614671"/>
+              <a:ext cx="194945" cy="194310"/>
+            </a:xfrm>
+            <a:prstGeom prst="rect">
+              <a:avLst/>
+            </a:prstGeom>
+          </p:spPr>
+          <p:txBody>
+            <a:bodyPr vert="horz" wrap="square" lIns="0" tIns="0" rIns="0" bIns="0" rtlCol="0">
+              <a:spAutoFit/>
+            </a:bodyPr>
+            <a:lstStyle/>
+            <a:p>
+              <a:pPr marL="12700">
+                <a:lnSpc>
+                  <a:spcPct val="100000"/>
+                </a:lnSpc>
+              </a:pPr>
+              <a:r>
+                <a:rPr sz="1200" b="1" spc="-10" dirty="0">
+                  <a:latin typeface="Arial"/>
+                  <a:cs typeface="Arial"/>
+                </a:rPr>
+                <a:t>10</a:t>
+              </a:r>
+              <a:endParaRPr sz="1200">
+                <a:latin typeface="Arial"/>
+                <a:cs typeface="Arial"/>
+              </a:endParaRPr>
+            </a:p>
+          </p:txBody>
+        </p:sp>
+      </p:grpSp>
+      <p:sp>
+        <p:nvSpPr>
+          <p:cNvPr id="56" name="object 56">
+            <a:extLst>
+              <a:ext uri="{FF2B5EF4-FFF2-40B4-BE49-F238E27FC236}">
+                <a16:creationId xmlns:a16="http://schemas.microsoft.com/office/drawing/2014/main" id="{8E666950-F6C2-A16D-0B4F-BD3A850BA305}"/>
+              </a:ext>
+            </a:extLst>
+          </p:cNvPr>
+          <p:cNvSpPr txBox="1"/>
+          <p:nvPr/>
+        </p:nvSpPr>
+        <p:spPr>
+          <a:xfrm>
+            <a:off x="1276213" y="3307254"/>
+            <a:ext cx="3552825" cy="1846659"/>
+          </a:xfrm>
+          <a:prstGeom prst="rect">
+            <a:avLst/>
+          </a:prstGeom>
+        </p:spPr>
+        <p:txBody>
+          <a:bodyPr vert="horz" wrap="square" lIns="0" tIns="0" rIns="0" bIns="0" rtlCol="0">
+            <a:spAutoFit/>
+          </a:bodyPr>
+          <a:lstStyle/>
+          <a:p>
+            <a:pPr marL="12700" marR="5080">
+              <a:lnSpc>
+                <a:spcPct val="100000"/>
+              </a:lnSpc>
+            </a:pPr>
+            <a:r>
+              <a:rPr sz="2000" spc="-5" dirty="0">
+                <a:latin typeface="Times New Roman"/>
+                <a:cs typeface="Times New Roman"/>
+              </a:rPr>
+              <a:t>The corresponding tree is shown  </a:t>
+            </a:r>
+            <a:r>
+              <a:rPr lang="en-US" sz="2000" spc="-5" dirty="0">
+                <a:latin typeface="Times New Roman"/>
+                <a:cs typeface="Times New Roman"/>
+              </a:rPr>
+              <a:t>and isn’t the minimum spanning tree for this graph. </a:t>
+            </a:r>
+            <a:br>
+              <a:rPr lang="en-US" sz="2000" spc="-5" dirty="0">
+                <a:latin typeface="Times New Roman"/>
+                <a:cs typeface="Times New Roman"/>
+              </a:rPr>
+            </a:br>
+            <a:r>
+              <a:rPr lang="en-US" sz="2000" spc="-5" dirty="0">
+                <a:latin typeface="Times New Roman"/>
+                <a:cs typeface="Times New Roman"/>
+              </a:rPr>
+              <a:t>I.e., it doesn’t have the least sum of weights possible</a:t>
+            </a:r>
+            <a:r>
+              <a:rPr sz="2000" spc="-5" dirty="0">
+                <a:latin typeface="Times New Roman"/>
+                <a:cs typeface="Times New Roman"/>
+              </a:rPr>
+              <a:t>. </a:t>
+            </a:r>
+            <a:r>
+              <a:rPr lang="en-US" sz="2000" spc="-5" dirty="0">
+                <a:latin typeface="Times New Roman"/>
+                <a:cs typeface="Times New Roman"/>
+              </a:rPr>
+              <a:t>For that we need to use Prim’s algorithm.</a:t>
+            </a:r>
+            <a:endParaRPr sz="2000" dirty="0">
+              <a:latin typeface="Times New Roman"/>
+              <a:cs typeface="Times New Roman"/>
+            </a:endParaRPr>
+          </a:p>
+        </p:txBody>
+      </p:sp>
+    </p:spTree>
+  </p:cSld>
+  <p:clrMapOvr>
+    <a:masterClrMapping/>
+  </p:clrMapOvr>
+</p:sld>
+</file>
+
+<file path=ppt/slides/slide2.xml><?xml version="1.0" encoding="utf-8"?>
+<p:sld xmlns:a="http://schemas.openxmlformats.org/drawingml/2006/main" xmlns:r="http://schemas.openxmlformats.org/officeDocument/2006/relationships" xmlns:p="http://schemas.openxmlformats.org/presentationml/2006/main">
+  <p:cSld>
+    <p:spTree>
+      <p:nvGrpSpPr>
+        <p:cNvPr id="1" name=""/>
+        <p:cNvGrpSpPr/>
+        <p:nvPr/>
+      </p:nvGrpSpPr>
+      <p:grpSpPr>
+        <a:xfrm>
+          <a:off x="0" y="0"/>
+          <a:ext cx="0" cy="0"/>
+          <a:chOff x="0" y="0"/>
+          <a:chExt cx="0" cy="0"/>
+        </a:xfrm>
+      </p:grpSpPr>
+      <p:sp>
+        <p:nvSpPr>
           <p:cNvPr id="2" name="object 2"/>
           <p:cNvSpPr txBox="1"/>
           <p:nvPr/>
@@ -5777,7 +10036,7 @@
 </p:sld>
 </file>
 
-<file path=ppt/slides/slide2.xml><?xml version="1.0" encoding="utf-8"?>
+<file path=ppt/slides/slide3.xml><?xml version="1.0" encoding="utf-8"?>
 <p:sld xmlns:a="http://schemas.openxmlformats.org/drawingml/2006/main" xmlns:r="http://schemas.openxmlformats.org/officeDocument/2006/relationships" xmlns:p="http://schemas.openxmlformats.org/presentationml/2006/main">
   <p:cSld>
     <p:spTree>
@@ -9507,7 +13766,7 @@
 </p:sld>
 </file>
 
-<file path=ppt/slides/slide3.xml><?xml version="1.0" encoding="utf-8"?>
+<file path=ppt/slides/slide4.xml><?xml version="1.0" encoding="utf-8"?>
 <p:sld xmlns:a="http://schemas.openxmlformats.org/drawingml/2006/main" xmlns:r="http://schemas.openxmlformats.org/officeDocument/2006/relationships" xmlns:p="http://schemas.openxmlformats.org/presentationml/2006/main">
   <p:cSld>
     <p:spTree>
@@ -13516,7 +17775,7 @@
 </p:sld>
 </file>
 
-<file path=ppt/slides/slide4.xml><?xml version="1.0" encoding="utf-8"?>
+<file path=ppt/slides/slide5.xml><?xml version="1.0" encoding="utf-8"?>
 <p:sld xmlns:a="http://schemas.openxmlformats.org/drawingml/2006/main" xmlns:r="http://schemas.openxmlformats.org/officeDocument/2006/relationships" xmlns:p="http://schemas.openxmlformats.org/presentationml/2006/main">
   <p:cSld>
     <p:bg>
@@ -20553,7 +24812,7 @@
 </p:sld>
 </file>
 
-<file path=ppt/slides/slide5.xml><?xml version="1.0" encoding="utf-8"?>
+<file path=ppt/slides/slide6.xml><?xml version="1.0" encoding="utf-8"?>
 <p:sld xmlns:a="http://schemas.openxmlformats.org/drawingml/2006/main" xmlns:r="http://schemas.openxmlformats.org/officeDocument/2006/relationships" xmlns:p="http://schemas.openxmlformats.org/presentationml/2006/main">
   <p:cSld>
     <p:spTree>
@@ -27614,7 +31873,7 @@
 </p:sld>
 </file>
 
-<file path=ppt/slides/slide6.xml><?xml version="1.0" encoding="utf-8"?>
+<file path=ppt/slides/slide7.xml><?xml version="1.0" encoding="utf-8"?>
 <p:sld xmlns:a="http://schemas.openxmlformats.org/drawingml/2006/main" xmlns:r="http://schemas.openxmlformats.org/officeDocument/2006/relationships" xmlns:p="http://schemas.openxmlformats.org/presentationml/2006/main">
   <p:cSld>
     <p:spTree>
@@ -36462,7 +40721,7 @@
 </p:sld>
 </file>
 
-<file path=ppt/slides/slide7.xml><?xml version="1.0" encoding="utf-8"?>
+<file path=ppt/slides/slide8.xml><?xml version="1.0" encoding="utf-8"?>
 <p:sld xmlns:a="http://schemas.openxmlformats.org/drawingml/2006/main" xmlns:r="http://schemas.openxmlformats.org/officeDocument/2006/relationships" xmlns:p="http://schemas.openxmlformats.org/presentationml/2006/main">
   <p:cSld>
     <p:spTree>
@@ -43949,7 +48208,7 @@
 </p:sld>
 </file>
 
-<file path=ppt/slides/slide8.xml><?xml version="1.0" encoding="utf-8"?>
+<file path=ppt/slides/slide9.xml><?xml version="1.0" encoding="utf-8"?>
 <p:sld xmlns:a="http://schemas.openxmlformats.org/drawingml/2006/main" xmlns:r="http://schemas.openxmlformats.org/officeDocument/2006/relationships" xmlns:p="http://schemas.openxmlformats.org/presentationml/2006/main">
   <p:cSld>
     <p:spTree>
@@ -43968,71 +48227,44 @@
       </p:grpSpPr>
       <p:sp>
         <p:nvSpPr>
-          <p:cNvPr id="2" name="object 2"/>
-          <p:cNvSpPr txBox="1"/>
-          <p:nvPr/>
+          <p:cNvPr id="2" name="Title 1">
+            <a:extLst>
+              <a:ext uri="{FF2B5EF4-FFF2-40B4-BE49-F238E27FC236}">
+                <a16:creationId xmlns:a16="http://schemas.microsoft.com/office/drawing/2014/main" id="{4F589C07-26DA-34AA-C790-E73D25C08269}"/>
+              </a:ext>
+            </a:extLst>
+          </p:cNvPr>
+          <p:cNvSpPr>
+            <a:spLocks noGrp="1"/>
+          </p:cNvSpPr>
+          <p:nvPr>
+            <p:ph type="title"/>
+          </p:nvPr>
         </p:nvSpPr>
         <p:spPr>
           <a:xfrm>
-            <a:off x="7089902" y="663447"/>
-            <a:ext cx="2061210" cy="310515"/>
+            <a:off x="839977" y="608076"/>
+            <a:ext cx="8378444" cy="369332"/>
           </a:xfrm>
-          <a:prstGeom prst="rect">
-            <a:avLst/>
-          </a:prstGeom>
         </p:spPr>
         <p:txBody>
-          <a:bodyPr vert="horz" wrap="square" lIns="0" tIns="0" rIns="0" bIns="0" rtlCol="0">
-            <a:spAutoFit/>
-          </a:bodyPr>
+          <a:bodyPr/>
           <a:lstStyle/>
           <a:p>
-            <a:pPr marL="12700">
-              <a:lnSpc>
-                <a:spcPct val="100000"/>
-              </a:lnSpc>
-            </a:pPr>
+            <a:pPr algn="ctr"/>
             <a:r>
-              <a:rPr sz="1800" spc="-5" dirty="0">
-                <a:latin typeface="Arial"/>
-                <a:cs typeface="Arial"/>
-              </a:rPr>
-              <a:t>Weighted </a:t>
+              <a:rPr lang="en-US" b="1" dirty="0"/>
+              <a:t>A Variant</a:t>
             </a:r>
-            <a:r>
-              <a:rPr sz="1800" dirty="0">
-                <a:latin typeface="Arial"/>
-                <a:cs typeface="Arial"/>
-              </a:rPr>
-              <a:t>Graphs</a:t>
-            </a:r>
-            <a:r>
-              <a:rPr sz="1800" spc="350" dirty="0">
-                <a:latin typeface="Arial"/>
-                <a:cs typeface="Arial"/>
-              </a:rPr>
-              <a:t> </a:t>
-            </a:r>
-            <a:r>
-              <a:rPr sz="3000" spc="-7" baseline="2777" dirty="0">
-                <a:latin typeface="Arial"/>
-                <a:cs typeface="Arial"/>
-              </a:rPr>
-              <a:t>7</a:t>
-            </a:r>
-            <a:endParaRPr sz="3000" baseline="2777">
-              <a:latin typeface="Arial"/>
-              <a:cs typeface="Arial"/>
-            </a:endParaRPr>
           </a:p>
         </p:txBody>
       </p:sp>
       <p:sp>
         <p:nvSpPr>
-          <p:cNvPr id="5" name="object 5">
+          <p:cNvPr id="3" name="TextBox 2">
             <a:extLst>
-              <a:ext uri="{C183D7F6-B498-43B3-948B-1728B52AA6E4}">
-                <adec:decorative xmlns:adec="http://schemas.microsoft.com/office/drawing/2017/decorative" val="1"/>
+              <a:ext uri="{FF2B5EF4-FFF2-40B4-BE49-F238E27FC236}">
+                <a16:creationId xmlns:a16="http://schemas.microsoft.com/office/drawing/2014/main" id="{63449D9C-C23B-5A2E-AE80-FDBAE179E907}"/>
               </a:ext>
             </a:extLst>
           </p:cNvPr>
@@ -44041,3947 +48273,44 @@
         </p:nvSpPr>
         <p:spPr>
           <a:xfrm>
-            <a:off x="3583940" y="7023337"/>
-            <a:ext cx="2872740" cy="229235"/>
+            <a:off x="1447800" y="1676400"/>
+            <a:ext cx="7770621" cy="4247317"/>
           </a:xfrm>
           <a:prstGeom prst="rect">
             <a:avLst/>
           </a:prstGeom>
+          <a:noFill/>
         </p:spPr>
         <p:txBody>
-          <a:bodyPr vert="horz" wrap="square" lIns="0" tIns="0" rIns="0" bIns="0" rtlCol="0">
+          <a:bodyPr wrap="square" rtlCol="0">
             <a:spAutoFit/>
           </a:bodyPr>
           <a:lstStyle/>
           <a:p>
-            <a:pPr marL="12700">
-              <a:lnSpc>
-                <a:spcPts val="1720"/>
-              </a:lnSpc>
-            </a:pPr>
             <a:r>
-              <a:rPr sz="1600" b="1" spc="-5" dirty="0">
-                <a:solidFill>
-                  <a:srgbClr val="9A0033"/>
-                </a:solidFill>
-                <a:latin typeface="Arial"/>
-                <a:cs typeface="Arial"/>
+              <a:rPr lang="en-US" sz="5400" dirty="0">
+                <a:effectLst/>
+                <a:latin typeface="Aptos" panose="020B0004020202020204" pitchFamily="34" charset="0"/>
+                <a:ea typeface="Times New Roman" panose="02020603050405020304" pitchFamily="18" charset="0"/>
+                <a:cs typeface="Aptos" panose="020B0004020202020204" pitchFamily="34" charset="0"/>
               </a:rPr>
-              <a:t>Data Structures </a:t>
+              <a:t> If the only concern is the path to a target node, the algorithm terminates once the current node is the target node. </a:t>
             </a:r>
-            <a:r>
-              <a:rPr sz="1600" b="1" dirty="0">
-                <a:solidFill>
-                  <a:srgbClr val="9A0033"/>
-                </a:solidFill>
-                <a:latin typeface="Arial"/>
-                <a:cs typeface="Arial"/>
-              </a:rPr>
-              <a:t>&amp;</a:t>
-            </a:r>
-            <a:r>
-              <a:rPr sz="1600" b="1" spc="-70" dirty="0">
-                <a:solidFill>
-                  <a:srgbClr val="9A0033"/>
-                </a:solidFill>
-                <a:latin typeface="Arial"/>
-                <a:cs typeface="Arial"/>
-              </a:rPr>
-              <a:t> </a:t>
-            </a:r>
-            <a:r>
-              <a:rPr sz="1600" b="1" spc="-5" dirty="0">
-                <a:solidFill>
-                  <a:srgbClr val="9A0033"/>
-                </a:solidFill>
-                <a:latin typeface="Arial"/>
-                <a:cs typeface="Arial"/>
-              </a:rPr>
-              <a:t>Algorithms</a:t>
-            </a:r>
-            <a:endParaRPr sz="1600">
-              <a:latin typeface="Arial"/>
-              <a:cs typeface="Arial"/>
-            </a:endParaRPr>
-          </a:p>
-        </p:txBody>
-      </p:sp>
-      <p:sp>
-        <p:nvSpPr>
-          <p:cNvPr id="6" name="object 6">
-            <a:extLst>
-              <a:ext uri="{C183D7F6-B498-43B3-948B-1728B52AA6E4}">
-                <adec:decorative xmlns:adec="http://schemas.microsoft.com/office/drawing/2017/decorative" val="1"/>
-              </a:ext>
-            </a:extLst>
-          </p:cNvPr>
-          <p:cNvSpPr txBox="1">
-            <a:spLocks noGrp="1"/>
-          </p:cNvSpPr>
-          <p:nvPr>
-            <p:ph type="dt" sz="half" idx="6"/>
-          </p:nvPr>
-        </p:nvSpPr>
-        <p:spPr>
-          <a:prstGeom prst="rect">
-            <a:avLst/>
-          </a:prstGeom>
-        </p:spPr>
-        <p:txBody>
-          <a:bodyPr vert="horz" wrap="square" lIns="0" tIns="0" rIns="0" bIns="0" rtlCol="0">
-            <a:spAutoFit/>
-          </a:bodyPr>
-          <a:lstStyle/>
-          <a:p>
-            <a:pPr marL="12700">
-              <a:lnSpc>
-                <a:spcPts val="1515"/>
-              </a:lnSpc>
-            </a:pPr>
-            <a:r>
-              <a:rPr spc="-5" dirty="0"/>
-              <a:t>CS@VT</a:t>
-            </a:r>
-          </a:p>
-        </p:txBody>
-      </p:sp>
-      <p:sp>
-        <p:nvSpPr>
-          <p:cNvPr id="7" name="object 7">
-            <a:extLst>
-              <a:ext uri="{C183D7F6-B498-43B3-948B-1728B52AA6E4}">
-                <adec:decorative xmlns:adec="http://schemas.microsoft.com/office/drawing/2017/decorative" val="1"/>
-              </a:ext>
-            </a:extLst>
-          </p:cNvPr>
-          <p:cNvSpPr txBox="1">
-            <a:spLocks noGrp="1"/>
-          </p:cNvSpPr>
-          <p:nvPr>
-            <p:ph type="ftr" sz="quarter" idx="5"/>
-          </p:nvPr>
-        </p:nvSpPr>
-        <p:spPr>
-          <a:prstGeom prst="rect">
-            <a:avLst/>
-          </a:prstGeom>
-        </p:spPr>
-        <p:txBody>
-          <a:bodyPr vert="horz" wrap="square" lIns="0" tIns="0" rIns="0" bIns="0" rtlCol="0">
-            <a:spAutoFit/>
-          </a:bodyPr>
-          <a:lstStyle/>
-          <a:p>
-            <a:pPr marL="12700">
-              <a:lnSpc>
-                <a:spcPts val="1310"/>
-              </a:lnSpc>
-            </a:pPr>
-            <a:r>
-              <a:rPr spc="-5" dirty="0"/>
-              <a:t>©2000-2009</a:t>
-            </a:r>
-            <a:r>
-              <a:rPr spc="-75" dirty="0"/>
-              <a:t> </a:t>
-            </a:r>
-            <a:r>
-              <a:rPr spc="-5" dirty="0"/>
-              <a:t>McQuain</a:t>
-            </a:r>
-          </a:p>
-        </p:txBody>
-      </p:sp>
-      <p:sp>
-        <p:nvSpPr>
-          <p:cNvPr id="3" name="object 3"/>
-          <p:cNvSpPr txBox="1">
-            <a:spLocks noGrp="1"/>
-          </p:cNvSpPr>
-          <p:nvPr>
-            <p:ph type="title"/>
-          </p:nvPr>
-        </p:nvSpPr>
-        <p:spPr>
-          <a:prstGeom prst="rect">
-            <a:avLst/>
-          </a:prstGeom>
-        </p:spPr>
-        <p:txBody>
-          <a:bodyPr vert="horz" wrap="square" lIns="0" tIns="0" rIns="0" bIns="0" rtlCol="0">
-            <a:spAutoFit/>
-          </a:bodyPr>
-          <a:lstStyle/>
-          <a:p>
-            <a:pPr marL="12700">
-              <a:lnSpc>
-                <a:spcPct val="100000"/>
-              </a:lnSpc>
-            </a:pPr>
-            <a:r>
-              <a:rPr spc="-5" dirty="0"/>
-              <a:t>Limitations</a:t>
-            </a:r>
-          </a:p>
-        </p:txBody>
-      </p:sp>
-      <p:sp>
-        <p:nvSpPr>
-          <p:cNvPr id="4" name="object 4"/>
-          <p:cNvSpPr txBox="1"/>
-          <p:nvPr/>
-        </p:nvSpPr>
-        <p:spPr>
-          <a:xfrm>
-            <a:off x="993902" y="1179321"/>
-            <a:ext cx="8147684" cy="1536065"/>
-          </a:xfrm>
-          <a:prstGeom prst="rect">
-            <a:avLst/>
-          </a:prstGeom>
-        </p:spPr>
-        <p:txBody>
-          <a:bodyPr vert="horz" wrap="square" lIns="0" tIns="0" rIns="0" bIns="0" rtlCol="0">
-            <a:spAutoFit/>
-          </a:bodyPr>
-          <a:lstStyle/>
-          <a:p>
-            <a:pPr marL="12700">
-              <a:lnSpc>
-                <a:spcPct val="100000"/>
-              </a:lnSpc>
-            </a:pPr>
-            <a:r>
-              <a:rPr sz="2000" spc="-10" dirty="0">
-                <a:latin typeface="Times New Roman"/>
-                <a:cs typeface="Times New Roman"/>
-              </a:rPr>
-              <a:t>Dijkstra's SSAD Algorithm </a:t>
-            </a:r>
-            <a:r>
-              <a:rPr sz="2000" spc="-5" dirty="0">
-                <a:latin typeface="Times New Roman"/>
-                <a:cs typeface="Times New Roman"/>
-              </a:rPr>
-              <a:t>only </a:t>
-            </a:r>
-            <a:r>
-              <a:rPr sz="2000" spc="-10" dirty="0">
-                <a:latin typeface="Times New Roman"/>
-                <a:cs typeface="Times New Roman"/>
-              </a:rPr>
-              <a:t>works </a:t>
-            </a:r>
-            <a:r>
-              <a:rPr sz="2000" spc="-5" dirty="0">
-                <a:latin typeface="Times New Roman"/>
-                <a:cs typeface="Times New Roman"/>
-              </a:rPr>
-              <a:t>for graphs with non-negative</a:t>
-            </a:r>
-            <a:r>
-              <a:rPr sz="2000" spc="180" dirty="0">
-                <a:latin typeface="Times New Roman"/>
-                <a:cs typeface="Times New Roman"/>
-              </a:rPr>
-              <a:t> </a:t>
-            </a:r>
-            <a:r>
-              <a:rPr sz="2000" spc="-5" dirty="0">
-                <a:latin typeface="Times New Roman"/>
-                <a:cs typeface="Times New Roman"/>
-              </a:rPr>
-              <a:t>weights.</a:t>
-            </a:r>
-            <a:endParaRPr sz="2000" dirty="0">
-              <a:latin typeface="Times New Roman"/>
-              <a:cs typeface="Times New Roman"/>
-            </a:endParaRPr>
-          </a:p>
-          <a:p>
-            <a:pPr>
-              <a:lnSpc>
-                <a:spcPct val="100000"/>
-              </a:lnSpc>
-            </a:pPr>
-            <a:endParaRPr sz="2000" dirty="0">
-              <a:latin typeface="Times New Roman"/>
-              <a:cs typeface="Times New Roman"/>
-            </a:endParaRPr>
-          </a:p>
-          <a:p>
-            <a:pPr>
-              <a:lnSpc>
-                <a:spcPct val="100000"/>
-              </a:lnSpc>
-              <a:spcBef>
-                <a:spcPts val="25"/>
-              </a:spcBef>
-            </a:pPr>
-            <a:endParaRPr sz="2150" dirty="0">
-              <a:latin typeface="Times New Roman"/>
-              <a:cs typeface="Times New Roman"/>
-            </a:endParaRPr>
-          </a:p>
-          <a:p>
-            <a:pPr marL="12700" marR="5080">
-              <a:lnSpc>
-                <a:spcPct val="100000"/>
-              </a:lnSpc>
-            </a:pPr>
-            <a:r>
-              <a:rPr sz="2000" spc="-5" dirty="0">
-                <a:latin typeface="Times New Roman"/>
-                <a:cs typeface="Times New Roman"/>
-              </a:rPr>
-              <a:t>See the </a:t>
-            </a:r>
-            <a:r>
-              <a:rPr sz="2000" spc="-10" dirty="0">
-                <a:latin typeface="Times New Roman"/>
-                <a:cs typeface="Times New Roman"/>
-              </a:rPr>
-              <a:t>Bellman-Ford Algorithm, </a:t>
-            </a:r>
-            <a:r>
-              <a:rPr sz="2000" spc="-5" dirty="0">
-                <a:latin typeface="Times New Roman"/>
-                <a:cs typeface="Times New Roman"/>
-              </a:rPr>
-              <a:t>which works even if the weights are negative,  provided there is no </a:t>
-            </a:r>
-            <a:r>
-              <a:rPr sz="2000" i="1" spc="-10" dirty="0">
-                <a:latin typeface="Times New Roman"/>
-                <a:cs typeface="Times New Roman"/>
-              </a:rPr>
-              <a:t>negative </a:t>
-            </a:r>
-            <a:r>
-              <a:rPr sz="2000" i="1" spc="-5" dirty="0">
-                <a:latin typeface="Times New Roman"/>
-                <a:cs typeface="Times New Roman"/>
-              </a:rPr>
-              <a:t>cycle </a:t>
-            </a:r>
-            <a:r>
-              <a:rPr sz="2000" spc="-5" dirty="0">
-                <a:latin typeface="Times New Roman"/>
-                <a:cs typeface="Times New Roman"/>
-              </a:rPr>
-              <a:t>(a cycle </a:t>
-            </a:r>
-            <a:r>
-              <a:rPr sz="2000" spc="-10" dirty="0">
-                <a:latin typeface="Times New Roman"/>
-                <a:cs typeface="Times New Roman"/>
-              </a:rPr>
-              <a:t>whose </a:t>
-            </a:r>
-            <a:r>
-              <a:rPr sz="2000" spc="-5" dirty="0">
-                <a:latin typeface="Times New Roman"/>
-                <a:cs typeface="Times New Roman"/>
-              </a:rPr>
-              <a:t>total </a:t>
-            </a:r>
-            <a:r>
-              <a:rPr sz="2000" spc="-10" dirty="0">
-                <a:latin typeface="Times New Roman"/>
-                <a:cs typeface="Times New Roman"/>
-              </a:rPr>
-              <a:t>weight </a:t>
-            </a:r>
-            <a:r>
-              <a:rPr sz="2000" spc="-5" dirty="0">
-                <a:latin typeface="Times New Roman"/>
-                <a:cs typeface="Times New Roman"/>
-              </a:rPr>
-              <a:t>is</a:t>
-            </a:r>
-            <a:r>
-              <a:rPr sz="2000" spc="160" dirty="0">
-                <a:latin typeface="Times New Roman"/>
-                <a:cs typeface="Times New Roman"/>
-              </a:rPr>
-              <a:t> </a:t>
-            </a:r>
-            <a:r>
-              <a:rPr sz="2000" spc="-10" dirty="0">
-                <a:latin typeface="Times New Roman"/>
-                <a:cs typeface="Times New Roman"/>
-              </a:rPr>
-              <a:t>negative).</a:t>
-            </a:r>
-            <a:endParaRPr sz="2000" dirty="0">
-              <a:latin typeface="Times New Roman"/>
-              <a:cs typeface="Times New Roman"/>
-            </a:endParaRPr>
-          </a:p>
-        </p:txBody>
-      </p:sp>
-      <p:grpSp>
-        <p:nvGrpSpPr>
-          <p:cNvPr id="8" name="Group 7" descr="An undirected graph with nine nodes:&#10;a connects to b weight 15 and c weight 25&#10;b connects to a weight 15, e weight 10, h weight 5, and i weight 25&#10;c connects to a weight 25, d weight 10, and e weight 20&#10;d connects to c weight 10&#10;&#10;Connections:&#10;{(a,b,15), (b,h,5), (h,i,15), (b,i,25), (b,e,10), (e,g,5), (e,f,10), (e,c,20), (c,d,10), (c,a,25)}&#10;&#10;Connections (one per line)&#10;a b 15&#10;a c 25&#10;b e 10&#10;b h 5&#10;b i 25&#10;c d 10&#10;c e 20&#10;e f 10&#10;e g 5&#10;h i 15&#10;">
-            <a:extLst>
-              <a:ext uri="{FF2B5EF4-FFF2-40B4-BE49-F238E27FC236}">
-                <a16:creationId xmlns:a16="http://schemas.microsoft.com/office/drawing/2014/main" id="{39C6E93E-B326-EE1C-F03F-AB931D19FF2D}"/>
-              </a:ext>
-            </a:extLst>
-          </p:cNvPr>
-          <p:cNvGrpSpPr/>
-          <p:nvPr/>
-        </p:nvGrpSpPr>
-        <p:grpSpPr>
-          <a:xfrm>
-            <a:off x="5243438" y="3245937"/>
-            <a:ext cx="3886200" cy="3200907"/>
-            <a:chOff x="1143000" y="3657600"/>
-            <a:chExt cx="3886200" cy="3200907"/>
-          </a:xfrm>
-        </p:grpSpPr>
-        <p:sp>
-          <p:nvSpPr>
-            <p:cNvPr id="9" name="object 9">
-              <a:extLst>
-                <a:ext uri="{FF2B5EF4-FFF2-40B4-BE49-F238E27FC236}">
-                  <a16:creationId xmlns:a16="http://schemas.microsoft.com/office/drawing/2014/main" id="{0B9225BF-E645-9121-3894-86D182809B9A}"/>
-                </a:ext>
-              </a:extLst>
-            </p:cNvPr>
-            <p:cNvSpPr/>
-            <p:nvPr/>
-          </p:nvSpPr>
-          <p:spPr>
-            <a:xfrm>
-              <a:off x="1719072" y="3657600"/>
-              <a:ext cx="354330" cy="321310"/>
-            </a:xfrm>
-            <a:custGeom>
-              <a:avLst/>
-              <a:gdLst/>
-              <a:ahLst/>
-              <a:cxnLst/>
-              <a:rect l="l" t="t" r="r" b="b"/>
-              <a:pathLst>
-                <a:path w="354330" h="321310">
-                  <a:moveTo>
-                    <a:pt x="354329" y="160020"/>
-                  </a:moveTo>
-                  <a:lnTo>
-                    <a:pt x="348008" y="117475"/>
-                  </a:lnTo>
-                  <a:lnTo>
-                    <a:pt x="330171" y="79247"/>
-                  </a:lnTo>
-                  <a:lnTo>
-                    <a:pt x="302513" y="46862"/>
-                  </a:lnTo>
-                  <a:lnTo>
-                    <a:pt x="266728" y="21843"/>
-                  </a:lnTo>
-                  <a:lnTo>
-                    <a:pt x="224507" y="5714"/>
-                  </a:lnTo>
-                  <a:lnTo>
-                    <a:pt x="177545" y="0"/>
-                  </a:lnTo>
-                  <a:lnTo>
-                    <a:pt x="130263" y="5715"/>
-                  </a:lnTo>
-                  <a:lnTo>
-                    <a:pt x="87827" y="21844"/>
-                  </a:lnTo>
-                  <a:lnTo>
-                    <a:pt x="51911" y="46863"/>
-                  </a:lnTo>
-                  <a:lnTo>
-                    <a:pt x="24186" y="79248"/>
-                  </a:lnTo>
-                  <a:lnTo>
-                    <a:pt x="6325" y="117475"/>
-                  </a:lnTo>
-                  <a:lnTo>
-                    <a:pt x="0" y="160020"/>
-                  </a:lnTo>
-                  <a:lnTo>
-                    <a:pt x="6325" y="202886"/>
-                  </a:lnTo>
-                  <a:lnTo>
-                    <a:pt x="24186" y="241328"/>
-                  </a:lnTo>
-                  <a:lnTo>
-                    <a:pt x="51911" y="273843"/>
-                  </a:lnTo>
-                  <a:lnTo>
-                    <a:pt x="87827" y="298929"/>
-                  </a:lnTo>
-                  <a:lnTo>
-                    <a:pt x="130263" y="315083"/>
-                  </a:lnTo>
-                  <a:lnTo>
-                    <a:pt x="177545" y="320802"/>
-                  </a:lnTo>
-                  <a:lnTo>
-                    <a:pt x="224507" y="315083"/>
-                  </a:lnTo>
-                  <a:lnTo>
-                    <a:pt x="266728" y="298929"/>
-                  </a:lnTo>
-                  <a:lnTo>
-                    <a:pt x="302513" y="273843"/>
-                  </a:lnTo>
-                  <a:lnTo>
-                    <a:pt x="330171" y="241328"/>
-                  </a:lnTo>
-                  <a:lnTo>
-                    <a:pt x="348008" y="202886"/>
-                  </a:lnTo>
-                  <a:lnTo>
-                    <a:pt x="354329" y="160020"/>
-                  </a:lnTo>
-                  <a:close/>
-                </a:path>
-              </a:pathLst>
-            </a:custGeom>
-            <a:solidFill>
-              <a:srgbClr val="EAEAEA"/>
-            </a:solidFill>
-          </p:spPr>
-          <p:txBody>
-            <a:bodyPr wrap="square" lIns="0" tIns="0" rIns="0" bIns="0" rtlCol="0"/>
-            <a:lstStyle/>
-            <a:p>
-              <a:endParaRPr/>
-            </a:p>
-          </p:txBody>
-        </p:sp>
-        <p:sp>
-          <p:nvSpPr>
-            <p:cNvPr id="10" name="object 10">
-              <a:extLst>
-                <a:ext uri="{FF2B5EF4-FFF2-40B4-BE49-F238E27FC236}">
-                  <a16:creationId xmlns:a16="http://schemas.microsoft.com/office/drawing/2014/main" id="{FD32D920-BF11-DC47-C59B-1D77A84B398A}"/>
-                </a:ext>
-              </a:extLst>
-            </p:cNvPr>
-            <p:cNvSpPr/>
-            <p:nvPr/>
-          </p:nvSpPr>
-          <p:spPr>
-            <a:xfrm>
-              <a:off x="1719072" y="3657600"/>
-              <a:ext cx="354330" cy="321310"/>
-            </a:xfrm>
-            <a:custGeom>
-              <a:avLst/>
-              <a:gdLst/>
-              <a:ahLst/>
-              <a:cxnLst/>
-              <a:rect l="l" t="t" r="r" b="b"/>
-              <a:pathLst>
-                <a:path w="354330" h="321310">
-                  <a:moveTo>
-                    <a:pt x="177545" y="0"/>
-                  </a:moveTo>
-                  <a:lnTo>
-                    <a:pt x="130263" y="5715"/>
-                  </a:lnTo>
-                  <a:lnTo>
-                    <a:pt x="87827" y="21844"/>
-                  </a:lnTo>
-                  <a:lnTo>
-                    <a:pt x="51911" y="46863"/>
-                  </a:lnTo>
-                  <a:lnTo>
-                    <a:pt x="24186" y="79248"/>
-                  </a:lnTo>
-                  <a:lnTo>
-                    <a:pt x="6325" y="117475"/>
-                  </a:lnTo>
-                  <a:lnTo>
-                    <a:pt x="0" y="160020"/>
-                  </a:lnTo>
-                  <a:lnTo>
-                    <a:pt x="6325" y="202886"/>
-                  </a:lnTo>
-                  <a:lnTo>
-                    <a:pt x="24186" y="241328"/>
-                  </a:lnTo>
-                  <a:lnTo>
-                    <a:pt x="51911" y="273843"/>
-                  </a:lnTo>
-                  <a:lnTo>
-                    <a:pt x="87827" y="298929"/>
-                  </a:lnTo>
-                  <a:lnTo>
-                    <a:pt x="130263" y="315083"/>
-                  </a:lnTo>
-                  <a:lnTo>
-                    <a:pt x="177545" y="320802"/>
-                  </a:lnTo>
-                  <a:lnTo>
-                    <a:pt x="224507" y="315083"/>
-                  </a:lnTo>
-                  <a:lnTo>
-                    <a:pt x="266728" y="298929"/>
-                  </a:lnTo>
-                  <a:lnTo>
-                    <a:pt x="302513" y="273843"/>
-                  </a:lnTo>
-                  <a:lnTo>
-                    <a:pt x="330171" y="241328"/>
-                  </a:lnTo>
-                  <a:lnTo>
-                    <a:pt x="348008" y="202886"/>
-                  </a:lnTo>
-                  <a:lnTo>
-                    <a:pt x="354329" y="160020"/>
-                  </a:lnTo>
-                  <a:lnTo>
-                    <a:pt x="348008" y="117475"/>
-                  </a:lnTo>
-                  <a:lnTo>
-                    <a:pt x="330171" y="79247"/>
-                  </a:lnTo>
-                  <a:lnTo>
-                    <a:pt x="302513" y="46862"/>
-                  </a:lnTo>
-                  <a:lnTo>
-                    <a:pt x="266728" y="21843"/>
-                  </a:lnTo>
-                  <a:lnTo>
-                    <a:pt x="224507" y="5714"/>
-                  </a:lnTo>
-                  <a:lnTo>
-                    <a:pt x="177545" y="0"/>
-                  </a:lnTo>
-                  <a:close/>
-                </a:path>
-              </a:pathLst>
-            </a:custGeom>
-            <a:ln w="9525">
-              <a:solidFill>
-                <a:srgbClr val="000000"/>
-              </a:solidFill>
-            </a:ln>
-          </p:spPr>
-          <p:txBody>
-            <a:bodyPr wrap="square" lIns="0" tIns="0" rIns="0" bIns="0" rtlCol="0"/>
-            <a:lstStyle/>
-            <a:p>
-              <a:endParaRPr/>
-            </a:p>
-          </p:txBody>
-        </p:sp>
-        <p:sp>
-          <p:nvSpPr>
-            <p:cNvPr id="11" name="object 11">
-              <a:extLst>
-                <a:ext uri="{FF2B5EF4-FFF2-40B4-BE49-F238E27FC236}">
-                  <a16:creationId xmlns:a16="http://schemas.microsoft.com/office/drawing/2014/main" id="{630F2DCD-57DE-4C6D-DA37-ADDB1DA1148B}"/>
-                </a:ext>
-              </a:extLst>
-            </p:cNvPr>
-            <p:cNvSpPr/>
-            <p:nvPr/>
-          </p:nvSpPr>
-          <p:spPr>
-            <a:xfrm>
-              <a:off x="3609594" y="3870197"/>
-              <a:ext cx="356235" cy="321310"/>
-            </a:xfrm>
-            <a:custGeom>
-              <a:avLst/>
-              <a:gdLst/>
-              <a:ahLst/>
-              <a:cxnLst/>
-              <a:rect l="l" t="t" r="r" b="b"/>
-              <a:pathLst>
-                <a:path w="356235" h="321310">
-                  <a:moveTo>
-                    <a:pt x="355854" y="160782"/>
-                  </a:moveTo>
-                  <a:lnTo>
-                    <a:pt x="349528" y="117915"/>
-                  </a:lnTo>
-                  <a:lnTo>
-                    <a:pt x="331667" y="79473"/>
-                  </a:lnTo>
-                  <a:lnTo>
-                    <a:pt x="303942" y="46958"/>
-                  </a:lnTo>
-                  <a:lnTo>
-                    <a:pt x="268026" y="21872"/>
-                  </a:lnTo>
-                  <a:lnTo>
-                    <a:pt x="225590" y="5718"/>
-                  </a:lnTo>
-                  <a:lnTo>
-                    <a:pt x="178308" y="0"/>
-                  </a:lnTo>
-                  <a:lnTo>
-                    <a:pt x="130968" y="5718"/>
-                  </a:lnTo>
-                  <a:lnTo>
-                    <a:pt x="88392" y="21872"/>
-                  </a:lnTo>
-                  <a:lnTo>
-                    <a:pt x="52292" y="46958"/>
-                  </a:lnTo>
-                  <a:lnTo>
-                    <a:pt x="24384" y="79473"/>
-                  </a:lnTo>
-                  <a:lnTo>
-                    <a:pt x="6381" y="117915"/>
-                  </a:lnTo>
-                  <a:lnTo>
-                    <a:pt x="0" y="160782"/>
-                  </a:lnTo>
-                  <a:lnTo>
-                    <a:pt x="6381" y="203327"/>
-                  </a:lnTo>
-                  <a:lnTo>
-                    <a:pt x="24384" y="241554"/>
-                  </a:lnTo>
-                  <a:lnTo>
-                    <a:pt x="52292" y="273939"/>
-                  </a:lnTo>
-                  <a:lnTo>
-                    <a:pt x="88392" y="298958"/>
-                  </a:lnTo>
-                  <a:lnTo>
-                    <a:pt x="130968" y="315087"/>
-                  </a:lnTo>
-                  <a:lnTo>
-                    <a:pt x="178308" y="320802"/>
-                  </a:lnTo>
-                  <a:lnTo>
-                    <a:pt x="225590" y="315087"/>
-                  </a:lnTo>
-                  <a:lnTo>
-                    <a:pt x="268026" y="298958"/>
-                  </a:lnTo>
-                  <a:lnTo>
-                    <a:pt x="303942" y="273939"/>
-                  </a:lnTo>
-                  <a:lnTo>
-                    <a:pt x="331667" y="241554"/>
-                  </a:lnTo>
-                  <a:lnTo>
-                    <a:pt x="349528" y="203327"/>
-                  </a:lnTo>
-                  <a:lnTo>
-                    <a:pt x="355854" y="160782"/>
-                  </a:lnTo>
-                  <a:close/>
-                </a:path>
-              </a:pathLst>
-            </a:custGeom>
-            <a:solidFill>
-              <a:srgbClr val="EAEAEA"/>
-            </a:solidFill>
-          </p:spPr>
-          <p:txBody>
-            <a:bodyPr wrap="square" lIns="0" tIns="0" rIns="0" bIns="0" rtlCol="0"/>
-            <a:lstStyle/>
-            <a:p>
-              <a:endParaRPr/>
-            </a:p>
-          </p:txBody>
-        </p:sp>
-        <p:sp>
-          <p:nvSpPr>
-            <p:cNvPr id="12" name="object 12">
-              <a:extLst>
-                <a:ext uri="{FF2B5EF4-FFF2-40B4-BE49-F238E27FC236}">
-                  <a16:creationId xmlns:a16="http://schemas.microsoft.com/office/drawing/2014/main" id="{BE84059A-CDFA-0A94-36D1-47301265F941}"/>
-                </a:ext>
-              </a:extLst>
-            </p:cNvPr>
-            <p:cNvSpPr/>
-            <p:nvPr/>
-          </p:nvSpPr>
-          <p:spPr>
-            <a:xfrm>
-              <a:off x="3609594" y="3870197"/>
-              <a:ext cx="356235" cy="321310"/>
-            </a:xfrm>
-            <a:custGeom>
-              <a:avLst/>
-              <a:gdLst/>
-              <a:ahLst/>
-              <a:cxnLst/>
-              <a:rect l="l" t="t" r="r" b="b"/>
-              <a:pathLst>
-                <a:path w="356235" h="321310">
-                  <a:moveTo>
-                    <a:pt x="178308" y="0"/>
-                  </a:moveTo>
-                  <a:lnTo>
-                    <a:pt x="130968" y="5718"/>
-                  </a:lnTo>
-                  <a:lnTo>
-                    <a:pt x="88392" y="21872"/>
-                  </a:lnTo>
-                  <a:lnTo>
-                    <a:pt x="52292" y="46958"/>
-                  </a:lnTo>
-                  <a:lnTo>
-                    <a:pt x="24384" y="79473"/>
-                  </a:lnTo>
-                  <a:lnTo>
-                    <a:pt x="6381" y="117915"/>
-                  </a:lnTo>
-                  <a:lnTo>
-                    <a:pt x="0" y="160782"/>
-                  </a:lnTo>
-                  <a:lnTo>
-                    <a:pt x="6381" y="203327"/>
-                  </a:lnTo>
-                  <a:lnTo>
-                    <a:pt x="24384" y="241554"/>
-                  </a:lnTo>
-                  <a:lnTo>
-                    <a:pt x="52292" y="273939"/>
-                  </a:lnTo>
-                  <a:lnTo>
-                    <a:pt x="88392" y="298958"/>
-                  </a:lnTo>
-                  <a:lnTo>
-                    <a:pt x="130968" y="315087"/>
-                  </a:lnTo>
-                  <a:lnTo>
-                    <a:pt x="178308" y="320802"/>
-                  </a:lnTo>
-                  <a:lnTo>
-                    <a:pt x="225590" y="315087"/>
-                  </a:lnTo>
-                  <a:lnTo>
-                    <a:pt x="268026" y="298958"/>
-                  </a:lnTo>
-                  <a:lnTo>
-                    <a:pt x="303942" y="273939"/>
-                  </a:lnTo>
-                  <a:lnTo>
-                    <a:pt x="331667" y="241554"/>
-                  </a:lnTo>
-                  <a:lnTo>
-                    <a:pt x="349528" y="203327"/>
-                  </a:lnTo>
-                  <a:lnTo>
-                    <a:pt x="355854" y="160782"/>
-                  </a:lnTo>
-                  <a:lnTo>
-                    <a:pt x="349528" y="117915"/>
-                  </a:lnTo>
-                  <a:lnTo>
-                    <a:pt x="331667" y="79473"/>
-                  </a:lnTo>
-                  <a:lnTo>
-                    <a:pt x="303942" y="46958"/>
-                  </a:lnTo>
-                  <a:lnTo>
-                    <a:pt x="268026" y="21872"/>
-                  </a:lnTo>
-                  <a:lnTo>
-                    <a:pt x="225590" y="5718"/>
-                  </a:lnTo>
-                  <a:lnTo>
-                    <a:pt x="178308" y="0"/>
-                  </a:lnTo>
-                  <a:close/>
-                </a:path>
-              </a:pathLst>
-            </a:custGeom>
-            <a:ln w="9525">
-              <a:solidFill>
-                <a:srgbClr val="000000"/>
-              </a:solidFill>
-            </a:ln>
-          </p:spPr>
-          <p:txBody>
-            <a:bodyPr wrap="square" lIns="0" tIns="0" rIns="0" bIns="0" rtlCol="0"/>
-            <a:lstStyle/>
-            <a:p>
-              <a:endParaRPr/>
-            </a:p>
-          </p:txBody>
-        </p:sp>
-        <p:sp>
-          <p:nvSpPr>
-            <p:cNvPr id="13" name="object 13">
-              <a:extLst>
-                <a:ext uri="{FF2B5EF4-FFF2-40B4-BE49-F238E27FC236}">
-                  <a16:creationId xmlns:a16="http://schemas.microsoft.com/office/drawing/2014/main" id="{2B71E5E8-BEE2-FBBA-D80D-9A3B566EA434}"/>
-                </a:ext>
-              </a:extLst>
-            </p:cNvPr>
-            <p:cNvSpPr/>
-            <p:nvPr/>
-          </p:nvSpPr>
-          <p:spPr>
-            <a:xfrm>
-              <a:off x="1143000" y="4831079"/>
-              <a:ext cx="354330" cy="320040"/>
-            </a:xfrm>
-            <a:custGeom>
-              <a:avLst/>
-              <a:gdLst/>
-              <a:ahLst/>
-              <a:cxnLst/>
-              <a:rect l="l" t="t" r="r" b="b"/>
-              <a:pathLst>
-                <a:path w="354330" h="320039">
-                  <a:moveTo>
-                    <a:pt x="354330" y="160020"/>
-                  </a:moveTo>
-                  <a:lnTo>
-                    <a:pt x="348004" y="117475"/>
-                  </a:lnTo>
-                  <a:lnTo>
-                    <a:pt x="330143" y="79247"/>
-                  </a:lnTo>
-                  <a:lnTo>
-                    <a:pt x="302418" y="46862"/>
-                  </a:lnTo>
-                  <a:lnTo>
-                    <a:pt x="266502" y="21843"/>
-                  </a:lnTo>
-                  <a:lnTo>
-                    <a:pt x="224066" y="5714"/>
-                  </a:lnTo>
-                  <a:lnTo>
-                    <a:pt x="176784" y="0"/>
-                  </a:lnTo>
-                  <a:lnTo>
-                    <a:pt x="129822" y="5715"/>
-                  </a:lnTo>
-                  <a:lnTo>
-                    <a:pt x="87601" y="21844"/>
-                  </a:lnTo>
-                  <a:lnTo>
-                    <a:pt x="51816" y="46863"/>
-                  </a:lnTo>
-                  <a:lnTo>
-                    <a:pt x="24158" y="79248"/>
-                  </a:lnTo>
-                  <a:lnTo>
-                    <a:pt x="6321" y="117475"/>
-                  </a:lnTo>
-                  <a:lnTo>
-                    <a:pt x="0" y="160020"/>
-                  </a:lnTo>
-                  <a:lnTo>
-                    <a:pt x="6321" y="202565"/>
-                  </a:lnTo>
-                  <a:lnTo>
-                    <a:pt x="24158" y="240792"/>
-                  </a:lnTo>
-                  <a:lnTo>
-                    <a:pt x="51816" y="273177"/>
-                  </a:lnTo>
-                  <a:lnTo>
-                    <a:pt x="87601" y="298196"/>
-                  </a:lnTo>
-                  <a:lnTo>
-                    <a:pt x="129822" y="314325"/>
-                  </a:lnTo>
-                  <a:lnTo>
-                    <a:pt x="176784" y="320040"/>
-                  </a:lnTo>
-                  <a:lnTo>
-                    <a:pt x="224066" y="314325"/>
-                  </a:lnTo>
-                  <a:lnTo>
-                    <a:pt x="266502" y="298196"/>
-                  </a:lnTo>
-                  <a:lnTo>
-                    <a:pt x="302418" y="273177"/>
-                  </a:lnTo>
-                  <a:lnTo>
-                    <a:pt x="330143" y="240792"/>
-                  </a:lnTo>
-                  <a:lnTo>
-                    <a:pt x="348004" y="202565"/>
-                  </a:lnTo>
-                  <a:lnTo>
-                    <a:pt x="354330" y="160020"/>
-                  </a:lnTo>
-                  <a:close/>
-                </a:path>
-              </a:pathLst>
-            </a:custGeom>
-            <a:solidFill>
-              <a:srgbClr val="EAEAEA"/>
-            </a:solidFill>
-          </p:spPr>
-          <p:txBody>
-            <a:bodyPr wrap="square" lIns="0" tIns="0" rIns="0" bIns="0" rtlCol="0"/>
-            <a:lstStyle/>
-            <a:p>
-              <a:endParaRPr/>
-            </a:p>
-          </p:txBody>
-        </p:sp>
-        <p:sp>
-          <p:nvSpPr>
-            <p:cNvPr id="14" name="object 14">
-              <a:extLst>
-                <a:ext uri="{FF2B5EF4-FFF2-40B4-BE49-F238E27FC236}">
-                  <a16:creationId xmlns:a16="http://schemas.microsoft.com/office/drawing/2014/main" id="{B58B6A83-05C6-F848-5A42-A3697805BCD6}"/>
-                </a:ext>
-              </a:extLst>
-            </p:cNvPr>
-            <p:cNvSpPr/>
-            <p:nvPr/>
-          </p:nvSpPr>
-          <p:spPr>
-            <a:xfrm>
-              <a:off x="1143000" y="4831079"/>
-              <a:ext cx="354330" cy="320040"/>
-            </a:xfrm>
-            <a:custGeom>
-              <a:avLst/>
-              <a:gdLst/>
-              <a:ahLst/>
-              <a:cxnLst/>
-              <a:rect l="l" t="t" r="r" b="b"/>
-              <a:pathLst>
-                <a:path w="354330" h="320039">
-                  <a:moveTo>
-                    <a:pt x="176784" y="0"/>
-                  </a:moveTo>
-                  <a:lnTo>
-                    <a:pt x="129822" y="5715"/>
-                  </a:lnTo>
-                  <a:lnTo>
-                    <a:pt x="87601" y="21844"/>
-                  </a:lnTo>
-                  <a:lnTo>
-                    <a:pt x="51816" y="46863"/>
-                  </a:lnTo>
-                  <a:lnTo>
-                    <a:pt x="24158" y="79248"/>
-                  </a:lnTo>
-                  <a:lnTo>
-                    <a:pt x="6321" y="117475"/>
-                  </a:lnTo>
-                  <a:lnTo>
-                    <a:pt x="0" y="160020"/>
-                  </a:lnTo>
-                  <a:lnTo>
-                    <a:pt x="6321" y="202565"/>
-                  </a:lnTo>
-                  <a:lnTo>
-                    <a:pt x="24158" y="240792"/>
-                  </a:lnTo>
-                  <a:lnTo>
-                    <a:pt x="51816" y="273177"/>
-                  </a:lnTo>
-                  <a:lnTo>
-                    <a:pt x="87601" y="298196"/>
-                  </a:lnTo>
-                  <a:lnTo>
-                    <a:pt x="129822" y="314325"/>
-                  </a:lnTo>
-                  <a:lnTo>
-                    <a:pt x="176784" y="320040"/>
-                  </a:lnTo>
-                  <a:lnTo>
-                    <a:pt x="224066" y="314325"/>
-                  </a:lnTo>
-                  <a:lnTo>
-                    <a:pt x="266502" y="298196"/>
-                  </a:lnTo>
-                  <a:lnTo>
-                    <a:pt x="302418" y="273177"/>
-                  </a:lnTo>
-                  <a:lnTo>
-                    <a:pt x="330143" y="240792"/>
-                  </a:lnTo>
-                  <a:lnTo>
-                    <a:pt x="348004" y="202565"/>
-                  </a:lnTo>
-                  <a:lnTo>
-                    <a:pt x="354330" y="160020"/>
-                  </a:lnTo>
-                  <a:lnTo>
-                    <a:pt x="348004" y="117475"/>
-                  </a:lnTo>
-                  <a:lnTo>
-                    <a:pt x="330143" y="79247"/>
-                  </a:lnTo>
-                  <a:lnTo>
-                    <a:pt x="302418" y="46862"/>
-                  </a:lnTo>
-                  <a:lnTo>
-                    <a:pt x="266502" y="21843"/>
-                  </a:lnTo>
-                  <a:lnTo>
-                    <a:pt x="224066" y="5714"/>
-                  </a:lnTo>
-                  <a:lnTo>
-                    <a:pt x="176784" y="0"/>
-                  </a:lnTo>
-                  <a:close/>
-                </a:path>
-              </a:pathLst>
-            </a:custGeom>
-            <a:ln w="9525">
-              <a:solidFill>
-                <a:srgbClr val="000000"/>
-              </a:solidFill>
-            </a:ln>
-          </p:spPr>
-          <p:txBody>
-            <a:bodyPr wrap="square" lIns="0" tIns="0" rIns="0" bIns="0" rtlCol="0"/>
-            <a:lstStyle/>
-            <a:p>
-              <a:endParaRPr/>
-            </a:p>
-          </p:txBody>
-        </p:sp>
-        <p:sp>
-          <p:nvSpPr>
-            <p:cNvPr id="15" name="object 15">
-              <a:extLst>
-                <a:ext uri="{FF2B5EF4-FFF2-40B4-BE49-F238E27FC236}">
-                  <a16:creationId xmlns:a16="http://schemas.microsoft.com/office/drawing/2014/main" id="{B91D573C-ED64-232D-07BE-DB6A5B163486}"/>
-                </a:ext>
-              </a:extLst>
-            </p:cNvPr>
-            <p:cNvSpPr/>
-            <p:nvPr/>
-          </p:nvSpPr>
-          <p:spPr>
-            <a:xfrm>
-              <a:off x="1365503" y="5897879"/>
-              <a:ext cx="353695" cy="320040"/>
-            </a:xfrm>
-            <a:custGeom>
-              <a:avLst/>
-              <a:gdLst/>
-              <a:ahLst/>
-              <a:cxnLst/>
-              <a:rect l="l" t="t" r="r" b="b"/>
-              <a:pathLst>
-                <a:path w="353694" h="320039">
-                  <a:moveTo>
-                    <a:pt x="353568" y="160020"/>
-                  </a:moveTo>
-                  <a:lnTo>
-                    <a:pt x="347246" y="117475"/>
-                  </a:lnTo>
-                  <a:lnTo>
-                    <a:pt x="329409" y="79247"/>
-                  </a:lnTo>
-                  <a:lnTo>
-                    <a:pt x="301752" y="46862"/>
-                  </a:lnTo>
-                  <a:lnTo>
-                    <a:pt x="265966" y="21843"/>
-                  </a:lnTo>
-                  <a:lnTo>
-                    <a:pt x="223745" y="5714"/>
-                  </a:lnTo>
-                  <a:lnTo>
-                    <a:pt x="176784" y="0"/>
-                  </a:lnTo>
-                  <a:lnTo>
-                    <a:pt x="129822" y="5715"/>
-                  </a:lnTo>
-                  <a:lnTo>
-                    <a:pt x="87601" y="21844"/>
-                  </a:lnTo>
-                  <a:lnTo>
-                    <a:pt x="51816" y="46863"/>
-                  </a:lnTo>
-                  <a:lnTo>
-                    <a:pt x="24158" y="79248"/>
-                  </a:lnTo>
-                  <a:lnTo>
-                    <a:pt x="6321" y="117475"/>
-                  </a:lnTo>
-                  <a:lnTo>
-                    <a:pt x="0" y="160020"/>
-                  </a:lnTo>
-                  <a:lnTo>
-                    <a:pt x="6321" y="202565"/>
-                  </a:lnTo>
-                  <a:lnTo>
-                    <a:pt x="24158" y="240792"/>
-                  </a:lnTo>
-                  <a:lnTo>
-                    <a:pt x="51816" y="273177"/>
-                  </a:lnTo>
-                  <a:lnTo>
-                    <a:pt x="87601" y="298196"/>
-                  </a:lnTo>
-                  <a:lnTo>
-                    <a:pt x="129822" y="314325"/>
-                  </a:lnTo>
-                  <a:lnTo>
-                    <a:pt x="176784" y="320040"/>
-                  </a:lnTo>
-                  <a:lnTo>
-                    <a:pt x="223745" y="314325"/>
-                  </a:lnTo>
-                  <a:lnTo>
-                    <a:pt x="265966" y="298196"/>
-                  </a:lnTo>
-                  <a:lnTo>
-                    <a:pt x="301752" y="273177"/>
-                  </a:lnTo>
-                  <a:lnTo>
-                    <a:pt x="329409" y="240792"/>
-                  </a:lnTo>
-                  <a:lnTo>
-                    <a:pt x="347246" y="202565"/>
-                  </a:lnTo>
-                  <a:lnTo>
-                    <a:pt x="353568" y="160020"/>
-                  </a:lnTo>
-                  <a:close/>
-                </a:path>
-              </a:pathLst>
-            </a:custGeom>
-            <a:solidFill>
-              <a:srgbClr val="EAEAEA"/>
-            </a:solidFill>
-          </p:spPr>
-          <p:txBody>
-            <a:bodyPr wrap="square" lIns="0" tIns="0" rIns="0" bIns="0" rtlCol="0"/>
-            <a:lstStyle/>
-            <a:p>
-              <a:endParaRPr/>
-            </a:p>
-          </p:txBody>
-        </p:sp>
-        <p:sp>
-          <p:nvSpPr>
-            <p:cNvPr id="16" name="object 16">
-              <a:extLst>
-                <a:ext uri="{FF2B5EF4-FFF2-40B4-BE49-F238E27FC236}">
-                  <a16:creationId xmlns:a16="http://schemas.microsoft.com/office/drawing/2014/main" id="{62A4EA8E-4EAB-0E12-024C-B5DAF724C79F}"/>
-                </a:ext>
-              </a:extLst>
-            </p:cNvPr>
-            <p:cNvSpPr/>
-            <p:nvPr/>
-          </p:nvSpPr>
-          <p:spPr>
-            <a:xfrm>
-              <a:off x="1365503" y="5897879"/>
-              <a:ext cx="353695" cy="320040"/>
-            </a:xfrm>
-            <a:custGeom>
-              <a:avLst/>
-              <a:gdLst/>
-              <a:ahLst/>
-              <a:cxnLst/>
-              <a:rect l="l" t="t" r="r" b="b"/>
-              <a:pathLst>
-                <a:path w="353694" h="320039">
-                  <a:moveTo>
-                    <a:pt x="176784" y="0"/>
-                  </a:moveTo>
-                  <a:lnTo>
-                    <a:pt x="129822" y="5715"/>
-                  </a:lnTo>
-                  <a:lnTo>
-                    <a:pt x="87601" y="21844"/>
-                  </a:lnTo>
-                  <a:lnTo>
-                    <a:pt x="51816" y="46863"/>
-                  </a:lnTo>
-                  <a:lnTo>
-                    <a:pt x="24158" y="79248"/>
-                  </a:lnTo>
-                  <a:lnTo>
-                    <a:pt x="6321" y="117475"/>
-                  </a:lnTo>
-                  <a:lnTo>
-                    <a:pt x="0" y="160020"/>
-                  </a:lnTo>
-                  <a:lnTo>
-                    <a:pt x="6321" y="202565"/>
-                  </a:lnTo>
-                  <a:lnTo>
-                    <a:pt x="24158" y="240792"/>
-                  </a:lnTo>
-                  <a:lnTo>
-                    <a:pt x="51816" y="273177"/>
-                  </a:lnTo>
-                  <a:lnTo>
-                    <a:pt x="87601" y="298196"/>
-                  </a:lnTo>
-                  <a:lnTo>
-                    <a:pt x="129822" y="314325"/>
-                  </a:lnTo>
-                  <a:lnTo>
-                    <a:pt x="176784" y="320040"/>
-                  </a:lnTo>
-                  <a:lnTo>
-                    <a:pt x="223745" y="314325"/>
-                  </a:lnTo>
-                  <a:lnTo>
-                    <a:pt x="265966" y="298196"/>
-                  </a:lnTo>
-                  <a:lnTo>
-                    <a:pt x="301752" y="273177"/>
-                  </a:lnTo>
-                  <a:lnTo>
-                    <a:pt x="329409" y="240792"/>
-                  </a:lnTo>
-                  <a:lnTo>
-                    <a:pt x="347246" y="202565"/>
-                  </a:lnTo>
-                  <a:lnTo>
-                    <a:pt x="353568" y="160020"/>
-                  </a:lnTo>
-                  <a:lnTo>
-                    <a:pt x="347246" y="117475"/>
-                  </a:lnTo>
-                  <a:lnTo>
-                    <a:pt x="329409" y="79247"/>
-                  </a:lnTo>
-                  <a:lnTo>
-                    <a:pt x="301752" y="46862"/>
-                  </a:lnTo>
-                  <a:lnTo>
-                    <a:pt x="265966" y="21843"/>
-                  </a:lnTo>
-                  <a:lnTo>
-                    <a:pt x="223745" y="5714"/>
-                  </a:lnTo>
-                  <a:lnTo>
-                    <a:pt x="176784" y="0"/>
-                  </a:lnTo>
-                  <a:close/>
-                </a:path>
-              </a:pathLst>
-            </a:custGeom>
-            <a:ln w="9525">
-              <a:solidFill>
-                <a:srgbClr val="000000"/>
-              </a:solidFill>
-            </a:ln>
-          </p:spPr>
-          <p:txBody>
-            <a:bodyPr wrap="square" lIns="0" tIns="0" rIns="0" bIns="0" rtlCol="0"/>
-            <a:lstStyle/>
-            <a:p>
-              <a:endParaRPr/>
-            </a:p>
-          </p:txBody>
-        </p:sp>
-        <p:sp>
-          <p:nvSpPr>
-            <p:cNvPr id="17" name="object 17">
-              <a:extLst>
-                <a:ext uri="{FF2B5EF4-FFF2-40B4-BE49-F238E27FC236}">
-                  <a16:creationId xmlns:a16="http://schemas.microsoft.com/office/drawing/2014/main" id="{57BFFB98-E346-E383-2EAA-63404AA30342}"/>
-                </a:ext>
-              </a:extLst>
-            </p:cNvPr>
-            <p:cNvSpPr/>
-            <p:nvPr/>
-          </p:nvSpPr>
-          <p:spPr>
-            <a:xfrm>
-              <a:off x="2665476" y="4511802"/>
-              <a:ext cx="353695" cy="319405"/>
-            </a:xfrm>
-            <a:custGeom>
-              <a:avLst/>
-              <a:gdLst/>
-              <a:ahLst/>
-              <a:cxnLst/>
-              <a:rect l="l" t="t" r="r" b="b"/>
-              <a:pathLst>
-                <a:path w="353694" h="319404">
-                  <a:moveTo>
-                    <a:pt x="353567" y="159258"/>
-                  </a:moveTo>
-                  <a:lnTo>
-                    <a:pt x="347246" y="117034"/>
-                  </a:lnTo>
-                  <a:lnTo>
-                    <a:pt x="329409" y="79022"/>
-                  </a:lnTo>
-                  <a:lnTo>
-                    <a:pt x="301751" y="46767"/>
-                  </a:lnTo>
-                  <a:lnTo>
-                    <a:pt x="265966" y="21815"/>
-                  </a:lnTo>
-                  <a:lnTo>
-                    <a:pt x="223745" y="5711"/>
-                  </a:lnTo>
-                  <a:lnTo>
-                    <a:pt x="176783" y="0"/>
-                  </a:lnTo>
-                  <a:lnTo>
-                    <a:pt x="129822" y="5711"/>
-                  </a:lnTo>
-                  <a:lnTo>
-                    <a:pt x="87601" y="21815"/>
-                  </a:lnTo>
-                  <a:lnTo>
-                    <a:pt x="51815" y="46767"/>
-                  </a:lnTo>
-                  <a:lnTo>
-                    <a:pt x="24158" y="79022"/>
-                  </a:lnTo>
-                  <a:lnTo>
-                    <a:pt x="6321" y="117034"/>
-                  </a:lnTo>
-                  <a:lnTo>
-                    <a:pt x="0" y="159258"/>
-                  </a:lnTo>
-                  <a:lnTo>
-                    <a:pt x="6321" y="201803"/>
-                  </a:lnTo>
-                  <a:lnTo>
-                    <a:pt x="24158" y="240030"/>
-                  </a:lnTo>
-                  <a:lnTo>
-                    <a:pt x="51815" y="272415"/>
-                  </a:lnTo>
-                  <a:lnTo>
-                    <a:pt x="87601" y="297434"/>
-                  </a:lnTo>
-                  <a:lnTo>
-                    <a:pt x="129822" y="313563"/>
-                  </a:lnTo>
-                  <a:lnTo>
-                    <a:pt x="176783" y="319278"/>
-                  </a:lnTo>
-                  <a:lnTo>
-                    <a:pt x="223745" y="313563"/>
-                  </a:lnTo>
-                  <a:lnTo>
-                    <a:pt x="265966" y="297434"/>
-                  </a:lnTo>
-                  <a:lnTo>
-                    <a:pt x="301751" y="272415"/>
-                  </a:lnTo>
-                  <a:lnTo>
-                    <a:pt x="329409" y="240030"/>
-                  </a:lnTo>
-                  <a:lnTo>
-                    <a:pt x="347246" y="201803"/>
-                  </a:lnTo>
-                  <a:lnTo>
-                    <a:pt x="353567" y="159258"/>
-                  </a:lnTo>
-                  <a:close/>
-                </a:path>
-              </a:pathLst>
-            </a:custGeom>
-            <a:solidFill>
-              <a:srgbClr val="EAEAEA"/>
-            </a:solidFill>
-          </p:spPr>
-          <p:txBody>
-            <a:bodyPr wrap="square" lIns="0" tIns="0" rIns="0" bIns="0" rtlCol="0"/>
-            <a:lstStyle/>
-            <a:p>
-              <a:endParaRPr/>
-            </a:p>
-          </p:txBody>
-        </p:sp>
-        <p:sp>
-          <p:nvSpPr>
-            <p:cNvPr id="18" name="object 18">
-              <a:extLst>
-                <a:ext uri="{FF2B5EF4-FFF2-40B4-BE49-F238E27FC236}">
-                  <a16:creationId xmlns:a16="http://schemas.microsoft.com/office/drawing/2014/main" id="{DE25DCC4-AFAA-135E-6ED3-8E9F99E80A4C}"/>
-                </a:ext>
-              </a:extLst>
-            </p:cNvPr>
-            <p:cNvSpPr/>
-            <p:nvPr/>
-          </p:nvSpPr>
-          <p:spPr>
-            <a:xfrm>
-              <a:off x="2665476" y="4511802"/>
-              <a:ext cx="353695" cy="319405"/>
-            </a:xfrm>
-            <a:custGeom>
-              <a:avLst/>
-              <a:gdLst/>
-              <a:ahLst/>
-              <a:cxnLst/>
-              <a:rect l="l" t="t" r="r" b="b"/>
-              <a:pathLst>
-                <a:path w="353694" h="319404">
-                  <a:moveTo>
-                    <a:pt x="176783" y="0"/>
-                  </a:moveTo>
-                  <a:lnTo>
-                    <a:pt x="129822" y="5711"/>
-                  </a:lnTo>
-                  <a:lnTo>
-                    <a:pt x="87601" y="21815"/>
-                  </a:lnTo>
-                  <a:lnTo>
-                    <a:pt x="51815" y="46767"/>
-                  </a:lnTo>
-                  <a:lnTo>
-                    <a:pt x="24158" y="79022"/>
-                  </a:lnTo>
-                  <a:lnTo>
-                    <a:pt x="6321" y="117034"/>
-                  </a:lnTo>
-                  <a:lnTo>
-                    <a:pt x="0" y="159258"/>
-                  </a:lnTo>
-                  <a:lnTo>
-                    <a:pt x="6321" y="201803"/>
-                  </a:lnTo>
-                  <a:lnTo>
-                    <a:pt x="24158" y="240030"/>
-                  </a:lnTo>
-                  <a:lnTo>
-                    <a:pt x="51815" y="272415"/>
-                  </a:lnTo>
-                  <a:lnTo>
-                    <a:pt x="87601" y="297434"/>
-                  </a:lnTo>
-                  <a:lnTo>
-                    <a:pt x="129822" y="313563"/>
-                  </a:lnTo>
-                  <a:lnTo>
-                    <a:pt x="176783" y="319278"/>
-                  </a:lnTo>
-                  <a:lnTo>
-                    <a:pt x="223745" y="313563"/>
-                  </a:lnTo>
-                  <a:lnTo>
-                    <a:pt x="265966" y="297434"/>
-                  </a:lnTo>
-                  <a:lnTo>
-                    <a:pt x="301751" y="272415"/>
-                  </a:lnTo>
-                  <a:lnTo>
-                    <a:pt x="329409" y="240030"/>
-                  </a:lnTo>
-                  <a:lnTo>
-                    <a:pt x="347246" y="201803"/>
-                  </a:lnTo>
-                  <a:lnTo>
-                    <a:pt x="353567" y="159258"/>
-                  </a:lnTo>
-                  <a:lnTo>
-                    <a:pt x="347246" y="117034"/>
-                  </a:lnTo>
-                  <a:lnTo>
-                    <a:pt x="329409" y="79022"/>
-                  </a:lnTo>
-                  <a:lnTo>
-                    <a:pt x="301751" y="46767"/>
-                  </a:lnTo>
-                  <a:lnTo>
-                    <a:pt x="265966" y="21815"/>
-                  </a:lnTo>
-                  <a:lnTo>
-                    <a:pt x="223745" y="5711"/>
-                  </a:lnTo>
-                  <a:lnTo>
-                    <a:pt x="176783" y="0"/>
-                  </a:lnTo>
-                  <a:close/>
-                </a:path>
-              </a:pathLst>
-            </a:custGeom>
-            <a:ln w="9525">
-              <a:solidFill>
-                <a:srgbClr val="000000"/>
-              </a:solidFill>
-            </a:ln>
-          </p:spPr>
-          <p:txBody>
-            <a:bodyPr wrap="square" lIns="0" tIns="0" rIns="0" bIns="0" rtlCol="0"/>
-            <a:lstStyle/>
-            <a:p>
-              <a:endParaRPr/>
-            </a:p>
-          </p:txBody>
-        </p:sp>
-        <p:sp>
-          <p:nvSpPr>
-            <p:cNvPr id="19" name="object 19">
-              <a:extLst>
-                <a:ext uri="{FF2B5EF4-FFF2-40B4-BE49-F238E27FC236}">
-                  <a16:creationId xmlns:a16="http://schemas.microsoft.com/office/drawing/2014/main" id="{A1DB270B-6C90-1BEC-3E32-3EC0BC5098CB}"/>
-                </a:ext>
-              </a:extLst>
-            </p:cNvPr>
-            <p:cNvSpPr/>
-            <p:nvPr/>
-          </p:nvSpPr>
-          <p:spPr>
-            <a:xfrm>
-              <a:off x="4674870" y="4936997"/>
-              <a:ext cx="354330" cy="321310"/>
-            </a:xfrm>
-            <a:custGeom>
-              <a:avLst/>
-              <a:gdLst/>
-              <a:ahLst/>
-              <a:cxnLst/>
-              <a:rect l="l" t="t" r="r" b="b"/>
-              <a:pathLst>
-                <a:path w="354329" h="321310">
-                  <a:moveTo>
-                    <a:pt x="354330" y="160782"/>
-                  </a:moveTo>
-                  <a:lnTo>
-                    <a:pt x="348008" y="117915"/>
-                  </a:lnTo>
-                  <a:lnTo>
-                    <a:pt x="330171" y="79473"/>
-                  </a:lnTo>
-                  <a:lnTo>
-                    <a:pt x="302514" y="46958"/>
-                  </a:lnTo>
-                  <a:lnTo>
-                    <a:pt x="266728" y="21872"/>
-                  </a:lnTo>
-                  <a:lnTo>
-                    <a:pt x="224507" y="5718"/>
-                  </a:lnTo>
-                  <a:lnTo>
-                    <a:pt x="177546" y="0"/>
-                  </a:lnTo>
-                  <a:lnTo>
-                    <a:pt x="130263" y="5718"/>
-                  </a:lnTo>
-                  <a:lnTo>
-                    <a:pt x="87827" y="21872"/>
-                  </a:lnTo>
-                  <a:lnTo>
-                    <a:pt x="51911" y="46958"/>
-                  </a:lnTo>
-                  <a:lnTo>
-                    <a:pt x="24186" y="79473"/>
-                  </a:lnTo>
-                  <a:lnTo>
-                    <a:pt x="6325" y="117915"/>
-                  </a:lnTo>
-                  <a:lnTo>
-                    <a:pt x="0" y="160782"/>
-                  </a:lnTo>
-                  <a:lnTo>
-                    <a:pt x="6325" y="203327"/>
-                  </a:lnTo>
-                  <a:lnTo>
-                    <a:pt x="24186" y="241554"/>
-                  </a:lnTo>
-                  <a:lnTo>
-                    <a:pt x="51911" y="273939"/>
-                  </a:lnTo>
-                  <a:lnTo>
-                    <a:pt x="87827" y="298958"/>
-                  </a:lnTo>
-                  <a:lnTo>
-                    <a:pt x="130263" y="315087"/>
-                  </a:lnTo>
-                  <a:lnTo>
-                    <a:pt x="177546" y="320802"/>
-                  </a:lnTo>
-                  <a:lnTo>
-                    <a:pt x="224507" y="315087"/>
-                  </a:lnTo>
-                  <a:lnTo>
-                    <a:pt x="266728" y="298958"/>
-                  </a:lnTo>
-                  <a:lnTo>
-                    <a:pt x="302514" y="273939"/>
-                  </a:lnTo>
-                  <a:lnTo>
-                    <a:pt x="330171" y="241554"/>
-                  </a:lnTo>
-                  <a:lnTo>
-                    <a:pt x="348008" y="203327"/>
-                  </a:lnTo>
-                  <a:lnTo>
-                    <a:pt x="354330" y="160782"/>
-                  </a:lnTo>
-                  <a:close/>
-                </a:path>
-              </a:pathLst>
-            </a:custGeom>
-            <a:solidFill>
-              <a:srgbClr val="EAEAEA"/>
-            </a:solidFill>
-          </p:spPr>
-          <p:txBody>
-            <a:bodyPr wrap="square" lIns="0" tIns="0" rIns="0" bIns="0" rtlCol="0"/>
-            <a:lstStyle/>
-            <a:p>
-              <a:endParaRPr/>
-            </a:p>
-          </p:txBody>
-        </p:sp>
-        <p:sp>
-          <p:nvSpPr>
-            <p:cNvPr id="20" name="object 20">
-              <a:extLst>
-                <a:ext uri="{FF2B5EF4-FFF2-40B4-BE49-F238E27FC236}">
-                  <a16:creationId xmlns:a16="http://schemas.microsoft.com/office/drawing/2014/main" id="{4C73C12E-052E-856D-1AB4-66D1D97BCADD}"/>
-                </a:ext>
-              </a:extLst>
-            </p:cNvPr>
-            <p:cNvSpPr/>
-            <p:nvPr/>
-          </p:nvSpPr>
-          <p:spPr>
-            <a:xfrm>
-              <a:off x="4674870" y="4936997"/>
-              <a:ext cx="354330" cy="321310"/>
-            </a:xfrm>
-            <a:custGeom>
-              <a:avLst/>
-              <a:gdLst/>
-              <a:ahLst/>
-              <a:cxnLst/>
-              <a:rect l="l" t="t" r="r" b="b"/>
-              <a:pathLst>
-                <a:path w="354329" h="321310">
-                  <a:moveTo>
-                    <a:pt x="177546" y="0"/>
-                  </a:moveTo>
-                  <a:lnTo>
-                    <a:pt x="130263" y="5718"/>
-                  </a:lnTo>
-                  <a:lnTo>
-                    <a:pt x="87827" y="21872"/>
-                  </a:lnTo>
-                  <a:lnTo>
-                    <a:pt x="51911" y="46958"/>
-                  </a:lnTo>
-                  <a:lnTo>
-                    <a:pt x="24186" y="79473"/>
-                  </a:lnTo>
-                  <a:lnTo>
-                    <a:pt x="6325" y="117915"/>
-                  </a:lnTo>
-                  <a:lnTo>
-                    <a:pt x="0" y="160782"/>
-                  </a:lnTo>
-                  <a:lnTo>
-                    <a:pt x="6325" y="203327"/>
-                  </a:lnTo>
-                  <a:lnTo>
-                    <a:pt x="24186" y="241554"/>
-                  </a:lnTo>
-                  <a:lnTo>
-                    <a:pt x="51911" y="273939"/>
-                  </a:lnTo>
-                  <a:lnTo>
-                    <a:pt x="87827" y="298958"/>
-                  </a:lnTo>
-                  <a:lnTo>
-                    <a:pt x="130263" y="315087"/>
-                  </a:lnTo>
-                  <a:lnTo>
-                    <a:pt x="177546" y="320802"/>
-                  </a:lnTo>
-                  <a:lnTo>
-                    <a:pt x="224507" y="315087"/>
-                  </a:lnTo>
-                  <a:lnTo>
-                    <a:pt x="266728" y="298958"/>
-                  </a:lnTo>
-                  <a:lnTo>
-                    <a:pt x="302514" y="273939"/>
-                  </a:lnTo>
-                  <a:lnTo>
-                    <a:pt x="330171" y="241554"/>
-                  </a:lnTo>
-                  <a:lnTo>
-                    <a:pt x="348008" y="203327"/>
-                  </a:lnTo>
-                  <a:lnTo>
-                    <a:pt x="354330" y="160782"/>
-                  </a:lnTo>
-                  <a:lnTo>
-                    <a:pt x="348008" y="117915"/>
-                  </a:lnTo>
-                  <a:lnTo>
-                    <a:pt x="330171" y="79473"/>
-                  </a:lnTo>
-                  <a:lnTo>
-                    <a:pt x="302514" y="46958"/>
-                  </a:lnTo>
-                  <a:lnTo>
-                    <a:pt x="266728" y="21872"/>
-                  </a:lnTo>
-                  <a:lnTo>
-                    <a:pt x="224507" y="5718"/>
-                  </a:lnTo>
-                  <a:lnTo>
-                    <a:pt x="177546" y="0"/>
-                  </a:lnTo>
-                  <a:close/>
-                </a:path>
-              </a:pathLst>
-            </a:custGeom>
-            <a:ln w="9525">
-              <a:solidFill>
-                <a:srgbClr val="000000"/>
-              </a:solidFill>
-            </a:ln>
-          </p:spPr>
-          <p:txBody>
-            <a:bodyPr wrap="square" lIns="0" tIns="0" rIns="0" bIns="0" rtlCol="0"/>
-            <a:lstStyle/>
-            <a:p>
-              <a:endParaRPr/>
-            </a:p>
-          </p:txBody>
-        </p:sp>
-        <p:sp>
-          <p:nvSpPr>
-            <p:cNvPr id="21" name="object 21">
-              <a:extLst>
-                <a:ext uri="{FF2B5EF4-FFF2-40B4-BE49-F238E27FC236}">
-                  <a16:creationId xmlns:a16="http://schemas.microsoft.com/office/drawing/2014/main" id="{2A0CE50F-CFE5-7901-46D0-FE7446B0A570}"/>
-                </a:ext>
-              </a:extLst>
-            </p:cNvPr>
-            <p:cNvSpPr/>
-            <p:nvPr/>
-          </p:nvSpPr>
-          <p:spPr>
-            <a:xfrm>
-              <a:off x="3256026" y="6537197"/>
-              <a:ext cx="353695" cy="321310"/>
-            </a:xfrm>
-            <a:custGeom>
-              <a:avLst/>
-              <a:gdLst/>
-              <a:ahLst/>
-              <a:cxnLst/>
-              <a:rect l="l" t="t" r="r" b="b"/>
-              <a:pathLst>
-                <a:path w="353695" h="321309">
-                  <a:moveTo>
-                    <a:pt x="353568" y="160782"/>
-                  </a:moveTo>
-                  <a:lnTo>
-                    <a:pt x="347246" y="117915"/>
-                  </a:lnTo>
-                  <a:lnTo>
-                    <a:pt x="329409" y="79473"/>
-                  </a:lnTo>
-                  <a:lnTo>
-                    <a:pt x="301752" y="46958"/>
-                  </a:lnTo>
-                  <a:lnTo>
-                    <a:pt x="265966" y="21872"/>
-                  </a:lnTo>
-                  <a:lnTo>
-                    <a:pt x="223745" y="5718"/>
-                  </a:lnTo>
-                  <a:lnTo>
-                    <a:pt x="176784" y="0"/>
-                  </a:lnTo>
-                  <a:lnTo>
-                    <a:pt x="129822" y="5718"/>
-                  </a:lnTo>
-                  <a:lnTo>
-                    <a:pt x="87601" y="21872"/>
-                  </a:lnTo>
-                  <a:lnTo>
-                    <a:pt x="51816" y="46958"/>
-                  </a:lnTo>
-                  <a:lnTo>
-                    <a:pt x="24158" y="79473"/>
-                  </a:lnTo>
-                  <a:lnTo>
-                    <a:pt x="6321" y="117915"/>
-                  </a:lnTo>
-                  <a:lnTo>
-                    <a:pt x="0" y="160782"/>
-                  </a:lnTo>
-                  <a:lnTo>
-                    <a:pt x="6321" y="203327"/>
-                  </a:lnTo>
-                  <a:lnTo>
-                    <a:pt x="24158" y="241554"/>
-                  </a:lnTo>
-                  <a:lnTo>
-                    <a:pt x="51816" y="273939"/>
-                  </a:lnTo>
-                  <a:lnTo>
-                    <a:pt x="87601" y="298958"/>
-                  </a:lnTo>
-                  <a:lnTo>
-                    <a:pt x="129822" y="315087"/>
-                  </a:lnTo>
-                  <a:lnTo>
-                    <a:pt x="176784" y="320802"/>
-                  </a:lnTo>
-                  <a:lnTo>
-                    <a:pt x="223745" y="315087"/>
-                  </a:lnTo>
-                  <a:lnTo>
-                    <a:pt x="265966" y="298958"/>
-                  </a:lnTo>
-                  <a:lnTo>
-                    <a:pt x="301752" y="273939"/>
-                  </a:lnTo>
-                  <a:lnTo>
-                    <a:pt x="329409" y="241554"/>
-                  </a:lnTo>
-                  <a:lnTo>
-                    <a:pt x="347246" y="203327"/>
-                  </a:lnTo>
-                  <a:lnTo>
-                    <a:pt x="353568" y="160782"/>
-                  </a:lnTo>
-                  <a:close/>
-                </a:path>
-              </a:pathLst>
-            </a:custGeom>
-            <a:solidFill>
-              <a:srgbClr val="EAEAEA"/>
-            </a:solidFill>
-          </p:spPr>
-          <p:txBody>
-            <a:bodyPr wrap="square" lIns="0" tIns="0" rIns="0" bIns="0" rtlCol="0"/>
-            <a:lstStyle/>
-            <a:p>
-              <a:endParaRPr/>
-            </a:p>
-          </p:txBody>
-        </p:sp>
-        <p:sp>
-          <p:nvSpPr>
-            <p:cNvPr id="22" name="object 22">
-              <a:extLst>
-                <a:ext uri="{FF2B5EF4-FFF2-40B4-BE49-F238E27FC236}">
-                  <a16:creationId xmlns:a16="http://schemas.microsoft.com/office/drawing/2014/main" id="{2E9AA499-BF3B-ADA8-D3E5-966CB86D0916}"/>
-                </a:ext>
-              </a:extLst>
-            </p:cNvPr>
-            <p:cNvSpPr/>
-            <p:nvPr/>
-          </p:nvSpPr>
-          <p:spPr>
-            <a:xfrm>
-              <a:off x="3256026" y="6537197"/>
-              <a:ext cx="353695" cy="321310"/>
-            </a:xfrm>
-            <a:custGeom>
-              <a:avLst/>
-              <a:gdLst/>
-              <a:ahLst/>
-              <a:cxnLst/>
-              <a:rect l="l" t="t" r="r" b="b"/>
-              <a:pathLst>
-                <a:path w="353695" h="321309">
-                  <a:moveTo>
-                    <a:pt x="176784" y="0"/>
-                  </a:moveTo>
-                  <a:lnTo>
-                    <a:pt x="129822" y="5718"/>
-                  </a:lnTo>
-                  <a:lnTo>
-                    <a:pt x="87601" y="21872"/>
-                  </a:lnTo>
-                  <a:lnTo>
-                    <a:pt x="51816" y="46958"/>
-                  </a:lnTo>
-                  <a:lnTo>
-                    <a:pt x="24158" y="79473"/>
-                  </a:lnTo>
-                  <a:lnTo>
-                    <a:pt x="6321" y="117915"/>
-                  </a:lnTo>
-                  <a:lnTo>
-                    <a:pt x="0" y="160782"/>
-                  </a:lnTo>
-                  <a:lnTo>
-                    <a:pt x="6321" y="203327"/>
-                  </a:lnTo>
-                  <a:lnTo>
-                    <a:pt x="24158" y="241554"/>
-                  </a:lnTo>
-                  <a:lnTo>
-                    <a:pt x="51816" y="273939"/>
-                  </a:lnTo>
-                  <a:lnTo>
-                    <a:pt x="87601" y="298958"/>
-                  </a:lnTo>
-                  <a:lnTo>
-                    <a:pt x="129822" y="315087"/>
-                  </a:lnTo>
-                  <a:lnTo>
-                    <a:pt x="176784" y="320802"/>
-                  </a:lnTo>
-                  <a:lnTo>
-                    <a:pt x="223745" y="315087"/>
-                  </a:lnTo>
-                  <a:lnTo>
-                    <a:pt x="265966" y="298958"/>
-                  </a:lnTo>
-                  <a:lnTo>
-                    <a:pt x="301752" y="273939"/>
-                  </a:lnTo>
-                  <a:lnTo>
-                    <a:pt x="329409" y="241554"/>
-                  </a:lnTo>
-                  <a:lnTo>
-                    <a:pt x="347246" y="203327"/>
-                  </a:lnTo>
-                  <a:lnTo>
-                    <a:pt x="353568" y="160782"/>
-                  </a:lnTo>
-                  <a:lnTo>
-                    <a:pt x="347246" y="117915"/>
-                  </a:lnTo>
-                  <a:lnTo>
-                    <a:pt x="329409" y="79473"/>
-                  </a:lnTo>
-                  <a:lnTo>
-                    <a:pt x="301752" y="46958"/>
-                  </a:lnTo>
-                  <a:lnTo>
-                    <a:pt x="265966" y="21872"/>
-                  </a:lnTo>
-                  <a:lnTo>
-                    <a:pt x="223745" y="5718"/>
-                  </a:lnTo>
-                  <a:lnTo>
-                    <a:pt x="176784" y="0"/>
-                  </a:lnTo>
-                  <a:close/>
-                </a:path>
-              </a:pathLst>
-            </a:custGeom>
-            <a:ln w="9525">
-              <a:solidFill>
-                <a:srgbClr val="000000"/>
-              </a:solidFill>
-            </a:ln>
-          </p:spPr>
-          <p:txBody>
-            <a:bodyPr wrap="square" lIns="0" tIns="0" rIns="0" bIns="0" rtlCol="0"/>
-            <a:lstStyle/>
-            <a:p>
-              <a:endParaRPr/>
-            </a:p>
-          </p:txBody>
-        </p:sp>
-        <p:sp>
-          <p:nvSpPr>
-            <p:cNvPr id="23" name="object 23">
-              <a:extLst>
-                <a:ext uri="{FF2B5EF4-FFF2-40B4-BE49-F238E27FC236}">
-                  <a16:creationId xmlns:a16="http://schemas.microsoft.com/office/drawing/2014/main" id="{70C96623-C3C4-970E-95A1-BBC5F97F04E3}"/>
-                </a:ext>
-              </a:extLst>
-            </p:cNvPr>
-            <p:cNvSpPr/>
-            <p:nvPr/>
-          </p:nvSpPr>
-          <p:spPr>
-            <a:xfrm>
-              <a:off x="2901695" y="5578602"/>
-              <a:ext cx="354330" cy="319405"/>
-            </a:xfrm>
-            <a:custGeom>
-              <a:avLst/>
-              <a:gdLst/>
-              <a:ahLst/>
-              <a:cxnLst/>
-              <a:rect l="l" t="t" r="r" b="b"/>
-              <a:pathLst>
-                <a:path w="354329" h="319404">
-                  <a:moveTo>
-                    <a:pt x="354329" y="159258"/>
-                  </a:moveTo>
-                  <a:lnTo>
-                    <a:pt x="348008" y="117034"/>
-                  </a:lnTo>
-                  <a:lnTo>
-                    <a:pt x="330171" y="79022"/>
-                  </a:lnTo>
-                  <a:lnTo>
-                    <a:pt x="302513" y="46767"/>
-                  </a:lnTo>
-                  <a:lnTo>
-                    <a:pt x="266728" y="21815"/>
-                  </a:lnTo>
-                  <a:lnTo>
-                    <a:pt x="224507" y="5711"/>
-                  </a:lnTo>
-                  <a:lnTo>
-                    <a:pt x="177545" y="0"/>
-                  </a:lnTo>
-                  <a:lnTo>
-                    <a:pt x="130263" y="5711"/>
-                  </a:lnTo>
-                  <a:lnTo>
-                    <a:pt x="87827" y="21815"/>
-                  </a:lnTo>
-                  <a:lnTo>
-                    <a:pt x="51911" y="46767"/>
-                  </a:lnTo>
-                  <a:lnTo>
-                    <a:pt x="24186" y="79022"/>
-                  </a:lnTo>
-                  <a:lnTo>
-                    <a:pt x="6325" y="117034"/>
-                  </a:lnTo>
-                  <a:lnTo>
-                    <a:pt x="0" y="159258"/>
-                  </a:lnTo>
-                  <a:lnTo>
-                    <a:pt x="6325" y="201803"/>
-                  </a:lnTo>
-                  <a:lnTo>
-                    <a:pt x="24186" y="240030"/>
-                  </a:lnTo>
-                  <a:lnTo>
-                    <a:pt x="51911" y="272415"/>
-                  </a:lnTo>
-                  <a:lnTo>
-                    <a:pt x="87827" y="297434"/>
-                  </a:lnTo>
-                  <a:lnTo>
-                    <a:pt x="130263" y="313563"/>
-                  </a:lnTo>
-                  <a:lnTo>
-                    <a:pt x="177545" y="319278"/>
-                  </a:lnTo>
-                  <a:lnTo>
-                    <a:pt x="224507" y="313563"/>
-                  </a:lnTo>
-                  <a:lnTo>
-                    <a:pt x="266728" y="297434"/>
-                  </a:lnTo>
-                  <a:lnTo>
-                    <a:pt x="302513" y="272415"/>
-                  </a:lnTo>
-                  <a:lnTo>
-                    <a:pt x="330171" y="240030"/>
-                  </a:lnTo>
-                  <a:lnTo>
-                    <a:pt x="348008" y="201803"/>
-                  </a:lnTo>
-                  <a:lnTo>
-                    <a:pt x="354329" y="159258"/>
-                  </a:lnTo>
-                  <a:close/>
-                </a:path>
-              </a:pathLst>
-            </a:custGeom>
-            <a:solidFill>
-              <a:srgbClr val="EAEAEA"/>
-            </a:solidFill>
-          </p:spPr>
-          <p:txBody>
-            <a:bodyPr wrap="square" lIns="0" tIns="0" rIns="0" bIns="0" rtlCol="0"/>
-            <a:lstStyle/>
-            <a:p>
-              <a:endParaRPr/>
-            </a:p>
-          </p:txBody>
-        </p:sp>
-        <p:sp>
-          <p:nvSpPr>
-            <p:cNvPr id="24" name="object 24">
-              <a:extLst>
-                <a:ext uri="{FF2B5EF4-FFF2-40B4-BE49-F238E27FC236}">
-                  <a16:creationId xmlns:a16="http://schemas.microsoft.com/office/drawing/2014/main" id="{66105944-9B85-013D-E253-2309E7249C0B}"/>
-                </a:ext>
-              </a:extLst>
-            </p:cNvPr>
-            <p:cNvSpPr/>
-            <p:nvPr/>
-          </p:nvSpPr>
-          <p:spPr>
-            <a:xfrm>
-              <a:off x="2901695" y="5578602"/>
-              <a:ext cx="354330" cy="319405"/>
-            </a:xfrm>
-            <a:custGeom>
-              <a:avLst/>
-              <a:gdLst/>
-              <a:ahLst/>
-              <a:cxnLst/>
-              <a:rect l="l" t="t" r="r" b="b"/>
-              <a:pathLst>
-                <a:path w="354329" h="319404">
-                  <a:moveTo>
-                    <a:pt x="177545" y="0"/>
-                  </a:moveTo>
-                  <a:lnTo>
-                    <a:pt x="130263" y="5711"/>
-                  </a:lnTo>
-                  <a:lnTo>
-                    <a:pt x="87827" y="21815"/>
-                  </a:lnTo>
-                  <a:lnTo>
-                    <a:pt x="51911" y="46767"/>
-                  </a:lnTo>
-                  <a:lnTo>
-                    <a:pt x="24186" y="79022"/>
-                  </a:lnTo>
-                  <a:lnTo>
-                    <a:pt x="6325" y="117034"/>
-                  </a:lnTo>
-                  <a:lnTo>
-                    <a:pt x="0" y="159258"/>
-                  </a:lnTo>
-                  <a:lnTo>
-                    <a:pt x="6325" y="201803"/>
-                  </a:lnTo>
-                  <a:lnTo>
-                    <a:pt x="24186" y="240030"/>
-                  </a:lnTo>
-                  <a:lnTo>
-                    <a:pt x="51911" y="272415"/>
-                  </a:lnTo>
-                  <a:lnTo>
-                    <a:pt x="87827" y="297434"/>
-                  </a:lnTo>
-                  <a:lnTo>
-                    <a:pt x="130263" y="313563"/>
-                  </a:lnTo>
-                  <a:lnTo>
-                    <a:pt x="177545" y="319278"/>
-                  </a:lnTo>
-                  <a:lnTo>
-                    <a:pt x="224507" y="313563"/>
-                  </a:lnTo>
-                  <a:lnTo>
-                    <a:pt x="266728" y="297434"/>
-                  </a:lnTo>
-                  <a:lnTo>
-                    <a:pt x="302513" y="272415"/>
-                  </a:lnTo>
-                  <a:lnTo>
-                    <a:pt x="330171" y="240030"/>
-                  </a:lnTo>
-                  <a:lnTo>
-                    <a:pt x="348008" y="201803"/>
-                  </a:lnTo>
-                  <a:lnTo>
-                    <a:pt x="354329" y="159258"/>
-                  </a:lnTo>
-                  <a:lnTo>
-                    <a:pt x="348008" y="117034"/>
-                  </a:lnTo>
-                  <a:lnTo>
-                    <a:pt x="330171" y="79022"/>
-                  </a:lnTo>
-                  <a:lnTo>
-                    <a:pt x="302513" y="46767"/>
-                  </a:lnTo>
-                  <a:lnTo>
-                    <a:pt x="266728" y="21815"/>
-                  </a:lnTo>
-                  <a:lnTo>
-                    <a:pt x="224507" y="5711"/>
-                  </a:lnTo>
-                  <a:lnTo>
-                    <a:pt x="177545" y="0"/>
-                  </a:lnTo>
-                  <a:close/>
-                </a:path>
-              </a:pathLst>
-            </a:custGeom>
-            <a:ln w="9525">
-              <a:solidFill>
-                <a:srgbClr val="000000"/>
-              </a:solidFill>
-            </a:ln>
-          </p:spPr>
-          <p:txBody>
-            <a:bodyPr wrap="square" lIns="0" tIns="0" rIns="0" bIns="0" rtlCol="0"/>
-            <a:lstStyle/>
-            <a:p>
-              <a:endParaRPr/>
-            </a:p>
-          </p:txBody>
-        </p:sp>
-        <p:sp>
-          <p:nvSpPr>
-            <p:cNvPr id="25" name="object 25">
-              <a:extLst>
-                <a:ext uri="{FF2B5EF4-FFF2-40B4-BE49-F238E27FC236}">
-                  <a16:creationId xmlns:a16="http://schemas.microsoft.com/office/drawing/2014/main" id="{ADC80B5C-8294-4B16-1801-22D4535A34DB}"/>
-                </a:ext>
-              </a:extLst>
-            </p:cNvPr>
-            <p:cNvSpPr/>
-            <p:nvPr/>
-          </p:nvSpPr>
-          <p:spPr>
-            <a:xfrm>
-              <a:off x="4319778" y="6003797"/>
-              <a:ext cx="355600" cy="321310"/>
-            </a:xfrm>
-            <a:custGeom>
-              <a:avLst/>
-              <a:gdLst/>
-              <a:ahLst/>
-              <a:cxnLst/>
-              <a:rect l="l" t="t" r="r" b="b"/>
-              <a:pathLst>
-                <a:path w="355600" h="321310">
-                  <a:moveTo>
-                    <a:pt x="355092" y="160782"/>
-                  </a:moveTo>
-                  <a:lnTo>
-                    <a:pt x="348766" y="117915"/>
-                  </a:lnTo>
-                  <a:lnTo>
-                    <a:pt x="330905" y="79473"/>
-                  </a:lnTo>
-                  <a:lnTo>
-                    <a:pt x="303180" y="46958"/>
-                  </a:lnTo>
-                  <a:lnTo>
-                    <a:pt x="267264" y="21872"/>
-                  </a:lnTo>
-                  <a:lnTo>
-                    <a:pt x="224828" y="5718"/>
-                  </a:lnTo>
-                  <a:lnTo>
-                    <a:pt x="177546" y="0"/>
-                  </a:lnTo>
-                  <a:lnTo>
-                    <a:pt x="130263" y="5718"/>
-                  </a:lnTo>
-                  <a:lnTo>
-                    <a:pt x="87827" y="21872"/>
-                  </a:lnTo>
-                  <a:lnTo>
-                    <a:pt x="51911" y="46958"/>
-                  </a:lnTo>
-                  <a:lnTo>
-                    <a:pt x="24186" y="79473"/>
-                  </a:lnTo>
-                  <a:lnTo>
-                    <a:pt x="6325" y="117915"/>
-                  </a:lnTo>
-                  <a:lnTo>
-                    <a:pt x="0" y="160782"/>
-                  </a:lnTo>
-                  <a:lnTo>
-                    <a:pt x="6325" y="203327"/>
-                  </a:lnTo>
-                  <a:lnTo>
-                    <a:pt x="24186" y="241554"/>
-                  </a:lnTo>
-                  <a:lnTo>
-                    <a:pt x="51911" y="273939"/>
-                  </a:lnTo>
-                  <a:lnTo>
-                    <a:pt x="87827" y="298958"/>
-                  </a:lnTo>
-                  <a:lnTo>
-                    <a:pt x="130263" y="315087"/>
-                  </a:lnTo>
-                  <a:lnTo>
-                    <a:pt x="177546" y="320802"/>
-                  </a:lnTo>
-                  <a:lnTo>
-                    <a:pt x="224828" y="315087"/>
-                  </a:lnTo>
-                  <a:lnTo>
-                    <a:pt x="267264" y="298958"/>
-                  </a:lnTo>
-                  <a:lnTo>
-                    <a:pt x="303180" y="273939"/>
-                  </a:lnTo>
-                  <a:lnTo>
-                    <a:pt x="330905" y="241554"/>
-                  </a:lnTo>
-                  <a:lnTo>
-                    <a:pt x="348766" y="203327"/>
-                  </a:lnTo>
-                  <a:lnTo>
-                    <a:pt x="355092" y="160782"/>
-                  </a:lnTo>
-                  <a:close/>
-                </a:path>
-              </a:pathLst>
-            </a:custGeom>
-            <a:solidFill>
-              <a:srgbClr val="EAEAEA"/>
-            </a:solidFill>
-          </p:spPr>
-          <p:txBody>
-            <a:bodyPr wrap="square" lIns="0" tIns="0" rIns="0" bIns="0" rtlCol="0"/>
-            <a:lstStyle/>
-            <a:p>
-              <a:endParaRPr/>
-            </a:p>
-          </p:txBody>
-        </p:sp>
-        <p:sp>
-          <p:nvSpPr>
-            <p:cNvPr id="26" name="object 26">
-              <a:extLst>
-                <a:ext uri="{FF2B5EF4-FFF2-40B4-BE49-F238E27FC236}">
-                  <a16:creationId xmlns:a16="http://schemas.microsoft.com/office/drawing/2014/main" id="{5922F57E-438A-89F1-9C9C-B141CF054BDB}"/>
-                </a:ext>
-              </a:extLst>
-            </p:cNvPr>
-            <p:cNvSpPr/>
-            <p:nvPr/>
-          </p:nvSpPr>
-          <p:spPr>
-            <a:xfrm>
-              <a:off x="4319778" y="6003797"/>
-              <a:ext cx="355600" cy="321310"/>
-            </a:xfrm>
-            <a:custGeom>
-              <a:avLst/>
-              <a:gdLst/>
-              <a:ahLst/>
-              <a:cxnLst/>
-              <a:rect l="l" t="t" r="r" b="b"/>
-              <a:pathLst>
-                <a:path w="355600" h="321310">
-                  <a:moveTo>
-                    <a:pt x="177546" y="0"/>
-                  </a:moveTo>
-                  <a:lnTo>
-                    <a:pt x="130263" y="5718"/>
-                  </a:lnTo>
-                  <a:lnTo>
-                    <a:pt x="87827" y="21872"/>
-                  </a:lnTo>
-                  <a:lnTo>
-                    <a:pt x="51911" y="46958"/>
-                  </a:lnTo>
-                  <a:lnTo>
-                    <a:pt x="24186" y="79473"/>
-                  </a:lnTo>
-                  <a:lnTo>
-                    <a:pt x="6325" y="117915"/>
-                  </a:lnTo>
-                  <a:lnTo>
-                    <a:pt x="0" y="160782"/>
-                  </a:lnTo>
-                  <a:lnTo>
-                    <a:pt x="6325" y="203327"/>
-                  </a:lnTo>
-                  <a:lnTo>
-                    <a:pt x="24186" y="241554"/>
-                  </a:lnTo>
-                  <a:lnTo>
-                    <a:pt x="51911" y="273939"/>
-                  </a:lnTo>
-                  <a:lnTo>
-                    <a:pt x="87827" y="298958"/>
-                  </a:lnTo>
-                  <a:lnTo>
-                    <a:pt x="130263" y="315087"/>
-                  </a:lnTo>
-                  <a:lnTo>
-                    <a:pt x="177546" y="320802"/>
-                  </a:lnTo>
-                  <a:lnTo>
-                    <a:pt x="224828" y="315087"/>
-                  </a:lnTo>
-                  <a:lnTo>
-                    <a:pt x="267264" y="298958"/>
-                  </a:lnTo>
-                  <a:lnTo>
-                    <a:pt x="303180" y="273939"/>
-                  </a:lnTo>
-                  <a:lnTo>
-                    <a:pt x="330905" y="241554"/>
-                  </a:lnTo>
-                  <a:lnTo>
-                    <a:pt x="348766" y="203327"/>
-                  </a:lnTo>
-                  <a:lnTo>
-                    <a:pt x="355092" y="160782"/>
-                  </a:lnTo>
-                  <a:lnTo>
-                    <a:pt x="348766" y="117915"/>
-                  </a:lnTo>
-                  <a:lnTo>
-                    <a:pt x="330905" y="79473"/>
-                  </a:lnTo>
-                  <a:lnTo>
-                    <a:pt x="303180" y="46958"/>
-                  </a:lnTo>
-                  <a:lnTo>
-                    <a:pt x="267264" y="21872"/>
-                  </a:lnTo>
-                  <a:lnTo>
-                    <a:pt x="224828" y="5718"/>
-                  </a:lnTo>
-                  <a:lnTo>
-                    <a:pt x="177546" y="0"/>
-                  </a:lnTo>
-                  <a:close/>
-                </a:path>
-              </a:pathLst>
-            </a:custGeom>
-            <a:ln w="9525">
-              <a:solidFill>
-                <a:srgbClr val="000000"/>
-              </a:solidFill>
-            </a:ln>
-          </p:spPr>
-          <p:txBody>
-            <a:bodyPr wrap="square" lIns="0" tIns="0" rIns="0" bIns="0" rtlCol="0"/>
-            <a:lstStyle/>
-            <a:p>
-              <a:endParaRPr/>
-            </a:p>
-          </p:txBody>
-        </p:sp>
-        <p:sp>
-          <p:nvSpPr>
-            <p:cNvPr id="27" name="object 27">
-              <a:extLst>
-                <a:ext uri="{FF2B5EF4-FFF2-40B4-BE49-F238E27FC236}">
-                  <a16:creationId xmlns:a16="http://schemas.microsoft.com/office/drawing/2014/main" id="{C0064F3B-D87F-0888-E54D-40E198CE951C}"/>
-                </a:ext>
-              </a:extLst>
-            </p:cNvPr>
-            <p:cNvSpPr/>
-            <p:nvPr/>
-          </p:nvSpPr>
-          <p:spPr>
-            <a:xfrm>
-              <a:off x="1365503" y="3978402"/>
-              <a:ext cx="471170" cy="852805"/>
-            </a:xfrm>
-            <a:custGeom>
-              <a:avLst/>
-              <a:gdLst/>
-              <a:ahLst/>
-              <a:cxnLst/>
-              <a:rect l="l" t="t" r="r" b="b"/>
-              <a:pathLst>
-                <a:path w="471169" h="852804">
-                  <a:moveTo>
-                    <a:pt x="470915" y="0"/>
-                  </a:moveTo>
-                  <a:lnTo>
-                    <a:pt x="0" y="852678"/>
-                  </a:lnTo>
-                </a:path>
-              </a:pathLst>
-            </a:custGeom>
-            <a:ln w="50800">
-              <a:solidFill>
-                <a:srgbClr val="FF0000"/>
-              </a:solidFill>
-            </a:ln>
-          </p:spPr>
-          <p:txBody>
-            <a:bodyPr wrap="square" lIns="0" tIns="0" rIns="0" bIns="0" rtlCol="0"/>
-            <a:lstStyle/>
-            <a:p>
-              <a:endParaRPr/>
-            </a:p>
-          </p:txBody>
-        </p:sp>
-        <p:sp>
-          <p:nvSpPr>
-            <p:cNvPr id="28" name="object 28">
-              <a:extLst>
-                <a:ext uri="{FF2B5EF4-FFF2-40B4-BE49-F238E27FC236}">
-                  <a16:creationId xmlns:a16="http://schemas.microsoft.com/office/drawing/2014/main" id="{B8BD78C7-AFFC-C7BD-923A-FAE5A07E33A4}"/>
-                </a:ext>
-              </a:extLst>
-            </p:cNvPr>
-            <p:cNvSpPr/>
-            <p:nvPr/>
-          </p:nvSpPr>
-          <p:spPr>
-            <a:xfrm>
-              <a:off x="2073401" y="3870197"/>
-              <a:ext cx="1536700" cy="108585"/>
-            </a:xfrm>
-            <a:custGeom>
-              <a:avLst/>
-              <a:gdLst/>
-              <a:ahLst/>
-              <a:cxnLst/>
-              <a:rect l="l" t="t" r="r" b="b"/>
-              <a:pathLst>
-                <a:path w="1536700" h="108585">
-                  <a:moveTo>
-                    <a:pt x="0" y="0"/>
-                  </a:moveTo>
-                  <a:lnTo>
-                    <a:pt x="1536192" y="108203"/>
-                  </a:lnTo>
-                </a:path>
-              </a:pathLst>
-            </a:custGeom>
-            <a:ln w="50800">
-              <a:solidFill>
-                <a:srgbClr val="FF0000"/>
-              </a:solidFill>
-            </a:ln>
-          </p:spPr>
-          <p:txBody>
-            <a:bodyPr wrap="square" lIns="0" tIns="0" rIns="0" bIns="0" rtlCol="0"/>
-            <a:lstStyle/>
-            <a:p>
-              <a:endParaRPr/>
-            </a:p>
-          </p:txBody>
-        </p:sp>
-        <p:sp>
-          <p:nvSpPr>
-            <p:cNvPr id="29" name="object 29">
-              <a:extLst>
-                <a:ext uri="{FF2B5EF4-FFF2-40B4-BE49-F238E27FC236}">
-                  <a16:creationId xmlns:a16="http://schemas.microsoft.com/office/drawing/2014/main" id="{E5028630-2003-6C39-CE1E-2E4EFDC93226}"/>
-                </a:ext>
-              </a:extLst>
-            </p:cNvPr>
-            <p:cNvSpPr/>
-            <p:nvPr/>
-          </p:nvSpPr>
-          <p:spPr>
-            <a:xfrm>
-              <a:off x="1482852" y="5045202"/>
-              <a:ext cx="1419225" cy="639445"/>
-            </a:xfrm>
-            <a:custGeom>
-              <a:avLst/>
-              <a:gdLst/>
-              <a:ahLst/>
-              <a:cxnLst/>
-              <a:rect l="l" t="t" r="r" b="b"/>
-              <a:pathLst>
-                <a:path w="1419225" h="639445">
-                  <a:moveTo>
-                    <a:pt x="0" y="0"/>
-                  </a:moveTo>
-                  <a:lnTo>
-                    <a:pt x="1418844" y="639318"/>
-                  </a:lnTo>
-                </a:path>
-              </a:pathLst>
-            </a:custGeom>
-            <a:ln w="9525">
-              <a:solidFill>
-                <a:srgbClr val="000000"/>
-              </a:solidFill>
-            </a:ln>
-          </p:spPr>
-          <p:txBody>
-            <a:bodyPr wrap="square" lIns="0" tIns="0" rIns="0" bIns="0" rtlCol="0"/>
-            <a:lstStyle/>
-            <a:p>
-              <a:endParaRPr/>
-            </a:p>
-          </p:txBody>
-        </p:sp>
-        <p:sp>
-          <p:nvSpPr>
-            <p:cNvPr id="30" name="object 30">
-              <a:extLst>
-                <a:ext uri="{FF2B5EF4-FFF2-40B4-BE49-F238E27FC236}">
-                  <a16:creationId xmlns:a16="http://schemas.microsoft.com/office/drawing/2014/main" id="{1CCCC95F-6303-E625-57A6-0ED67E7CB265}"/>
-                </a:ext>
-              </a:extLst>
-            </p:cNvPr>
-            <p:cNvSpPr/>
-            <p:nvPr/>
-          </p:nvSpPr>
-          <p:spPr>
-            <a:xfrm>
-              <a:off x="1482852" y="4724400"/>
-              <a:ext cx="1183005" cy="212725"/>
-            </a:xfrm>
-            <a:custGeom>
-              <a:avLst/>
-              <a:gdLst/>
-              <a:ahLst/>
-              <a:cxnLst/>
-              <a:rect l="l" t="t" r="r" b="b"/>
-              <a:pathLst>
-                <a:path w="1183005" h="212725">
-                  <a:moveTo>
-                    <a:pt x="0" y="212598"/>
-                  </a:moveTo>
-                  <a:lnTo>
-                    <a:pt x="1182624" y="0"/>
-                  </a:lnTo>
-                </a:path>
-              </a:pathLst>
-            </a:custGeom>
-            <a:ln w="50800">
-              <a:solidFill>
-                <a:srgbClr val="FF0000"/>
-              </a:solidFill>
-            </a:ln>
-          </p:spPr>
-          <p:txBody>
-            <a:bodyPr wrap="square" lIns="0" tIns="0" rIns="0" bIns="0" rtlCol="0"/>
-            <a:lstStyle/>
-            <a:p>
-              <a:endParaRPr/>
-            </a:p>
-          </p:txBody>
-        </p:sp>
-        <p:sp>
-          <p:nvSpPr>
-            <p:cNvPr id="31" name="object 31">
-              <a:extLst>
-                <a:ext uri="{FF2B5EF4-FFF2-40B4-BE49-F238E27FC236}">
-                  <a16:creationId xmlns:a16="http://schemas.microsoft.com/office/drawing/2014/main" id="{C31610EA-992C-3262-36EC-C8A2B3755999}"/>
-                </a:ext>
-              </a:extLst>
-            </p:cNvPr>
-            <p:cNvSpPr/>
-            <p:nvPr/>
-          </p:nvSpPr>
-          <p:spPr>
-            <a:xfrm>
-              <a:off x="3846576" y="4191000"/>
-              <a:ext cx="592455" cy="1812925"/>
-            </a:xfrm>
-            <a:custGeom>
-              <a:avLst/>
-              <a:gdLst/>
-              <a:ahLst/>
-              <a:cxnLst/>
-              <a:rect l="l" t="t" r="r" b="b"/>
-              <a:pathLst>
-                <a:path w="592454" h="1812925">
-                  <a:moveTo>
-                    <a:pt x="0" y="0"/>
-                  </a:moveTo>
-                  <a:lnTo>
-                    <a:pt x="592074" y="1812798"/>
-                  </a:lnTo>
-                </a:path>
-              </a:pathLst>
-            </a:custGeom>
-            <a:ln w="9525">
-              <a:solidFill>
-                <a:srgbClr val="000000"/>
-              </a:solidFill>
-            </a:ln>
-          </p:spPr>
-          <p:txBody>
-            <a:bodyPr wrap="square" lIns="0" tIns="0" rIns="0" bIns="0" rtlCol="0"/>
-            <a:lstStyle/>
-            <a:p>
-              <a:endParaRPr/>
-            </a:p>
-          </p:txBody>
-        </p:sp>
-        <p:sp>
-          <p:nvSpPr>
-            <p:cNvPr id="32" name="object 32">
-              <a:extLst>
-                <a:ext uri="{FF2B5EF4-FFF2-40B4-BE49-F238E27FC236}">
-                  <a16:creationId xmlns:a16="http://schemas.microsoft.com/office/drawing/2014/main" id="{EC90C340-77D2-8141-C5A2-51F0601339FA}"/>
-                </a:ext>
-              </a:extLst>
-            </p:cNvPr>
-            <p:cNvSpPr/>
-            <p:nvPr/>
-          </p:nvSpPr>
-          <p:spPr>
-            <a:xfrm>
-              <a:off x="3890771" y="4123944"/>
-              <a:ext cx="829310" cy="854710"/>
-            </a:xfrm>
-            <a:custGeom>
-              <a:avLst/>
-              <a:gdLst/>
-              <a:ahLst/>
-              <a:cxnLst/>
-              <a:rect l="l" t="t" r="r" b="b"/>
-              <a:pathLst>
-                <a:path w="829310" h="854710">
-                  <a:moveTo>
-                    <a:pt x="0" y="0"/>
-                  </a:moveTo>
-                  <a:lnTo>
-                    <a:pt x="829056" y="854202"/>
-                  </a:lnTo>
-                </a:path>
-              </a:pathLst>
-            </a:custGeom>
-            <a:ln w="50800">
-              <a:solidFill>
-                <a:srgbClr val="FF0000"/>
-              </a:solidFill>
-            </a:ln>
-          </p:spPr>
-          <p:txBody>
-            <a:bodyPr wrap="square" lIns="0" tIns="0" rIns="0" bIns="0" rtlCol="0"/>
-            <a:lstStyle/>
-            <a:p>
-              <a:endParaRPr/>
-            </a:p>
-          </p:txBody>
-        </p:sp>
-        <p:sp>
-          <p:nvSpPr>
-            <p:cNvPr id="33" name="object 33">
-              <a:extLst>
-                <a:ext uri="{FF2B5EF4-FFF2-40B4-BE49-F238E27FC236}">
-                  <a16:creationId xmlns:a16="http://schemas.microsoft.com/office/drawing/2014/main" id="{5CC8F698-994D-F274-0ABB-B72785555B14}"/>
-                </a:ext>
-              </a:extLst>
-            </p:cNvPr>
-            <p:cNvSpPr/>
-            <p:nvPr/>
-          </p:nvSpPr>
-          <p:spPr>
-            <a:xfrm>
-              <a:off x="4555997" y="5257800"/>
-              <a:ext cx="237490" cy="746125"/>
-            </a:xfrm>
-            <a:custGeom>
-              <a:avLst/>
-              <a:gdLst/>
-              <a:ahLst/>
-              <a:cxnLst/>
-              <a:rect l="l" t="t" r="r" b="b"/>
-              <a:pathLst>
-                <a:path w="237489" h="746125">
-                  <a:moveTo>
-                    <a:pt x="236982" y="0"/>
-                  </a:moveTo>
-                  <a:lnTo>
-                    <a:pt x="0" y="745998"/>
-                  </a:lnTo>
-                </a:path>
-              </a:pathLst>
-            </a:custGeom>
-            <a:ln w="50800">
-              <a:solidFill>
-                <a:srgbClr val="FF0000"/>
-              </a:solidFill>
-            </a:ln>
-          </p:spPr>
-          <p:txBody>
-            <a:bodyPr wrap="square" lIns="0" tIns="0" rIns="0" bIns="0" rtlCol="0"/>
-            <a:lstStyle/>
-            <a:p>
-              <a:endParaRPr/>
-            </a:p>
-          </p:txBody>
-        </p:sp>
-        <p:sp>
-          <p:nvSpPr>
-            <p:cNvPr id="34" name="object 34">
-              <a:extLst>
-                <a:ext uri="{FF2B5EF4-FFF2-40B4-BE49-F238E27FC236}">
-                  <a16:creationId xmlns:a16="http://schemas.microsoft.com/office/drawing/2014/main" id="{C387EA1B-0C7A-71EE-C9BD-82E9EC7DA060}"/>
-                </a:ext>
-              </a:extLst>
-            </p:cNvPr>
-            <p:cNvSpPr/>
-            <p:nvPr/>
-          </p:nvSpPr>
-          <p:spPr>
-            <a:xfrm>
-              <a:off x="3138677" y="4191000"/>
-              <a:ext cx="590550" cy="1388110"/>
-            </a:xfrm>
-            <a:custGeom>
-              <a:avLst/>
-              <a:gdLst/>
-              <a:ahLst/>
-              <a:cxnLst/>
-              <a:rect l="l" t="t" r="r" b="b"/>
-              <a:pathLst>
-                <a:path w="590550" h="1388110">
-                  <a:moveTo>
-                    <a:pt x="590550" y="0"/>
-                  </a:moveTo>
-                  <a:lnTo>
-                    <a:pt x="0" y="1387602"/>
-                  </a:lnTo>
-                </a:path>
-              </a:pathLst>
-            </a:custGeom>
-            <a:ln w="50799">
-              <a:solidFill>
-                <a:srgbClr val="FF0000"/>
-              </a:solidFill>
-            </a:ln>
-          </p:spPr>
-          <p:txBody>
-            <a:bodyPr wrap="square" lIns="0" tIns="0" rIns="0" bIns="0" rtlCol="0"/>
-            <a:lstStyle/>
-            <a:p>
-              <a:endParaRPr/>
-            </a:p>
-          </p:txBody>
-        </p:sp>
-        <p:sp>
-          <p:nvSpPr>
-            <p:cNvPr id="35" name="object 35">
-              <a:extLst>
-                <a:ext uri="{FF2B5EF4-FFF2-40B4-BE49-F238E27FC236}">
-                  <a16:creationId xmlns:a16="http://schemas.microsoft.com/office/drawing/2014/main" id="{F420B6B0-1CF7-8172-96E6-0BDCC6ECB46C}"/>
-                </a:ext>
-              </a:extLst>
-            </p:cNvPr>
-            <p:cNvSpPr/>
-            <p:nvPr/>
-          </p:nvSpPr>
-          <p:spPr>
-            <a:xfrm>
-              <a:off x="3138677" y="5897879"/>
-              <a:ext cx="236220" cy="639445"/>
-            </a:xfrm>
-            <a:custGeom>
-              <a:avLst/>
-              <a:gdLst/>
-              <a:ahLst/>
-              <a:cxnLst/>
-              <a:rect l="l" t="t" r="r" b="b"/>
-              <a:pathLst>
-                <a:path w="236220" h="639445">
-                  <a:moveTo>
-                    <a:pt x="0" y="0"/>
-                  </a:moveTo>
-                  <a:lnTo>
-                    <a:pt x="236220" y="639318"/>
-                  </a:lnTo>
-                </a:path>
-              </a:pathLst>
-            </a:custGeom>
-            <a:ln w="50800">
-              <a:solidFill>
-                <a:srgbClr val="FF0000"/>
-              </a:solidFill>
-            </a:ln>
-          </p:spPr>
-          <p:txBody>
-            <a:bodyPr wrap="square" lIns="0" tIns="0" rIns="0" bIns="0" rtlCol="0"/>
-            <a:lstStyle/>
-            <a:p>
-              <a:endParaRPr/>
-            </a:p>
-          </p:txBody>
-        </p:sp>
-        <p:sp>
-          <p:nvSpPr>
-            <p:cNvPr id="36" name="object 36">
-              <a:extLst>
-                <a:ext uri="{FF2B5EF4-FFF2-40B4-BE49-F238E27FC236}">
-                  <a16:creationId xmlns:a16="http://schemas.microsoft.com/office/drawing/2014/main" id="{02D14200-C356-4704-97A3-0F2A051C1424}"/>
-                </a:ext>
-              </a:extLst>
-            </p:cNvPr>
-            <p:cNvSpPr/>
-            <p:nvPr/>
-          </p:nvSpPr>
-          <p:spPr>
-            <a:xfrm>
-              <a:off x="1719072" y="5791200"/>
-              <a:ext cx="1183005" cy="212725"/>
-            </a:xfrm>
-            <a:custGeom>
-              <a:avLst/>
-              <a:gdLst/>
-              <a:ahLst/>
-              <a:cxnLst/>
-              <a:rect l="l" t="t" r="r" b="b"/>
-              <a:pathLst>
-                <a:path w="1183005" h="212725">
-                  <a:moveTo>
-                    <a:pt x="0" y="212598"/>
-                  </a:moveTo>
-                  <a:lnTo>
-                    <a:pt x="1182624" y="0"/>
-                  </a:lnTo>
-                </a:path>
-              </a:pathLst>
-            </a:custGeom>
-            <a:ln w="50800">
-              <a:solidFill>
-                <a:srgbClr val="FF0000"/>
-              </a:solidFill>
-            </a:ln>
-          </p:spPr>
-          <p:txBody>
-            <a:bodyPr wrap="square" lIns="0" tIns="0" rIns="0" bIns="0" rtlCol="0"/>
-            <a:lstStyle/>
-            <a:p>
-              <a:endParaRPr/>
-            </a:p>
-          </p:txBody>
-        </p:sp>
-        <p:sp>
-          <p:nvSpPr>
-            <p:cNvPr id="37" name="object 37">
-              <a:extLst>
-                <a:ext uri="{FF2B5EF4-FFF2-40B4-BE49-F238E27FC236}">
-                  <a16:creationId xmlns:a16="http://schemas.microsoft.com/office/drawing/2014/main" id="{341E5C6B-E95C-AF94-DC28-1AE456D90206}"/>
-                </a:ext>
-              </a:extLst>
-            </p:cNvPr>
-            <p:cNvSpPr txBox="1"/>
-            <p:nvPr/>
-          </p:nvSpPr>
-          <p:spPr>
-            <a:xfrm>
-              <a:off x="1828292" y="3683253"/>
-              <a:ext cx="124460" cy="224790"/>
-            </a:xfrm>
-            <a:prstGeom prst="rect">
-              <a:avLst/>
-            </a:prstGeom>
-          </p:spPr>
-          <p:txBody>
-            <a:bodyPr vert="horz" wrap="square" lIns="0" tIns="0" rIns="0" bIns="0" rtlCol="0">
-              <a:spAutoFit/>
-            </a:bodyPr>
-            <a:lstStyle/>
-            <a:p>
-              <a:pPr marL="12700">
-                <a:lnSpc>
-                  <a:spcPct val="100000"/>
-                </a:lnSpc>
-              </a:pPr>
-              <a:r>
-                <a:rPr sz="1400" b="1" spc="-5" dirty="0">
-                  <a:latin typeface="Arial"/>
-                  <a:cs typeface="Arial"/>
-                </a:rPr>
-                <a:t>a</a:t>
-              </a:r>
-              <a:endParaRPr sz="1400">
-                <a:latin typeface="Arial"/>
-                <a:cs typeface="Arial"/>
-              </a:endParaRPr>
-            </a:p>
-          </p:txBody>
-        </p:sp>
-        <p:sp>
-          <p:nvSpPr>
-            <p:cNvPr id="38" name="object 38">
-              <a:extLst>
-                <a:ext uri="{FF2B5EF4-FFF2-40B4-BE49-F238E27FC236}">
-                  <a16:creationId xmlns:a16="http://schemas.microsoft.com/office/drawing/2014/main" id="{440DCD66-99D0-CF4A-E45E-914329C5A0D7}"/>
-                </a:ext>
-              </a:extLst>
-            </p:cNvPr>
-            <p:cNvSpPr txBox="1"/>
-            <p:nvPr/>
-          </p:nvSpPr>
-          <p:spPr>
-            <a:xfrm>
-              <a:off x="4462524" y="6045450"/>
-              <a:ext cx="74930" cy="224790"/>
-            </a:xfrm>
-            <a:prstGeom prst="rect">
-              <a:avLst/>
-            </a:prstGeom>
-          </p:spPr>
-          <p:txBody>
-            <a:bodyPr vert="horz" wrap="square" lIns="0" tIns="0" rIns="0" bIns="0" rtlCol="0">
-              <a:spAutoFit/>
-            </a:bodyPr>
-            <a:lstStyle/>
-            <a:p>
-              <a:pPr marL="12700">
-                <a:lnSpc>
-                  <a:spcPct val="100000"/>
-                </a:lnSpc>
-              </a:pPr>
-              <a:r>
-                <a:rPr sz="1400" b="1" spc="-5" dirty="0">
-                  <a:latin typeface="Arial"/>
-                  <a:cs typeface="Arial"/>
-                </a:rPr>
-                <a:t>i</a:t>
-              </a:r>
-              <a:endParaRPr sz="1400">
-                <a:latin typeface="Arial"/>
-                <a:cs typeface="Arial"/>
-              </a:endParaRPr>
-            </a:p>
-          </p:txBody>
-        </p:sp>
-        <p:sp>
-          <p:nvSpPr>
-            <p:cNvPr id="39" name="object 39">
-              <a:extLst>
-                <a:ext uri="{FF2B5EF4-FFF2-40B4-BE49-F238E27FC236}">
-                  <a16:creationId xmlns:a16="http://schemas.microsoft.com/office/drawing/2014/main" id="{B851F72C-ED19-FC8B-1C74-B163EDEC31C4}"/>
-                </a:ext>
-              </a:extLst>
-            </p:cNvPr>
-            <p:cNvSpPr txBox="1"/>
-            <p:nvPr/>
-          </p:nvSpPr>
-          <p:spPr>
-            <a:xfrm>
-              <a:off x="3362200" y="6559801"/>
-              <a:ext cx="133985" cy="224790"/>
-            </a:xfrm>
-            <a:prstGeom prst="rect">
-              <a:avLst/>
-            </a:prstGeom>
-          </p:spPr>
-          <p:txBody>
-            <a:bodyPr vert="horz" wrap="square" lIns="0" tIns="0" rIns="0" bIns="0" rtlCol="0">
-              <a:spAutoFit/>
-            </a:bodyPr>
-            <a:lstStyle/>
-            <a:p>
-              <a:pPr marL="12700">
-                <a:lnSpc>
-                  <a:spcPct val="100000"/>
-                </a:lnSpc>
-              </a:pPr>
-              <a:r>
-                <a:rPr sz="1400" b="1" spc="-5" dirty="0">
-                  <a:latin typeface="Arial"/>
-                  <a:cs typeface="Arial"/>
-                </a:rPr>
-                <a:t>g</a:t>
-              </a:r>
-              <a:endParaRPr sz="1400">
-                <a:latin typeface="Arial"/>
-                <a:cs typeface="Arial"/>
-              </a:endParaRPr>
-            </a:p>
-          </p:txBody>
-        </p:sp>
-        <p:sp>
-          <p:nvSpPr>
-            <p:cNvPr id="40" name="object 40">
-              <a:extLst>
-                <a:ext uri="{FF2B5EF4-FFF2-40B4-BE49-F238E27FC236}">
-                  <a16:creationId xmlns:a16="http://schemas.microsoft.com/office/drawing/2014/main" id="{18DB5500-544F-3752-313F-32AF7B2FDCBC}"/>
-                </a:ext>
-              </a:extLst>
-            </p:cNvPr>
-            <p:cNvSpPr txBox="1"/>
-            <p:nvPr/>
-          </p:nvSpPr>
-          <p:spPr>
-            <a:xfrm>
-              <a:off x="1481580" y="5954777"/>
-              <a:ext cx="85090" cy="224790"/>
-            </a:xfrm>
-            <a:prstGeom prst="rect">
-              <a:avLst/>
-            </a:prstGeom>
-          </p:spPr>
-          <p:txBody>
-            <a:bodyPr vert="horz" wrap="square" lIns="0" tIns="0" rIns="0" bIns="0" rtlCol="0">
-              <a:spAutoFit/>
-            </a:bodyPr>
-            <a:lstStyle/>
-            <a:p>
-              <a:pPr marL="12700">
-                <a:lnSpc>
-                  <a:spcPct val="100000"/>
-                </a:lnSpc>
-              </a:pPr>
-              <a:r>
-                <a:rPr sz="1400" b="1" spc="-5" dirty="0">
-                  <a:latin typeface="Arial"/>
-                  <a:cs typeface="Arial"/>
-                </a:rPr>
-                <a:t>f</a:t>
-              </a:r>
-              <a:endParaRPr sz="1400">
-                <a:latin typeface="Arial"/>
-                <a:cs typeface="Arial"/>
-              </a:endParaRPr>
-            </a:p>
-          </p:txBody>
-        </p:sp>
-        <p:sp>
-          <p:nvSpPr>
-            <p:cNvPr id="41" name="object 41">
-              <a:extLst>
-                <a:ext uri="{FF2B5EF4-FFF2-40B4-BE49-F238E27FC236}">
-                  <a16:creationId xmlns:a16="http://schemas.microsoft.com/office/drawing/2014/main" id="{940139D4-29FC-540C-DB25-106D2D84788A}"/>
-                </a:ext>
-              </a:extLst>
-            </p:cNvPr>
-            <p:cNvSpPr txBox="1"/>
-            <p:nvPr/>
-          </p:nvSpPr>
-          <p:spPr>
-            <a:xfrm>
-              <a:off x="3028432" y="5616445"/>
-              <a:ext cx="124460" cy="224790"/>
-            </a:xfrm>
-            <a:prstGeom prst="rect">
-              <a:avLst/>
-            </a:prstGeom>
-          </p:spPr>
-          <p:txBody>
-            <a:bodyPr vert="horz" wrap="square" lIns="0" tIns="0" rIns="0" bIns="0" rtlCol="0">
-              <a:spAutoFit/>
-            </a:bodyPr>
-            <a:lstStyle/>
-            <a:p>
-              <a:pPr marL="12700">
-                <a:lnSpc>
-                  <a:spcPct val="100000"/>
-                </a:lnSpc>
-              </a:pPr>
-              <a:r>
-                <a:rPr sz="1400" b="1" spc="-5" dirty="0">
-                  <a:latin typeface="Arial"/>
-                  <a:cs typeface="Arial"/>
-                </a:rPr>
-                <a:t>e</a:t>
-              </a:r>
-              <a:endParaRPr sz="1400">
-                <a:latin typeface="Arial"/>
-                <a:cs typeface="Arial"/>
-              </a:endParaRPr>
-            </a:p>
-          </p:txBody>
-        </p:sp>
-        <p:sp>
-          <p:nvSpPr>
-            <p:cNvPr id="42" name="object 42">
-              <a:extLst>
-                <a:ext uri="{FF2B5EF4-FFF2-40B4-BE49-F238E27FC236}">
-                  <a16:creationId xmlns:a16="http://schemas.microsoft.com/office/drawing/2014/main" id="{4CFFAFDE-F26E-1D8C-6AFA-918CA8D1DB36}"/>
-                </a:ext>
-              </a:extLst>
-            </p:cNvPr>
-            <p:cNvSpPr txBox="1"/>
-            <p:nvPr/>
-          </p:nvSpPr>
-          <p:spPr>
-            <a:xfrm>
-              <a:off x="2771629" y="4564130"/>
-              <a:ext cx="133985" cy="224790"/>
-            </a:xfrm>
-            <a:prstGeom prst="rect">
-              <a:avLst/>
-            </a:prstGeom>
-          </p:spPr>
-          <p:txBody>
-            <a:bodyPr vert="horz" wrap="square" lIns="0" tIns="0" rIns="0" bIns="0" rtlCol="0">
-              <a:spAutoFit/>
-            </a:bodyPr>
-            <a:lstStyle/>
-            <a:p>
-              <a:pPr marL="12700">
-                <a:lnSpc>
-                  <a:spcPct val="100000"/>
-                </a:lnSpc>
-              </a:pPr>
-              <a:r>
-                <a:rPr sz="1400" b="1" spc="-5" dirty="0">
-                  <a:latin typeface="Arial"/>
-                  <a:cs typeface="Arial"/>
-                </a:rPr>
-                <a:t>d</a:t>
-              </a:r>
-              <a:endParaRPr sz="1400">
-                <a:latin typeface="Arial"/>
-                <a:cs typeface="Arial"/>
-              </a:endParaRPr>
-            </a:p>
-          </p:txBody>
-        </p:sp>
-        <p:sp>
-          <p:nvSpPr>
-            <p:cNvPr id="43" name="object 43">
-              <a:extLst>
-                <a:ext uri="{FF2B5EF4-FFF2-40B4-BE49-F238E27FC236}">
-                  <a16:creationId xmlns:a16="http://schemas.microsoft.com/office/drawing/2014/main" id="{2955A8C3-9140-C0A9-0ED9-25C106631116}"/>
-                </a:ext>
-              </a:extLst>
-            </p:cNvPr>
-            <p:cNvSpPr txBox="1"/>
-            <p:nvPr/>
-          </p:nvSpPr>
-          <p:spPr>
-            <a:xfrm>
-              <a:off x="1247627" y="4854454"/>
-              <a:ext cx="124460" cy="224790"/>
-            </a:xfrm>
-            <a:prstGeom prst="rect">
-              <a:avLst/>
-            </a:prstGeom>
-          </p:spPr>
-          <p:txBody>
-            <a:bodyPr vert="horz" wrap="square" lIns="0" tIns="0" rIns="0" bIns="0" rtlCol="0">
-              <a:spAutoFit/>
-            </a:bodyPr>
-            <a:lstStyle/>
-            <a:p>
-              <a:pPr marL="12700">
-                <a:lnSpc>
-                  <a:spcPct val="100000"/>
-                </a:lnSpc>
-              </a:pPr>
-              <a:r>
-                <a:rPr sz="1400" b="1" spc="-5" dirty="0">
-                  <a:latin typeface="Arial"/>
-                  <a:cs typeface="Arial"/>
-                </a:rPr>
-                <a:t>c</a:t>
-              </a:r>
-              <a:endParaRPr sz="1400">
-                <a:latin typeface="Arial"/>
-                <a:cs typeface="Arial"/>
-              </a:endParaRPr>
-            </a:p>
-          </p:txBody>
-        </p:sp>
-        <p:sp>
-          <p:nvSpPr>
-            <p:cNvPr id="44" name="object 44">
-              <a:extLst>
-                <a:ext uri="{FF2B5EF4-FFF2-40B4-BE49-F238E27FC236}">
-                  <a16:creationId xmlns:a16="http://schemas.microsoft.com/office/drawing/2014/main" id="{8CB54AB6-A582-D7DB-BD8D-EF5E033E462A}"/>
-                </a:ext>
-              </a:extLst>
-            </p:cNvPr>
-            <p:cNvSpPr txBox="1"/>
-            <p:nvPr/>
-          </p:nvSpPr>
-          <p:spPr>
-            <a:xfrm>
-              <a:off x="3728691" y="3911862"/>
-              <a:ext cx="133985" cy="224790"/>
-            </a:xfrm>
-            <a:prstGeom prst="rect">
-              <a:avLst/>
-            </a:prstGeom>
-          </p:spPr>
-          <p:txBody>
-            <a:bodyPr vert="horz" wrap="square" lIns="0" tIns="0" rIns="0" bIns="0" rtlCol="0">
-              <a:spAutoFit/>
-            </a:bodyPr>
-            <a:lstStyle/>
-            <a:p>
-              <a:pPr marL="12700">
-                <a:lnSpc>
-                  <a:spcPct val="100000"/>
-                </a:lnSpc>
-              </a:pPr>
-              <a:r>
-                <a:rPr sz="1400" b="1" spc="-5" dirty="0">
-                  <a:latin typeface="Arial"/>
-                  <a:cs typeface="Arial"/>
-                </a:rPr>
-                <a:t>b</a:t>
-              </a:r>
-              <a:endParaRPr sz="1400">
-                <a:latin typeface="Arial"/>
-                <a:cs typeface="Arial"/>
-              </a:endParaRPr>
-            </a:p>
-          </p:txBody>
-        </p:sp>
-        <p:sp>
-          <p:nvSpPr>
-            <p:cNvPr id="45" name="object 45">
-              <a:extLst>
-                <a:ext uri="{FF2B5EF4-FFF2-40B4-BE49-F238E27FC236}">
-                  <a16:creationId xmlns:a16="http://schemas.microsoft.com/office/drawing/2014/main" id="{CEC9B9AA-6217-6D1E-E128-926406D531EF}"/>
-                </a:ext>
-              </a:extLst>
-            </p:cNvPr>
-            <p:cNvSpPr txBox="1"/>
-            <p:nvPr/>
-          </p:nvSpPr>
-          <p:spPr>
-            <a:xfrm>
-              <a:off x="4786350" y="4993135"/>
-              <a:ext cx="133985" cy="224790"/>
-            </a:xfrm>
-            <a:prstGeom prst="rect">
-              <a:avLst/>
-            </a:prstGeom>
-          </p:spPr>
-          <p:txBody>
-            <a:bodyPr vert="horz" wrap="square" lIns="0" tIns="0" rIns="0" bIns="0" rtlCol="0">
-              <a:spAutoFit/>
-            </a:bodyPr>
-            <a:lstStyle/>
-            <a:p>
-              <a:pPr marL="12700">
-                <a:lnSpc>
-                  <a:spcPct val="100000"/>
-                </a:lnSpc>
-              </a:pPr>
-              <a:r>
-                <a:rPr sz="1400" b="1" spc="-5" dirty="0">
-                  <a:latin typeface="Arial"/>
-                  <a:cs typeface="Arial"/>
-                </a:rPr>
-                <a:t>h</a:t>
-              </a:r>
-              <a:endParaRPr sz="1400">
-                <a:latin typeface="Arial"/>
-                <a:cs typeface="Arial"/>
-              </a:endParaRPr>
-            </a:p>
-          </p:txBody>
-        </p:sp>
-        <p:sp>
-          <p:nvSpPr>
-            <p:cNvPr id="46" name="object 46">
-              <a:extLst>
-                <a:ext uri="{FF2B5EF4-FFF2-40B4-BE49-F238E27FC236}">
-                  <a16:creationId xmlns:a16="http://schemas.microsoft.com/office/drawing/2014/main" id="{26A67BFD-7384-DA4B-7345-42E8B1249E11}"/>
-                </a:ext>
-              </a:extLst>
-            </p:cNvPr>
-            <p:cNvSpPr txBox="1"/>
-            <p:nvPr/>
-          </p:nvSpPr>
-          <p:spPr>
-            <a:xfrm>
-              <a:off x="1388617" y="4233671"/>
-              <a:ext cx="194945" cy="194310"/>
-            </a:xfrm>
-            <a:prstGeom prst="rect">
-              <a:avLst/>
-            </a:prstGeom>
-          </p:spPr>
-          <p:txBody>
-            <a:bodyPr vert="horz" wrap="square" lIns="0" tIns="0" rIns="0" bIns="0" rtlCol="0">
-              <a:spAutoFit/>
-            </a:bodyPr>
-            <a:lstStyle/>
-            <a:p>
-              <a:pPr marL="12700">
-                <a:lnSpc>
-                  <a:spcPct val="100000"/>
-                </a:lnSpc>
-              </a:pPr>
-              <a:r>
-                <a:rPr sz="1200" b="1" spc="-10" dirty="0">
-                  <a:latin typeface="Arial"/>
-                  <a:cs typeface="Arial"/>
-                </a:rPr>
-                <a:t>25</a:t>
-              </a:r>
-              <a:endParaRPr sz="1200">
-                <a:latin typeface="Arial"/>
-                <a:cs typeface="Arial"/>
-              </a:endParaRPr>
-            </a:p>
-          </p:txBody>
-        </p:sp>
-        <p:sp>
-          <p:nvSpPr>
-            <p:cNvPr id="47" name="object 47">
-              <a:extLst>
-                <a:ext uri="{FF2B5EF4-FFF2-40B4-BE49-F238E27FC236}">
-                  <a16:creationId xmlns:a16="http://schemas.microsoft.com/office/drawing/2014/main" id="{F9273E4E-3AB4-789A-8CD8-1DDC399F3637}"/>
-                </a:ext>
-              </a:extLst>
-            </p:cNvPr>
-            <p:cNvSpPr txBox="1"/>
-            <p:nvPr/>
-          </p:nvSpPr>
-          <p:spPr>
-            <a:xfrm>
-              <a:off x="2607817" y="3700271"/>
-              <a:ext cx="194945" cy="194310"/>
-            </a:xfrm>
-            <a:prstGeom prst="rect">
-              <a:avLst/>
-            </a:prstGeom>
-          </p:spPr>
-          <p:txBody>
-            <a:bodyPr vert="horz" wrap="square" lIns="0" tIns="0" rIns="0" bIns="0" rtlCol="0">
-              <a:spAutoFit/>
-            </a:bodyPr>
-            <a:lstStyle/>
-            <a:p>
-              <a:pPr marL="12700">
-                <a:lnSpc>
-                  <a:spcPct val="100000"/>
-                </a:lnSpc>
-              </a:pPr>
-              <a:r>
-                <a:rPr sz="1200" b="1" spc="-10" dirty="0">
-                  <a:latin typeface="Arial"/>
-                  <a:cs typeface="Arial"/>
-                </a:rPr>
-                <a:t>15</a:t>
-              </a:r>
-              <a:endParaRPr sz="1200">
-                <a:latin typeface="Arial"/>
-                <a:cs typeface="Arial"/>
-              </a:endParaRPr>
-            </a:p>
-          </p:txBody>
-        </p:sp>
-        <p:sp>
-          <p:nvSpPr>
-            <p:cNvPr id="48" name="object 48">
-              <a:extLst>
-                <a:ext uri="{FF2B5EF4-FFF2-40B4-BE49-F238E27FC236}">
-                  <a16:creationId xmlns:a16="http://schemas.microsoft.com/office/drawing/2014/main" id="{EBDA2B22-AD92-8EDC-6391-0D48FE8E953E}"/>
-                </a:ext>
-              </a:extLst>
-            </p:cNvPr>
-            <p:cNvSpPr txBox="1"/>
-            <p:nvPr/>
-          </p:nvSpPr>
-          <p:spPr>
-            <a:xfrm>
-              <a:off x="1998217" y="5757671"/>
-              <a:ext cx="194945" cy="194310"/>
-            </a:xfrm>
-            <a:prstGeom prst="rect">
-              <a:avLst/>
-            </a:prstGeom>
-          </p:spPr>
-          <p:txBody>
-            <a:bodyPr vert="horz" wrap="square" lIns="0" tIns="0" rIns="0" bIns="0" rtlCol="0">
-              <a:spAutoFit/>
-            </a:bodyPr>
-            <a:lstStyle/>
-            <a:p>
-              <a:pPr marL="12700">
-                <a:lnSpc>
-                  <a:spcPct val="100000"/>
-                </a:lnSpc>
-              </a:pPr>
-              <a:r>
-                <a:rPr sz="1200" b="1" spc="-10" dirty="0">
-                  <a:latin typeface="Arial"/>
-                  <a:cs typeface="Arial"/>
-                </a:rPr>
-                <a:t>10</a:t>
-              </a:r>
-              <a:endParaRPr sz="1200">
-                <a:latin typeface="Arial"/>
-                <a:cs typeface="Arial"/>
-              </a:endParaRPr>
-            </a:p>
-          </p:txBody>
-        </p:sp>
-        <p:sp>
-          <p:nvSpPr>
-            <p:cNvPr id="49" name="object 49">
-              <a:extLst>
-                <a:ext uri="{FF2B5EF4-FFF2-40B4-BE49-F238E27FC236}">
-                  <a16:creationId xmlns:a16="http://schemas.microsoft.com/office/drawing/2014/main" id="{5BC82091-CCD3-5645-85BC-EE4B8AF77292}"/>
-                </a:ext>
-              </a:extLst>
-            </p:cNvPr>
-            <p:cNvSpPr txBox="1"/>
-            <p:nvPr/>
-          </p:nvSpPr>
-          <p:spPr>
-            <a:xfrm>
-              <a:off x="3335528" y="6062471"/>
-              <a:ext cx="110489" cy="194310"/>
-            </a:xfrm>
-            <a:prstGeom prst="rect">
-              <a:avLst/>
-            </a:prstGeom>
-          </p:spPr>
-          <p:txBody>
-            <a:bodyPr vert="horz" wrap="square" lIns="0" tIns="0" rIns="0" bIns="0" rtlCol="0">
-              <a:spAutoFit/>
-            </a:bodyPr>
-            <a:lstStyle/>
-            <a:p>
-              <a:pPr marL="12700">
-                <a:lnSpc>
-                  <a:spcPct val="100000"/>
-                </a:lnSpc>
-              </a:pPr>
-              <a:r>
-                <a:rPr sz="1200" b="1" spc="-5" dirty="0">
-                  <a:latin typeface="Arial"/>
-                  <a:cs typeface="Arial"/>
-                </a:rPr>
-                <a:t>5</a:t>
-              </a:r>
-              <a:endParaRPr sz="1200">
-                <a:latin typeface="Arial"/>
-                <a:cs typeface="Arial"/>
-              </a:endParaRPr>
-            </a:p>
-          </p:txBody>
-        </p:sp>
-        <p:sp>
-          <p:nvSpPr>
-            <p:cNvPr id="50" name="object 50">
-              <a:extLst>
-                <a:ext uri="{FF2B5EF4-FFF2-40B4-BE49-F238E27FC236}">
-                  <a16:creationId xmlns:a16="http://schemas.microsoft.com/office/drawing/2014/main" id="{5567D43E-A920-5FCC-D20E-B266E6349424}"/>
-                </a:ext>
-              </a:extLst>
-            </p:cNvPr>
-            <p:cNvSpPr txBox="1"/>
-            <p:nvPr/>
-          </p:nvSpPr>
-          <p:spPr>
-            <a:xfrm>
-              <a:off x="3217417" y="4843271"/>
-              <a:ext cx="194945" cy="194310"/>
-            </a:xfrm>
-            <a:prstGeom prst="rect">
-              <a:avLst/>
-            </a:prstGeom>
-          </p:spPr>
-          <p:txBody>
-            <a:bodyPr vert="horz" wrap="square" lIns="0" tIns="0" rIns="0" bIns="0" rtlCol="0">
-              <a:spAutoFit/>
-            </a:bodyPr>
-            <a:lstStyle/>
-            <a:p>
-              <a:pPr marL="12700">
-                <a:lnSpc>
-                  <a:spcPct val="100000"/>
-                </a:lnSpc>
-              </a:pPr>
-              <a:r>
-                <a:rPr sz="1200" b="1" spc="-10" dirty="0">
-                  <a:latin typeface="Arial"/>
-                  <a:cs typeface="Arial"/>
-                </a:rPr>
-                <a:t>10</a:t>
-              </a:r>
-              <a:endParaRPr sz="1200">
-                <a:latin typeface="Arial"/>
-                <a:cs typeface="Arial"/>
-              </a:endParaRPr>
-            </a:p>
-          </p:txBody>
-        </p:sp>
-        <p:sp>
-          <p:nvSpPr>
-            <p:cNvPr id="51" name="object 51">
-              <a:extLst>
-                <a:ext uri="{FF2B5EF4-FFF2-40B4-BE49-F238E27FC236}">
-                  <a16:creationId xmlns:a16="http://schemas.microsoft.com/office/drawing/2014/main" id="{261ADCAB-C509-BFBB-4841-E1364BB5F212}"/>
-                </a:ext>
-              </a:extLst>
-            </p:cNvPr>
-            <p:cNvSpPr txBox="1"/>
-            <p:nvPr/>
-          </p:nvSpPr>
-          <p:spPr>
-            <a:xfrm>
-              <a:off x="1922017" y="5300471"/>
-              <a:ext cx="194945" cy="194310"/>
-            </a:xfrm>
-            <a:prstGeom prst="rect">
-              <a:avLst/>
-            </a:prstGeom>
-          </p:spPr>
-          <p:txBody>
-            <a:bodyPr vert="horz" wrap="square" lIns="0" tIns="0" rIns="0" bIns="0" rtlCol="0">
-              <a:spAutoFit/>
-            </a:bodyPr>
-            <a:lstStyle/>
-            <a:p>
-              <a:pPr marL="12700">
-                <a:lnSpc>
-                  <a:spcPct val="100000"/>
-                </a:lnSpc>
-              </a:pPr>
-              <a:r>
-                <a:rPr sz="1200" b="1" spc="-10" dirty="0">
-                  <a:latin typeface="Arial"/>
-                  <a:cs typeface="Arial"/>
-                </a:rPr>
-                <a:t>20</a:t>
-              </a:r>
-              <a:endParaRPr sz="1200">
-                <a:latin typeface="Arial"/>
-                <a:cs typeface="Arial"/>
-              </a:endParaRPr>
-            </a:p>
-          </p:txBody>
-        </p:sp>
-        <p:sp>
-          <p:nvSpPr>
-            <p:cNvPr id="52" name="object 52">
-              <a:extLst>
-                <a:ext uri="{FF2B5EF4-FFF2-40B4-BE49-F238E27FC236}">
-                  <a16:creationId xmlns:a16="http://schemas.microsoft.com/office/drawing/2014/main" id="{D4C50699-69BB-F7B1-4882-8DCE8C150772}"/>
-                </a:ext>
-              </a:extLst>
-            </p:cNvPr>
-            <p:cNvSpPr txBox="1"/>
-            <p:nvPr/>
-          </p:nvSpPr>
-          <p:spPr>
-            <a:xfrm>
-              <a:off x="4741417" y="5605271"/>
-              <a:ext cx="194945" cy="194310"/>
-            </a:xfrm>
-            <a:prstGeom prst="rect">
-              <a:avLst/>
-            </a:prstGeom>
-          </p:spPr>
-          <p:txBody>
-            <a:bodyPr vert="horz" wrap="square" lIns="0" tIns="0" rIns="0" bIns="0" rtlCol="0">
-              <a:spAutoFit/>
-            </a:bodyPr>
-            <a:lstStyle/>
-            <a:p>
-              <a:pPr marL="12700">
-                <a:lnSpc>
-                  <a:spcPct val="100000"/>
-                </a:lnSpc>
-              </a:pPr>
-              <a:r>
-                <a:rPr sz="1200" b="1" spc="-10" dirty="0">
-                  <a:latin typeface="Arial"/>
-                  <a:cs typeface="Arial"/>
-                </a:rPr>
-                <a:t>15</a:t>
-              </a:r>
-              <a:endParaRPr sz="1200">
-                <a:latin typeface="Arial"/>
-                <a:cs typeface="Arial"/>
-              </a:endParaRPr>
-            </a:p>
-          </p:txBody>
-        </p:sp>
-        <p:sp>
-          <p:nvSpPr>
-            <p:cNvPr id="53" name="object 53">
-              <a:extLst>
-                <a:ext uri="{FF2B5EF4-FFF2-40B4-BE49-F238E27FC236}">
-                  <a16:creationId xmlns:a16="http://schemas.microsoft.com/office/drawing/2014/main" id="{7ED6DFFD-0294-31FE-B0C0-E58FB44E9A8F}"/>
-                </a:ext>
-              </a:extLst>
-            </p:cNvPr>
-            <p:cNvSpPr txBox="1"/>
-            <p:nvPr/>
-          </p:nvSpPr>
-          <p:spPr>
-            <a:xfrm>
-              <a:off x="4326128" y="4386071"/>
-              <a:ext cx="110489" cy="194310"/>
-            </a:xfrm>
-            <a:prstGeom prst="rect">
-              <a:avLst/>
-            </a:prstGeom>
-          </p:spPr>
-          <p:txBody>
-            <a:bodyPr vert="horz" wrap="square" lIns="0" tIns="0" rIns="0" bIns="0" rtlCol="0">
-              <a:spAutoFit/>
-            </a:bodyPr>
-            <a:lstStyle/>
-            <a:p>
-              <a:pPr marL="12700">
-                <a:lnSpc>
-                  <a:spcPct val="100000"/>
-                </a:lnSpc>
-              </a:pPr>
-              <a:r>
-                <a:rPr sz="1200" b="1" spc="-5" dirty="0">
-                  <a:latin typeface="Arial"/>
-                  <a:cs typeface="Arial"/>
-                </a:rPr>
-                <a:t>5</a:t>
-              </a:r>
-              <a:endParaRPr sz="1200">
-                <a:latin typeface="Arial"/>
-                <a:cs typeface="Arial"/>
-              </a:endParaRPr>
-            </a:p>
-          </p:txBody>
-        </p:sp>
-        <p:sp>
-          <p:nvSpPr>
-            <p:cNvPr id="54" name="object 54">
-              <a:extLst>
-                <a:ext uri="{FF2B5EF4-FFF2-40B4-BE49-F238E27FC236}">
-                  <a16:creationId xmlns:a16="http://schemas.microsoft.com/office/drawing/2014/main" id="{B7EAF7EB-34DB-C1B6-BF22-7A6C5D2FAD48}"/>
-                </a:ext>
-              </a:extLst>
-            </p:cNvPr>
-            <p:cNvSpPr txBox="1"/>
-            <p:nvPr/>
-          </p:nvSpPr>
-          <p:spPr>
-            <a:xfrm>
-              <a:off x="3903217" y="5071871"/>
-              <a:ext cx="194945" cy="194310"/>
-            </a:xfrm>
-            <a:prstGeom prst="rect">
-              <a:avLst/>
-            </a:prstGeom>
-          </p:spPr>
-          <p:txBody>
-            <a:bodyPr vert="horz" wrap="square" lIns="0" tIns="0" rIns="0" bIns="0" rtlCol="0">
-              <a:spAutoFit/>
-            </a:bodyPr>
-            <a:lstStyle/>
-            <a:p>
-              <a:pPr marL="12700">
-                <a:lnSpc>
-                  <a:spcPct val="100000"/>
-                </a:lnSpc>
-              </a:pPr>
-              <a:r>
-                <a:rPr sz="1200" b="1" spc="-10" dirty="0">
-                  <a:latin typeface="Arial"/>
-                  <a:cs typeface="Arial"/>
-                </a:rPr>
-                <a:t>25</a:t>
-              </a:r>
-              <a:endParaRPr sz="1200">
-                <a:latin typeface="Arial"/>
-                <a:cs typeface="Arial"/>
-              </a:endParaRPr>
-            </a:p>
-          </p:txBody>
-        </p:sp>
-        <p:sp>
-          <p:nvSpPr>
-            <p:cNvPr id="55" name="object 55">
-              <a:extLst>
-                <a:ext uri="{FF2B5EF4-FFF2-40B4-BE49-F238E27FC236}">
-                  <a16:creationId xmlns:a16="http://schemas.microsoft.com/office/drawing/2014/main" id="{05D2B95A-E0B5-4B71-E1CE-39150CA8B4E3}"/>
-                </a:ext>
-              </a:extLst>
-            </p:cNvPr>
-            <p:cNvSpPr txBox="1"/>
-            <p:nvPr/>
-          </p:nvSpPr>
-          <p:spPr>
-            <a:xfrm>
-              <a:off x="1922017" y="4614671"/>
-              <a:ext cx="194945" cy="194310"/>
-            </a:xfrm>
-            <a:prstGeom prst="rect">
-              <a:avLst/>
-            </a:prstGeom>
-          </p:spPr>
-          <p:txBody>
-            <a:bodyPr vert="horz" wrap="square" lIns="0" tIns="0" rIns="0" bIns="0" rtlCol="0">
-              <a:spAutoFit/>
-            </a:bodyPr>
-            <a:lstStyle/>
-            <a:p>
-              <a:pPr marL="12700">
-                <a:lnSpc>
-                  <a:spcPct val="100000"/>
-                </a:lnSpc>
-              </a:pPr>
-              <a:r>
-                <a:rPr sz="1200" b="1" spc="-10" dirty="0">
-                  <a:latin typeface="Arial"/>
-                  <a:cs typeface="Arial"/>
-                </a:rPr>
-                <a:t>10</a:t>
-              </a:r>
-              <a:endParaRPr sz="1200">
-                <a:latin typeface="Arial"/>
-                <a:cs typeface="Arial"/>
-              </a:endParaRPr>
-            </a:p>
-          </p:txBody>
-        </p:sp>
-      </p:grpSp>
-      <p:sp>
-        <p:nvSpPr>
-          <p:cNvPr id="56" name="object 56">
-            <a:extLst>
-              <a:ext uri="{FF2B5EF4-FFF2-40B4-BE49-F238E27FC236}">
-                <a16:creationId xmlns:a16="http://schemas.microsoft.com/office/drawing/2014/main" id="{8E666950-F6C2-A16D-0B4F-BD3A850BA305}"/>
-              </a:ext>
-            </a:extLst>
-          </p:cNvPr>
-          <p:cNvSpPr txBox="1"/>
-          <p:nvPr/>
-        </p:nvSpPr>
-        <p:spPr>
-          <a:xfrm>
-            <a:off x="1276213" y="3307254"/>
-            <a:ext cx="3552825" cy="1846659"/>
-          </a:xfrm>
-          <a:prstGeom prst="rect">
-            <a:avLst/>
-          </a:prstGeom>
-        </p:spPr>
-        <p:txBody>
-          <a:bodyPr vert="horz" wrap="square" lIns="0" tIns="0" rIns="0" bIns="0" rtlCol="0">
-            <a:spAutoFit/>
-          </a:bodyPr>
-          <a:lstStyle/>
-          <a:p>
-            <a:pPr marL="12700" marR="5080">
-              <a:lnSpc>
-                <a:spcPct val="100000"/>
-              </a:lnSpc>
-            </a:pPr>
-            <a:r>
-              <a:rPr sz="2000" spc="-5" dirty="0">
-                <a:latin typeface="Times New Roman"/>
-                <a:cs typeface="Times New Roman"/>
-              </a:rPr>
-              <a:t>The corresponding tree is shown  </a:t>
-            </a:r>
-            <a:r>
-              <a:rPr lang="en-US" sz="2000" spc="-5" dirty="0">
-                <a:latin typeface="Times New Roman"/>
-                <a:cs typeface="Times New Roman"/>
-              </a:rPr>
-              <a:t>and isn’t the minimum spanning tree for this graph. </a:t>
-            </a:r>
-            <a:br>
-              <a:rPr lang="en-US" sz="2000" spc="-5" dirty="0">
-                <a:latin typeface="Times New Roman"/>
-                <a:cs typeface="Times New Roman"/>
-              </a:rPr>
-            </a:br>
-            <a:r>
-              <a:rPr lang="en-US" sz="2000" spc="-5" dirty="0">
-                <a:latin typeface="Times New Roman"/>
-                <a:cs typeface="Times New Roman"/>
-              </a:rPr>
-              <a:t>I.e., it doesn’t have the least sum of weights possible</a:t>
-            </a:r>
-            <a:r>
-              <a:rPr sz="2000" spc="-5" dirty="0">
-                <a:latin typeface="Times New Roman"/>
-                <a:cs typeface="Times New Roman"/>
-              </a:rPr>
-              <a:t>. </a:t>
-            </a:r>
-            <a:r>
-              <a:rPr lang="en-US" sz="2000" spc="-5" dirty="0">
-                <a:latin typeface="Times New Roman"/>
-                <a:cs typeface="Times New Roman"/>
-              </a:rPr>
-              <a:t>For that we need to use Prim’s algorithm.</a:t>
-            </a:r>
-            <a:endParaRPr sz="2000" dirty="0">
-              <a:latin typeface="Times New Roman"/>
-              <a:cs typeface="Times New Roman"/>
+            <a:endParaRPr lang="en-US" sz="5400" dirty="0">
+              <a:effectLst/>
+              <a:latin typeface="Aptos" panose="020B0004020202020204" pitchFamily="34" charset="0"/>
+              <a:ea typeface="Aptos" panose="020B0004020202020204" pitchFamily="34" charset="0"/>
+              <a:cs typeface="Aptos" panose="020B0004020202020204" pitchFamily="34" charset="0"/>
             </a:endParaRPr>
           </a:p>
         </p:txBody>
       </p:sp>
     </p:spTree>
+    <p:extLst>
+      <p:ext uri="{BB962C8B-B14F-4D97-AF65-F5344CB8AC3E}">
+        <p14:creationId xmlns:p14="http://schemas.microsoft.com/office/powerpoint/2010/main" val="4222541111"/>
+      </p:ext>
+    </p:extLst>
   </p:cSld>
   <p:clrMapOvr>
     <a:masterClrMapping/>
